--- a/resources/Лазарев.pptx
+++ b/resources/Лазарев.pptx
@@ -3769,7 +3769,7 @@
         <p:spPr>
           <a:xfrm>
             <a:off x="444651" y="562831"/>
-            <a:ext cx="6636054" cy="1923172"/>
+            <a:ext cx="6636054" cy="921840"/>
           </a:xfrm>
           <a:prstGeom prst="rect">
             <a:avLst/>
@@ -3805,6 +3805,120 @@
                 <a:cs typeface="Times New Roman" panose="02020603050405020304" pitchFamily="18" charset="0"/>
               </a:rPr>
               <a:t>Постановка задачи</a:t>
+            </a:r>
+          </a:p>
+        </p:txBody>
+      </p:sp>
+      <p:sp>
+        <p:nvSpPr>
+          <p:cNvPr id="3" name="Заголовок 1">
+            <a:extLst>
+              <a:ext uri="{FF2B5EF4-FFF2-40B4-BE49-F238E27FC236}">
+                <a16:creationId xmlns:a16="http://schemas.microsoft.com/office/drawing/2014/main" id="{C7080349-B165-433D-88F5-ABDB2354CFC3}"/>
+              </a:ext>
+            </a:extLst>
+          </p:cNvPr>
+          <p:cNvSpPr txBox="1">
+            <a:spLocks/>
+          </p:cNvSpPr>
+          <p:nvPr/>
+        </p:nvSpPr>
+        <p:spPr>
+          <a:xfrm>
+            <a:off x="901851" y="1914766"/>
+            <a:ext cx="3414510" cy="533466"/>
+          </a:xfrm>
+          <a:prstGeom prst="rect">
+            <a:avLst/>
+          </a:prstGeom>
+        </p:spPr>
+        <p:txBody>
+          <a:bodyPr>
+            <a:noAutofit/>
+          </a:bodyPr>
+          <a:lstStyle>
+            <a:lvl1pPr algn="l" defTabSz="914400" rtl="0" eaLnBrk="1" latinLnBrk="0" hangingPunct="1">
+              <a:lnSpc>
+                <a:spcPct val="90000"/>
+              </a:lnSpc>
+              <a:spcBef>
+                <a:spcPct val="0"/>
+              </a:spcBef>
+              <a:buNone/>
+              <a:defRPr sz="4400" kern="1200">
+                <a:solidFill>
+                  <a:schemeClr val="tx1"/>
+                </a:solidFill>
+                <a:latin typeface="+mj-lt"/>
+                <a:ea typeface="+mj-ea"/>
+                <a:cs typeface="+mj-cs"/>
+              </a:defRPr>
+            </a:lvl1pPr>
+          </a:lstStyle>
+          <a:p>
+            <a:r>
+              <a:rPr lang="ru-RU" sz="2800" dirty="0">
+                <a:latin typeface="Times New Roman" panose="02020603050405020304" pitchFamily="18" charset="0"/>
+                <a:cs typeface="Times New Roman" panose="02020603050405020304" pitchFamily="18" charset="0"/>
+              </a:rPr>
+              <a:t>Граничные условия:</a:t>
+            </a:r>
+          </a:p>
+        </p:txBody>
+      </p:sp>
+      <p:sp>
+        <p:nvSpPr>
+          <p:cNvPr id="4" name="Заголовок 1">
+            <a:extLst>
+              <a:ext uri="{FF2B5EF4-FFF2-40B4-BE49-F238E27FC236}">
+                <a16:creationId xmlns:a16="http://schemas.microsoft.com/office/drawing/2014/main" id="{B2700099-36AF-4C5C-B1FD-E18364AF4630}"/>
+              </a:ext>
+            </a:extLst>
+          </p:cNvPr>
+          <p:cNvSpPr txBox="1">
+            <a:spLocks/>
+          </p:cNvSpPr>
+          <p:nvPr/>
+        </p:nvSpPr>
+        <p:spPr>
+          <a:xfrm>
+            <a:off x="901851" y="4222956"/>
+            <a:ext cx="3414510" cy="533466"/>
+          </a:xfrm>
+          <a:prstGeom prst="rect">
+            <a:avLst/>
+          </a:prstGeom>
+        </p:spPr>
+        <p:txBody>
+          <a:bodyPr>
+            <a:noAutofit/>
+          </a:bodyPr>
+          <a:lstStyle>
+            <a:lvl1pPr algn="l" defTabSz="914400" rtl="0" eaLnBrk="1" latinLnBrk="0" hangingPunct="1">
+              <a:lnSpc>
+                <a:spcPct val="90000"/>
+              </a:lnSpc>
+              <a:spcBef>
+                <a:spcPct val="0"/>
+              </a:spcBef>
+              <a:buNone/>
+              <a:defRPr sz="4400" kern="1200">
+                <a:solidFill>
+                  <a:schemeClr val="tx1"/>
+                </a:solidFill>
+                <a:latin typeface="+mj-lt"/>
+                <a:ea typeface="+mj-ea"/>
+                <a:cs typeface="+mj-cs"/>
+              </a:defRPr>
+            </a:lvl1pPr>
+          </a:lstStyle>
+          <a:p>
+            <a:r>
+              <a:rPr lang="ru-RU" sz="2800" dirty="0">
+                <a:latin typeface="Times New Roman" panose="02020603050405020304" pitchFamily="18" charset="0"/>
+                <a:cs typeface="Times New Roman" panose="02020603050405020304" pitchFamily="18" charset="0"/>
+              </a:rPr>
+              <a:t>Начальные условия:</a:t>
             </a:r>
           </a:p>
         </p:txBody>
@@ -3891,11 +4005,1937 @@
                 <a:latin typeface="Times New Roman" panose="02020603050405020304" pitchFamily="18" charset="0"/>
                 <a:cs typeface="Times New Roman" panose="02020603050405020304" pitchFamily="18" charset="0"/>
               </a:rPr>
-              <a:t>Уравнения гидродинамики</a:t>
-            </a:r>
-          </a:p>
-        </p:txBody>
-      </p:sp>
+              <a:t>Законы сохранения</a:t>
+            </a:r>
+          </a:p>
+        </p:txBody>
+      </p:sp>
+      <mc:AlternateContent xmlns:mc="http://schemas.openxmlformats.org/markup-compatibility/2006">
+        <mc:Choice xmlns:a14="http://schemas.microsoft.com/office/drawing/2010/main" Requires="a14">
+          <p:sp>
+            <p:nvSpPr>
+              <p:cNvPr id="4" name="TextBox 3">
+                <a:extLst>
+                  <a:ext uri="{FF2B5EF4-FFF2-40B4-BE49-F238E27FC236}">
+                    <a16:creationId xmlns:a16="http://schemas.microsoft.com/office/drawing/2014/main" id="{456A890B-8C15-42D5-819D-6F5036C7C1D2}"/>
+                  </a:ext>
+                </a:extLst>
+              </p:cNvPr>
+              <p:cNvSpPr txBox="1"/>
+              <p:nvPr/>
+            </p:nvSpPr>
+            <p:spPr>
+              <a:xfrm>
+                <a:off x="589934" y="1895556"/>
+                <a:ext cx="8996517" cy="2564933"/>
+              </a:xfrm>
+              <a:prstGeom prst="rect">
+                <a:avLst/>
+              </a:prstGeom>
+              <a:noFill/>
+            </p:spPr>
+            <p:txBody>
+              <a:bodyPr wrap="square">
+                <a:spAutoFit/>
+              </a:bodyPr>
+              <a:lstStyle/>
+              <a:p>
+                <a:pPr algn="just">
+                  <a:spcAft>
+                    <a:spcPts val="1000"/>
+                  </a:spcAft>
+                  <a:tabLst>
+                    <a:tab pos="2970530" algn="ctr"/>
+                    <a:tab pos="5940425" algn="r"/>
+                  </a:tabLst>
+                </a:pPr>
+                <a:r>
+                  <a:rPr lang="ru-RU" sz="1800" dirty="0">
+                    <a:effectLst/>
+                    <a:latin typeface="Times New Roman" panose="02020603050405020304" pitchFamily="18" charset="0"/>
+                    <a:ea typeface="Calibri" panose="020F0502020204030204" pitchFamily="34" charset="0"/>
+                  </a:rPr>
+                  <a:t>	</a:t>
+                </a:r>
+                <a14:m>
+                  <m:oMath xmlns:m="http://schemas.openxmlformats.org/officeDocument/2006/math">
+                    <m:f>
+                      <m:fPr>
+                        <m:ctrlPr>
+                          <a:rPr lang="ru-RU" sz="2000" i="1">
+                            <a:effectLst/>
+                            <a:latin typeface="Cambria Math" panose="02040503050406030204" pitchFamily="18" charset="0"/>
+                            <a:ea typeface="Calibri" panose="020F0502020204030204" pitchFamily="34" charset="0"/>
+                          </a:rPr>
+                        </m:ctrlPr>
+                      </m:fPr>
+                      <m:num>
+                        <m:r>
+                          <a:rPr lang="ru-RU" sz="2000" i="1">
+                            <a:effectLst/>
+                            <a:latin typeface="Cambria Math" panose="02040503050406030204" pitchFamily="18" charset="0"/>
+                            <a:ea typeface="Calibri" panose="020F0502020204030204" pitchFamily="34" charset="0"/>
+                          </a:rPr>
+                          <m:t>𝜕</m:t>
+                        </m:r>
+                      </m:num>
+                      <m:den>
+                        <m:r>
+                          <a:rPr lang="ru-RU" sz="2000" i="1">
+                            <a:effectLst/>
+                            <a:latin typeface="Cambria Math" panose="02040503050406030204" pitchFamily="18" charset="0"/>
+                            <a:ea typeface="Calibri" panose="020F0502020204030204" pitchFamily="34" charset="0"/>
+                          </a:rPr>
+                          <m:t>𝜕</m:t>
+                        </m:r>
+                        <m:r>
+                          <a:rPr lang="en-US" sz="2000" i="1">
+                            <a:effectLst/>
+                            <a:latin typeface="Cambria Math" panose="02040503050406030204" pitchFamily="18" charset="0"/>
+                            <a:ea typeface="Calibri" panose="020F0502020204030204" pitchFamily="34" charset="0"/>
+                          </a:rPr>
+                          <m:t>𝑡</m:t>
+                        </m:r>
+                      </m:den>
+                    </m:f>
+                    <m:r>
+                      <a:rPr lang="ru-RU" sz="2000" i="1">
+                        <a:effectLst/>
+                        <a:latin typeface="Cambria Math" panose="02040503050406030204" pitchFamily="18" charset="0"/>
+                        <a:ea typeface="Calibri" panose="020F0502020204030204" pitchFamily="34" charset="0"/>
+                      </a:rPr>
+                      <m:t>(</m:t>
+                    </m:r>
+                    <m:r>
+                      <a:rPr lang="en-US" sz="2000" i="1">
+                        <a:effectLst/>
+                        <a:latin typeface="Cambria Math" panose="02040503050406030204" pitchFamily="18" charset="0"/>
+                        <a:ea typeface="Calibri" panose="020F0502020204030204" pitchFamily="34" charset="0"/>
+                      </a:rPr>
+                      <m:t>𝑚</m:t>
+                    </m:r>
+                    <m:sSub>
+                      <m:sSubPr>
+                        <m:ctrlPr>
+                          <a:rPr lang="ru-RU" sz="2000" i="1">
+                            <a:effectLst/>
+                            <a:latin typeface="Cambria Math" panose="02040503050406030204" pitchFamily="18" charset="0"/>
+                            <a:ea typeface="Calibri" panose="020F0502020204030204" pitchFamily="34" charset="0"/>
+                          </a:rPr>
+                        </m:ctrlPr>
+                      </m:sSubPr>
+                      <m:e>
+                        <m:r>
+                          <a:rPr lang="en-US" sz="2000" i="1">
+                            <a:effectLst/>
+                            <a:latin typeface="Cambria Math" panose="02040503050406030204" pitchFamily="18" charset="0"/>
+                            <a:ea typeface="Calibri" panose="020F0502020204030204" pitchFamily="34" charset="0"/>
+                          </a:rPr>
+                          <m:t>𝜌</m:t>
+                        </m:r>
+                      </m:e>
+                      <m:sub>
+                        <m:r>
+                          <a:rPr lang="en-US" sz="2000" i="1">
+                            <a:effectLst/>
+                            <a:latin typeface="Cambria Math" panose="02040503050406030204" pitchFamily="18" charset="0"/>
+                            <a:ea typeface="Calibri" panose="020F0502020204030204" pitchFamily="34" charset="0"/>
+                          </a:rPr>
+                          <m:t>𝑤</m:t>
+                        </m:r>
+                      </m:sub>
+                    </m:sSub>
+                    <m:sSub>
+                      <m:sSubPr>
+                        <m:ctrlPr>
+                          <a:rPr lang="ru-RU" sz="2000" i="1">
+                            <a:effectLst/>
+                            <a:latin typeface="Cambria Math" panose="02040503050406030204" pitchFamily="18" charset="0"/>
+                            <a:ea typeface="Calibri" panose="020F0502020204030204" pitchFamily="34" charset="0"/>
+                          </a:rPr>
+                        </m:ctrlPr>
+                      </m:sSubPr>
+                      <m:e>
+                        <m:r>
+                          <a:rPr lang="en-US" sz="2000" i="1">
+                            <a:effectLst/>
+                            <a:latin typeface="Cambria Math" panose="02040503050406030204" pitchFamily="18" charset="0"/>
+                            <a:ea typeface="Calibri" panose="020F0502020204030204" pitchFamily="34" charset="0"/>
+                          </a:rPr>
+                          <m:t>𝑆</m:t>
+                        </m:r>
+                      </m:e>
+                      <m:sub>
+                        <m:r>
+                          <a:rPr lang="en-US" sz="2000" i="1">
+                            <a:effectLst/>
+                            <a:latin typeface="Cambria Math" panose="02040503050406030204" pitchFamily="18" charset="0"/>
+                            <a:ea typeface="Calibri" panose="020F0502020204030204" pitchFamily="34" charset="0"/>
+                          </a:rPr>
+                          <m:t>𝑤</m:t>
+                        </m:r>
+                      </m:sub>
+                    </m:sSub>
+                    <m:r>
+                      <a:rPr lang="ru-RU" sz="2000" i="1">
+                        <a:effectLst/>
+                        <a:latin typeface="Cambria Math" panose="02040503050406030204" pitchFamily="18" charset="0"/>
+                        <a:ea typeface="Calibri" panose="020F0502020204030204" pitchFamily="34" charset="0"/>
+                      </a:rPr>
+                      <m:t>)+</m:t>
+                    </m:r>
+                    <m:r>
+                      <a:rPr lang="ru-RU" sz="2000" i="1">
+                        <a:effectLst/>
+                        <a:latin typeface="Cambria Math" panose="02040503050406030204" pitchFamily="18" charset="0"/>
+                        <a:ea typeface="Calibri" panose="020F0502020204030204" pitchFamily="34" charset="0"/>
+                        <a:cs typeface="Cambria Math" panose="02040503050406030204" pitchFamily="18" charset="0"/>
+                      </a:rPr>
+                      <m:t>𝛻</m:t>
+                    </m:r>
+                    <m:r>
+                      <a:rPr lang="ru-RU" sz="2000" i="1">
+                        <a:effectLst/>
+                        <a:latin typeface="Cambria Math" panose="02040503050406030204" pitchFamily="18" charset="0"/>
+                        <a:ea typeface="Calibri" panose="020F0502020204030204" pitchFamily="34" charset="0"/>
+                      </a:rPr>
+                      <m:t>(</m:t>
+                    </m:r>
+                    <m:sSub>
+                      <m:sSubPr>
+                        <m:ctrlPr>
+                          <a:rPr lang="ru-RU" sz="2000" i="1">
+                            <a:effectLst/>
+                            <a:latin typeface="Cambria Math" panose="02040503050406030204" pitchFamily="18" charset="0"/>
+                            <a:ea typeface="Calibri" panose="020F0502020204030204" pitchFamily="34" charset="0"/>
+                          </a:rPr>
+                        </m:ctrlPr>
+                      </m:sSubPr>
+                      <m:e>
+                        <m:r>
+                          <a:rPr lang="en-US" sz="2000" i="1">
+                            <a:effectLst/>
+                            <a:latin typeface="Cambria Math" panose="02040503050406030204" pitchFamily="18" charset="0"/>
+                            <a:ea typeface="Calibri" panose="020F0502020204030204" pitchFamily="34" charset="0"/>
+                          </a:rPr>
+                          <m:t>𝜌</m:t>
+                        </m:r>
+                      </m:e>
+                      <m:sub>
+                        <m:r>
+                          <a:rPr lang="en-US" sz="2000" i="1">
+                            <a:effectLst/>
+                            <a:latin typeface="Cambria Math" panose="02040503050406030204" pitchFamily="18" charset="0"/>
+                            <a:ea typeface="Calibri" panose="020F0502020204030204" pitchFamily="34" charset="0"/>
+                          </a:rPr>
+                          <m:t>𝑤</m:t>
+                        </m:r>
+                      </m:sub>
+                    </m:sSub>
+                    <m:sSub>
+                      <m:sSubPr>
+                        <m:ctrlPr>
+                          <a:rPr lang="ru-RU" sz="2000" b="1" i="1">
+                            <a:effectLst/>
+                            <a:latin typeface="Cambria Math" panose="02040503050406030204" pitchFamily="18" charset="0"/>
+                            <a:ea typeface="Calibri" panose="020F0502020204030204" pitchFamily="34" charset="0"/>
+                          </a:rPr>
+                        </m:ctrlPr>
+                      </m:sSubPr>
+                      <m:e>
+                        <m:r>
+                          <a:rPr lang="en-US" sz="2000" b="1" i="1">
+                            <a:effectLst/>
+                            <a:latin typeface="Cambria Math" panose="02040503050406030204" pitchFamily="18" charset="0"/>
+                            <a:ea typeface="Calibri" panose="020F0502020204030204" pitchFamily="34" charset="0"/>
+                          </a:rPr>
+                          <m:t>𝑼</m:t>
+                        </m:r>
+                      </m:e>
+                      <m:sub>
+                        <m:r>
+                          <a:rPr lang="en-US" sz="2000" b="1" i="1">
+                            <a:effectLst/>
+                            <a:latin typeface="Cambria Math" panose="02040503050406030204" pitchFamily="18" charset="0"/>
+                            <a:ea typeface="Calibri" panose="020F0502020204030204" pitchFamily="34" charset="0"/>
+                          </a:rPr>
+                          <m:t>𝒘</m:t>
+                        </m:r>
+                      </m:sub>
+                    </m:sSub>
+                    <m:r>
+                      <a:rPr lang="ru-RU" sz="2000" i="1">
+                        <a:effectLst/>
+                        <a:latin typeface="Cambria Math" panose="02040503050406030204" pitchFamily="18" charset="0"/>
+                        <a:ea typeface="Calibri" panose="020F0502020204030204" pitchFamily="34" charset="0"/>
+                      </a:rPr>
+                      <m:t>)=</m:t>
+                    </m:r>
+                    <m:sSub>
+                      <m:sSubPr>
+                        <m:ctrlPr>
+                          <a:rPr lang="ru-RU" sz="2000" i="1">
+                            <a:effectLst/>
+                            <a:latin typeface="Cambria Math" panose="02040503050406030204" pitchFamily="18" charset="0"/>
+                            <a:ea typeface="Calibri" panose="020F0502020204030204" pitchFamily="34" charset="0"/>
+                          </a:rPr>
+                        </m:ctrlPr>
+                      </m:sSubPr>
+                      <m:e>
+                        <m:r>
+                          <a:rPr lang="en-US" sz="2000" i="1">
+                            <a:effectLst/>
+                            <a:latin typeface="Cambria Math" panose="02040503050406030204" pitchFamily="18" charset="0"/>
+                            <a:ea typeface="Calibri" panose="020F0502020204030204" pitchFamily="34" charset="0"/>
+                          </a:rPr>
+                          <m:t>𝑞</m:t>
+                        </m:r>
+                      </m:e>
+                      <m:sub>
+                        <m:r>
+                          <a:rPr lang="ru-RU" sz="2000" i="1">
+                            <a:effectLst/>
+                            <a:latin typeface="Cambria Math" panose="02040503050406030204" pitchFamily="18" charset="0"/>
+                            <a:ea typeface="Calibri" panose="020F0502020204030204" pitchFamily="34" charset="0"/>
+                          </a:rPr>
+                          <m:t>𝑤</m:t>
+                        </m:r>
+                      </m:sub>
+                    </m:sSub>
+                    <m:sSub>
+                      <m:sSubPr>
+                        <m:ctrlPr>
+                          <a:rPr lang="ru-RU" sz="2000" i="1">
+                            <a:effectLst/>
+                            <a:latin typeface="Cambria Math" panose="02040503050406030204" pitchFamily="18" charset="0"/>
+                            <a:ea typeface="Calibri" panose="020F0502020204030204" pitchFamily="34" charset="0"/>
+                          </a:rPr>
+                        </m:ctrlPr>
+                      </m:sSubPr>
+                      <m:e>
+                        <m:r>
+                          <a:rPr lang="en-US" sz="2000" i="1">
+                            <a:effectLst/>
+                            <a:latin typeface="Cambria Math" panose="02040503050406030204" pitchFamily="18" charset="0"/>
+                            <a:ea typeface="Calibri" panose="020F0502020204030204" pitchFamily="34" charset="0"/>
+                          </a:rPr>
+                          <m:t>𝜌</m:t>
+                        </m:r>
+                      </m:e>
+                      <m:sub>
+                        <m:r>
+                          <a:rPr lang="en-US" sz="2000" i="1">
+                            <a:effectLst/>
+                            <a:latin typeface="Cambria Math" panose="02040503050406030204" pitchFamily="18" charset="0"/>
+                            <a:ea typeface="Calibri" panose="020F0502020204030204" pitchFamily="34" charset="0"/>
+                          </a:rPr>
+                          <m:t>𝑤</m:t>
+                        </m:r>
+                      </m:sub>
+                    </m:sSub>
+                    <m:r>
+                      <a:rPr lang="ru-RU" sz="2000" i="1">
+                        <a:effectLst/>
+                        <a:latin typeface="Cambria Math" panose="02040503050406030204" pitchFamily="18" charset="0"/>
+                        <a:ea typeface="Calibri" panose="020F0502020204030204" pitchFamily="34" charset="0"/>
+                      </a:rPr>
+                      <m:t> </m:t>
+                    </m:r>
+                  </m:oMath>
+                </a14:m>
+                <a:endParaRPr lang="en-US" sz="2000" dirty="0">
+                  <a:effectLst/>
+                  <a:latin typeface="Times New Roman" panose="02020603050405020304" pitchFamily="18" charset="0"/>
+                  <a:ea typeface="Calibri" panose="020F0502020204030204" pitchFamily="34" charset="0"/>
+                </a:endParaRPr>
+              </a:p>
+              <a:p>
+                <a:pPr algn="just">
+                  <a:spcAft>
+                    <a:spcPts val="1000"/>
+                  </a:spcAft>
+                  <a:tabLst>
+                    <a:tab pos="2970530" algn="ctr"/>
+                    <a:tab pos="5940425" algn="r"/>
+                  </a:tabLst>
+                </a:pPr>
+                <a:endParaRPr lang="ru-RU" sz="2000" dirty="0">
+                  <a:effectLst/>
+                  <a:latin typeface="Times New Roman" panose="02020603050405020304" pitchFamily="18" charset="0"/>
+                  <a:ea typeface="Calibri" panose="020F0502020204030204" pitchFamily="34" charset="0"/>
+                </a:endParaRPr>
+              </a:p>
+              <a:p>
+                <a:pPr algn="just">
+                  <a:spcAft>
+                    <a:spcPts val="1000"/>
+                  </a:spcAft>
+                  <a:tabLst>
+                    <a:tab pos="2970530" algn="ctr"/>
+                    <a:tab pos="5940425" algn="r"/>
+                  </a:tabLst>
+                </a:pPr>
+                <a:r>
+                  <a:rPr lang="ru-RU" sz="2000" dirty="0">
+                    <a:effectLst/>
+                    <a:latin typeface="Times New Roman" panose="02020603050405020304" pitchFamily="18" charset="0"/>
+                    <a:ea typeface="Calibri" panose="020F0502020204030204" pitchFamily="34" charset="0"/>
+                  </a:rPr>
+                  <a:t>	</a:t>
+                </a:r>
+                <a14:m>
+                  <m:oMath xmlns:m="http://schemas.openxmlformats.org/officeDocument/2006/math">
+                    <m:f>
+                      <m:fPr>
+                        <m:ctrlPr>
+                          <a:rPr lang="ru-RU" sz="2000" i="1">
+                            <a:effectLst/>
+                            <a:latin typeface="Cambria Math" panose="02040503050406030204" pitchFamily="18" charset="0"/>
+                            <a:ea typeface="Calibri" panose="020F0502020204030204" pitchFamily="34" charset="0"/>
+                          </a:rPr>
+                        </m:ctrlPr>
+                      </m:fPr>
+                      <m:num>
+                        <m:r>
+                          <a:rPr lang="ru-RU" sz="2000" i="1">
+                            <a:effectLst/>
+                            <a:latin typeface="Cambria Math" panose="02040503050406030204" pitchFamily="18" charset="0"/>
+                            <a:ea typeface="Calibri" panose="020F0502020204030204" pitchFamily="34" charset="0"/>
+                          </a:rPr>
+                          <m:t>𝜕</m:t>
+                        </m:r>
+                      </m:num>
+                      <m:den>
+                        <m:r>
+                          <a:rPr lang="ru-RU" sz="2000" i="1">
+                            <a:effectLst/>
+                            <a:latin typeface="Cambria Math" panose="02040503050406030204" pitchFamily="18" charset="0"/>
+                            <a:ea typeface="Calibri" panose="020F0502020204030204" pitchFamily="34" charset="0"/>
+                          </a:rPr>
+                          <m:t>𝜕</m:t>
+                        </m:r>
+                        <m:r>
+                          <a:rPr lang="en-US" sz="2000" i="1">
+                            <a:effectLst/>
+                            <a:latin typeface="Cambria Math" panose="02040503050406030204" pitchFamily="18" charset="0"/>
+                            <a:ea typeface="Calibri" panose="020F0502020204030204" pitchFamily="34" charset="0"/>
+                          </a:rPr>
+                          <m:t>𝑡</m:t>
+                        </m:r>
+                      </m:den>
+                    </m:f>
+                    <m:d>
+                      <m:dPr>
+                        <m:ctrlPr>
+                          <a:rPr lang="ru-RU" sz="2000" i="1">
+                            <a:effectLst/>
+                            <a:latin typeface="Cambria Math" panose="02040503050406030204" pitchFamily="18" charset="0"/>
+                            <a:ea typeface="Calibri" panose="020F0502020204030204" pitchFamily="34" charset="0"/>
+                          </a:rPr>
+                        </m:ctrlPr>
+                      </m:dPr>
+                      <m:e>
+                        <m:sSub>
+                          <m:sSubPr>
+                            <m:ctrlPr>
+                              <a:rPr lang="ru-RU" sz="2000" i="1">
+                                <a:latin typeface="Cambria Math" panose="02040503050406030204" pitchFamily="18" charset="0"/>
+                                <a:ea typeface="Calibri" panose="020F0502020204030204" pitchFamily="34" charset="0"/>
+                              </a:rPr>
+                            </m:ctrlPr>
+                          </m:sSubPr>
+                          <m:e>
+                            <m:r>
+                              <a:rPr lang="en-US" sz="2000" i="1">
+                                <a:latin typeface="Cambria Math" panose="02040503050406030204" pitchFamily="18" charset="0"/>
+                                <a:ea typeface="Calibri" panose="020F0502020204030204" pitchFamily="34" charset="0"/>
+                              </a:rPr>
+                              <m:t>𝑤</m:t>
+                            </m:r>
+                          </m:e>
+                          <m:sub>
+                            <m:r>
+                              <a:rPr lang="en-US" sz="2000" i="1">
+                                <a:latin typeface="Cambria Math" panose="02040503050406030204" pitchFamily="18" charset="0"/>
+                                <a:ea typeface="Calibri" panose="020F0502020204030204" pitchFamily="34" charset="0"/>
+                              </a:rPr>
+                              <m:t>𝑜</m:t>
+                            </m:r>
+                          </m:sub>
+                        </m:sSub>
+                        <m:r>
+                          <a:rPr lang="en-US" sz="2000" i="1">
+                            <a:effectLst/>
+                            <a:latin typeface="Cambria Math" panose="02040503050406030204" pitchFamily="18" charset="0"/>
+                            <a:ea typeface="Calibri" panose="020F0502020204030204" pitchFamily="34" charset="0"/>
+                          </a:rPr>
+                          <m:t>𝑚</m:t>
+                        </m:r>
+                        <m:sSub>
+                          <m:sSubPr>
+                            <m:ctrlPr>
+                              <a:rPr lang="ru-RU" sz="2000" i="1">
+                                <a:effectLst/>
+                                <a:latin typeface="Cambria Math" panose="02040503050406030204" pitchFamily="18" charset="0"/>
+                                <a:ea typeface="Calibri" panose="020F0502020204030204" pitchFamily="34" charset="0"/>
+                              </a:rPr>
+                            </m:ctrlPr>
+                          </m:sSubPr>
+                          <m:e>
+                            <m:r>
+                              <a:rPr lang="en-US" sz="2000" i="1">
+                                <a:effectLst/>
+                                <a:latin typeface="Cambria Math" panose="02040503050406030204" pitchFamily="18" charset="0"/>
+                                <a:ea typeface="Calibri" panose="020F0502020204030204" pitchFamily="34" charset="0"/>
+                              </a:rPr>
+                              <m:t>𝑆</m:t>
+                            </m:r>
+                          </m:e>
+                          <m:sub>
+                            <m:r>
+                              <a:rPr lang="en-US" sz="2000" i="1">
+                                <a:effectLst/>
+                                <a:latin typeface="Cambria Math" panose="02040503050406030204" pitchFamily="18" charset="0"/>
+                                <a:ea typeface="Calibri" panose="020F0502020204030204" pitchFamily="34" charset="0"/>
+                              </a:rPr>
+                              <m:t>𝑜</m:t>
+                            </m:r>
+                          </m:sub>
+                        </m:sSub>
+                        <m:sSub>
+                          <m:sSubPr>
+                            <m:ctrlPr>
+                              <a:rPr lang="ru-RU" sz="2000" i="1">
+                                <a:effectLst/>
+                                <a:latin typeface="Cambria Math" panose="02040503050406030204" pitchFamily="18" charset="0"/>
+                                <a:ea typeface="Calibri" panose="020F0502020204030204" pitchFamily="34" charset="0"/>
+                              </a:rPr>
+                            </m:ctrlPr>
+                          </m:sSubPr>
+                          <m:e>
+                            <m:r>
+                              <a:rPr lang="en-US" sz="2000" i="1">
+                                <a:effectLst/>
+                                <a:latin typeface="Cambria Math" panose="02040503050406030204" pitchFamily="18" charset="0"/>
+                                <a:ea typeface="Calibri" panose="020F0502020204030204" pitchFamily="34" charset="0"/>
+                              </a:rPr>
+                              <m:t>𝜌</m:t>
+                            </m:r>
+                          </m:e>
+                          <m:sub>
+                            <m:r>
+                              <a:rPr lang="en-US" sz="2000" i="1">
+                                <a:effectLst/>
+                                <a:latin typeface="Cambria Math" panose="02040503050406030204" pitchFamily="18" charset="0"/>
+                                <a:ea typeface="Calibri" panose="020F0502020204030204" pitchFamily="34" charset="0"/>
+                              </a:rPr>
+                              <m:t>𝑜</m:t>
+                            </m:r>
+                          </m:sub>
+                        </m:sSub>
+                      </m:e>
+                    </m:d>
+                    <m:r>
+                      <a:rPr lang="ru-RU" sz="2000" i="1">
+                        <a:effectLst/>
+                        <a:latin typeface="Cambria Math" panose="02040503050406030204" pitchFamily="18" charset="0"/>
+                        <a:ea typeface="Calibri" panose="020F0502020204030204" pitchFamily="34" charset="0"/>
+                      </a:rPr>
+                      <m:t>+</m:t>
+                    </m:r>
+                    <m:r>
+                      <a:rPr lang="ru-RU" sz="2000" i="1">
+                        <a:effectLst/>
+                        <a:latin typeface="Cambria Math" panose="02040503050406030204" pitchFamily="18" charset="0"/>
+                        <a:ea typeface="Calibri" panose="020F0502020204030204" pitchFamily="34" charset="0"/>
+                        <a:cs typeface="Cambria Math" panose="02040503050406030204" pitchFamily="18" charset="0"/>
+                      </a:rPr>
+                      <m:t>𝛻</m:t>
+                    </m:r>
+                    <m:d>
+                      <m:dPr>
+                        <m:ctrlPr>
+                          <a:rPr lang="ru-RU" sz="2000" i="1">
+                            <a:effectLst/>
+                            <a:latin typeface="Cambria Math" panose="02040503050406030204" pitchFamily="18" charset="0"/>
+                            <a:ea typeface="Calibri" panose="020F0502020204030204" pitchFamily="34" charset="0"/>
+                          </a:rPr>
+                        </m:ctrlPr>
+                      </m:dPr>
+                      <m:e>
+                        <m:sSub>
+                          <m:sSubPr>
+                            <m:ctrlPr>
+                              <a:rPr lang="ru-RU" sz="2000" i="1">
+                                <a:effectLst/>
+                                <a:latin typeface="Cambria Math" panose="02040503050406030204" pitchFamily="18" charset="0"/>
+                                <a:ea typeface="Calibri" panose="020F0502020204030204" pitchFamily="34" charset="0"/>
+                              </a:rPr>
+                            </m:ctrlPr>
+                          </m:sSubPr>
+                          <m:e>
+                            <m:r>
+                              <a:rPr lang="en-US" sz="2000" i="1">
+                                <a:effectLst/>
+                                <a:latin typeface="Cambria Math" panose="02040503050406030204" pitchFamily="18" charset="0"/>
+                                <a:ea typeface="Calibri" panose="020F0502020204030204" pitchFamily="34" charset="0"/>
+                              </a:rPr>
+                              <m:t>𝑤</m:t>
+                            </m:r>
+                          </m:e>
+                          <m:sub>
+                            <m:r>
+                              <a:rPr lang="en-US" sz="2000" i="1">
+                                <a:effectLst/>
+                                <a:latin typeface="Cambria Math" panose="02040503050406030204" pitchFamily="18" charset="0"/>
+                                <a:ea typeface="Calibri" panose="020F0502020204030204" pitchFamily="34" charset="0"/>
+                              </a:rPr>
+                              <m:t>𝑜</m:t>
+                            </m:r>
+                          </m:sub>
+                        </m:sSub>
+                        <m:sSub>
+                          <m:sSubPr>
+                            <m:ctrlPr>
+                              <a:rPr lang="ru-RU" sz="2000" i="1">
+                                <a:effectLst/>
+                                <a:latin typeface="Cambria Math" panose="02040503050406030204" pitchFamily="18" charset="0"/>
+                                <a:ea typeface="Calibri" panose="020F0502020204030204" pitchFamily="34" charset="0"/>
+                              </a:rPr>
+                            </m:ctrlPr>
+                          </m:sSubPr>
+                          <m:e>
+                            <m:r>
+                              <a:rPr lang="en-US" sz="2000" i="1">
+                                <a:effectLst/>
+                                <a:latin typeface="Cambria Math" panose="02040503050406030204" pitchFamily="18" charset="0"/>
+                                <a:ea typeface="Calibri" panose="020F0502020204030204" pitchFamily="34" charset="0"/>
+                              </a:rPr>
+                              <m:t>𝜌</m:t>
+                            </m:r>
+                          </m:e>
+                          <m:sub>
+                            <m:r>
+                              <a:rPr lang="en-US" sz="2000" i="1">
+                                <a:effectLst/>
+                                <a:latin typeface="Cambria Math" panose="02040503050406030204" pitchFamily="18" charset="0"/>
+                                <a:ea typeface="Calibri" panose="020F0502020204030204" pitchFamily="34" charset="0"/>
+                              </a:rPr>
+                              <m:t>𝑜</m:t>
+                            </m:r>
+                          </m:sub>
+                        </m:sSub>
+                        <m:sSub>
+                          <m:sSubPr>
+                            <m:ctrlPr>
+                              <a:rPr lang="ru-RU" sz="2000" b="1" i="1">
+                                <a:effectLst/>
+                                <a:latin typeface="Cambria Math" panose="02040503050406030204" pitchFamily="18" charset="0"/>
+                                <a:ea typeface="Calibri" panose="020F0502020204030204" pitchFamily="34" charset="0"/>
+                              </a:rPr>
+                            </m:ctrlPr>
+                          </m:sSubPr>
+                          <m:e>
+                            <m:r>
+                              <a:rPr lang="en-US" sz="2000" b="1" i="1">
+                                <a:effectLst/>
+                                <a:latin typeface="Cambria Math" panose="02040503050406030204" pitchFamily="18" charset="0"/>
+                                <a:ea typeface="Calibri" panose="020F0502020204030204" pitchFamily="34" charset="0"/>
+                              </a:rPr>
+                              <m:t>𝑼</m:t>
+                            </m:r>
+                          </m:e>
+                          <m:sub>
+                            <m:r>
+                              <a:rPr lang="en-US" sz="2000" b="1" i="1">
+                                <a:effectLst/>
+                                <a:latin typeface="Cambria Math" panose="02040503050406030204" pitchFamily="18" charset="0"/>
+                                <a:ea typeface="Calibri" panose="020F0502020204030204" pitchFamily="34" charset="0"/>
+                              </a:rPr>
+                              <m:t>𝒐</m:t>
+                            </m:r>
+                          </m:sub>
+                        </m:sSub>
+                      </m:e>
+                    </m:d>
+                    <m:r>
+                      <a:rPr lang="ru-RU" sz="2000" b="1">
+                        <a:effectLst/>
+                        <a:latin typeface="Cambria Math" panose="02040503050406030204" pitchFamily="18" charset="0"/>
+                        <a:ea typeface="Calibri" panose="020F0502020204030204" pitchFamily="34" charset="0"/>
+                      </a:rPr>
+                      <m:t>=</m:t>
+                    </m:r>
+                    <m:sSub>
+                      <m:sSubPr>
+                        <m:ctrlPr>
+                          <a:rPr lang="ru-RU" sz="2000" i="1">
+                            <a:effectLst/>
+                            <a:latin typeface="Cambria Math" panose="02040503050406030204" pitchFamily="18" charset="0"/>
+                            <a:ea typeface="Calibri" panose="020F0502020204030204" pitchFamily="34" charset="0"/>
+                          </a:rPr>
+                        </m:ctrlPr>
+                      </m:sSubPr>
+                      <m:e>
+                        <m:sSub>
+                          <m:sSubPr>
+                            <m:ctrlPr>
+                              <a:rPr lang="ru-RU" sz="2000" i="1">
+                                <a:effectLst/>
+                                <a:latin typeface="Cambria Math" panose="02040503050406030204" pitchFamily="18" charset="0"/>
+                                <a:ea typeface="Calibri" panose="020F0502020204030204" pitchFamily="34" charset="0"/>
+                              </a:rPr>
+                            </m:ctrlPr>
+                          </m:sSubPr>
+                          <m:e>
+                            <m:r>
+                              <a:rPr lang="en-US" sz="2000" i="1">
+                                <a:effectLst/>
+                                <a:latin typeface="Cambria Math" panose="02040503050406030204" pitchFamily="18" charset="0"/>
+                                <a:ea typeface="Calibri" panose="020F0502020204030204" pitchFamily="34" charset="0"/>
+                              </a:rPr>
+                              <m:t>𝑤</m:t>
+                            </m:r>
+                          </m:e>
+                          <m:sub>
+                            <m:r>
+                              <a:rPr lang="en-US" sz="2000" i="1">
+                                <a:effectLst/>
+                                <a:latin typeface="Cambria Math" panose="02040503050406030204" pitchFamily="18" charset="0"/>
+                                <a:ea typeface="Calibri" panose="020F0502020204030204" pitchFamily="34" charset="0"/>
+                              </a:rPr>
+                              <m:t>𝑜</m:t>
+                            </m:r>
+                          </m:sub>
+                        </m:sSub>
+                        <m:r>
+                          <a:rPr lang="en-US" sz="2000" i="1">
+                            <a:effectLst/>
+                            <a:latin typeface="Cambria Math" panose="02040503050406030204" pitchFamily="18" charset="0"/>
+                            <a:ea typeface="Calibri" panose="020F0502020204030204" pitchFamily="34" charset="0"/>
+                          </a:rPr>
+                          <m:t>𝑞</m:t>
+                        </m:r>
+                      </m:e>
+                      <m:sub>
+                        <m:r>
+                          <a:rPr lang="ru-RU" sz="2000" i="1">
+                            <a:effectLst/>
+                            <a:latin typeface="Cambria Math" panose="02040503050406030204" pitchFamily="18" charset="0"/>
+                            <a:ea typeface="Calibri" panose="020F0502020204030204" pitchFamily="34" charset="0"/>
+                          </a:rPr>
+                          <m:t>𝑜</m:t>
+                        </m:r>
+                      </m:sub>
+                    </m:sSub>
+                    <m:sSub>
+                      <m:sSubPr>
+                        <m:ctrlPr>
+                          <a:rPr lang="ru-RU" sz="2000" i="1">
+                            <a:effectLst/>
+                            <a:latin typeface="Cambria Math" panose="02040503050406030204" pitchFamily="18" charset="0"/>
+                            <a:ea typeface="Calibri" panose="020F0502020204030204" pitchFamily="34" charset="0"/>
+                          </a:rPr>
+                        </m:ctrlPr>
+                      </m:sSubPr>
+                      <m:e>
+                        <m:r>
+                          <a:rPr lang="en-US" sz="2000" i="1">
+                            <a:effectLst/>
+                            <a:latin typeface="Cambria Math" panose="02040503050406030204" pitchFamily="18" charset="0"/>
+                            <a:ea typeface="Calibri" panose="020F0502020204030204" pitchFamily="34" charset="0"/>
+                          </a:rPr>
+                          <m:t>𝜌</m:t>
+                        </m:r>
+                      </m:e>
+                      <m:sub>
+                        <m:r>
+                          <a:rPr lang="en-US" sz="2000" i="1">
+                            <a:effectLst/>
+                            <a:latin typeface="Cambria Math" panose="02040503050406030204" pitchFamily="18" charset="0"/>
+                            <a:ea typeface="Calibri" panose="020F0502020204030204" pitchFamily="34" charset="0"/>
+                          </a:rPr>
+                          <m:t>𝑜</m:t>
+                        </m:r>
+                      </m:sub>
+                    </m:sSub>
+                    <m:r>
+                      <a:rPr lang="en-US" sz="2000" i="1">
+                        <a:effectLst/>
+                        <a:latin typeface="Cambria Math" panose="02040503050406030204" pitchFamily="18" charset="0"/>
+                        <a:ea typeface="Calibri" panose="020F0502020204030204" pitchFamily="34" charset="0"/>
+                      </a:rPr>
+                      <m:t> </m:t>
+                    </m:r>
+                  </m:oMath>
+                </a14:m>
+                <a:endParaRPr lang="en-US" sz="2000" b="1" i="1" dirty="0">
+                  <a:effectLst/>
+                  <a:latin typeface="Times New Roman" panose="02020603050405020304" pitchFamily="18" charset="0"/>
+                  <a:ea typeface="Calibri" panose="020F0502020204030204" pitchFamily="34" charset="0"/>
+                </a:endParaRPr>
+              </a:p>
+              <a:p>
+                <a:pPr algn="just">
+                  <a:spcAft>
+                    <a:spcPts val="1000"/>
+                  </a:spcAft>
+                  <a:tabLst>
+                    <a:tab pos="2970530" algn="ctr"/>
+                    <a:tab pos="5940425" algn="r"/>
+                  </a:tabLst>
+                </a:pPr>
+                <a:endParaRPr lang="en-US" sz="2000" b="1" i="1" dirty="0">
+                  <a:latin typeface="Times New Roman" panose="02020603050405020304" pitchFamily="18" charset="0"/>
+                  <a:ea typeface="Calibri" panose="020F0502020204030204" pitchFamily="34" charset="0"/>
+                </a:endParaRPr>
+              </a:p>
+              <a:p>
+                <a:pPr algn="just">
+                  <a:spcAft>
+                    <a:spcPts val="1000"/>
+                  </a:spcAft>
+                  <a:tabLst>
+                    <a:tab pos="2970530" algn="ctr"/>
+                    <a:tab pos="5940425" algn="r"/>
+                  </a:tabLst>
+                </a:pPr>
+                <a14:m>
+                  <m:oMath xmlns:m="http://schemas.openxmlformats.org/officeDocument/2006/math">
+                    <m:f>
+                      <m:fPr>
+                        <m:ctrlPr>
+                          <a:rPr lang="ru-RU" sz="2000" i="1" smtClean="0">
+                            <a:effectLst/>
+                            <a:latin typeface="Cambria Math" panose="02040503050406030204" pitchFamily="18" charset="0"/>
+                          </a:rPr>
+                        </m:ctrlPr>
+                      </m:fPr>
+                      <m:num>
+                        <m:r>
+                          <a:rPr lang="ru-RU" sz="1800" i="1">
+                            <a:effectLst/>
+                            <a:latin typeface="Cambria Math" panose="02040503050406030204" pitchFamily="18" charset="0"/>
+                            <a:ea typeface="Calibri" panose="020F0502020204030204" pitchFamily="34" charset="0"/>
+                            <a:cs typeface="Times New Roman" panose="02020603050405020304" pitchFamily="18" charset="0"/>
+                          </a:rPr>
+                          <m:t>𝜕</m:t>
+                        </m:r>
+                      </m:num>
+                      <m:den>
+                        <m:r>
+                          <a:rPr lang="ru-RU" sz="1800" i="1">
+                            <a:effectLst/>
+                            <a:latin typeface="Cambria Math" panose="02040503050406030204" pitchFamily="18" charset="0"/>
+                            <a:ea typeface="Calibri" panose="020F0502020204030204" pitchFamily="34" charset="0"/>
+                            <a:cs typeface="Times New Roman" panose="02020603050405020304" pitchFamily="18" charset="0"/>
+                          </a:rPr>
+                          <m:t>𝜕</m:t>
+                        </m:r>
+                        <m:r>
+                          <a:rPr lang="en-US" sz="1800" i="1">
+                            <a:effectLst/>
+                            <a:latin typeface="Cambria Math" panose="02040503050406030204" pitchFamily="18" charset="0"/>
+                            <a:ea typeface="Calibri" panose="020F0502020204030204" pitchFamily="34" charset="0"/>
+                            <a:cs typeface="Times New Roman" panose="02020603050405020304" pitchFamily="18" charset="0"/>
+                          </a:rPr>
+                          <m:t>𝑡</m:t>
+                        </m:r>
+                      </m:den>
+                    </m:f>
+                    <m:d>
+                      <m:dPr>
+                        <m:ctrlPr>
+                          <a:rPr lang="ru-RU" sz="2000" i="1">
+                            <a:effectLst/>
+                            <a:latin typeface="Cambria Math" panose="02040503050406030204" pitchFamily="18" charset="0"/>
+                          </a:rPr>
+                        </m:ctrlPr>
+                      </m:dPr>
+                      <m:e>
+                        <m:r>
+                          <a:rPr lang="en-US" sz="1800" i="1">
+                            <a:effectLst/>
+                            <a:latin typeface="Cambria Math" panose="02040503050406030204" pitchFamily="18" charset="0"/>
+                            <a:ea typeface="Calibri" panose="020F0502020204030204" pitchFamily="34" charset="0"/>
+                            <a:cs typeface="Times New Roman" panose="02020603050405020304" pitchFamily="18" charset="0"/>
+                          </a:rPr>
+                          <m:t>𝑚</m:t>
+                        </m:r>
+                        <m:sSub>
+                          <m:sSubPr>
+                            <m:ctrlPr>
+                              <a:rPr lang="ru-RU" sz="2000" i="1">
+                                <a:effectLst/>
+                                <a:latin typeface="Cambria Math" panose="02040503050406030204" pitchFamily="18" charset="0"/>
+                              </a:rPr>
+                            </m:ctrlPr>
+                          </m:sSubPr>
+                          <m:e>
+                            <m:r>
+                              <a:rPr lang="en-US" sz="1800" i="1">
+                                <a:effectLst/>
+                                <a:latin typeface="Cambria Math" panose="02040503050406030204" pitchFamily="18" charset="0"/>
+                                <a:ea typeface="Calibri" panose="020F0502020204030204" pitchFamily="34" charset="0"/>
+                                <a:cs typeface="Times New Roman" panose="02020603050405020304" pitchFamily="18" charset="0"/>
+                              </a:rPr>
+                              <m:t>𝑆</m:t>
+                            </m:r>
+                          </m:e>
+                          <m:sub>
+                            <m:r>
+                              <a:rPr lang="en-US" sz="1800" i="1">
+                                <a:effectLst/>
+                                <a:latin typeface="Cambria Math" panose="02040503050406030204" pitchFamily="18" charset="0"/>
+                                <a:ea typeface="Calibri" panose="020F0502020204030204" pitchFamily="34" charset="0"/>
+                                <a:cs typeface="Times New Roman" panose="02020603050405020304" pitchFamily="18" charset="0"/>
+                              </a:rPr>
+                              <m:t>𝑜</m:t>
+                            </m:r>
+                          </m:sub>
+                        </m:sSub>
+                        <m:sSub>
+                          <m:sSubPr>
+                            <m:ctrlPr>
+                              <a:rPr lang="ru-RU" sz="2000" i="1">
+                                <a:effectLst/>
+                                <a:latin typeface="Cambria Math" panose="02040503050406030204" pitchFamily="18" charset="0"/>
+                              </a:rPr>
+                            </m:ctrlPr>
+                          </m:sSubPr>
+                          <m:e>
+                            <m:r>
+                              <a:rPr lang="ru-RU" sz="1800" i="1">
+                                <a:effectLst/>
+                                <a:latin typeface="Cambria Math" panose="02040503050406030204" pitchFamily="18" charset="0"/>
+                                <a:ea typeface="Calibri" panose="020F0502020204030204" pitchFamily="34" charset="0"/>
+                                <a:cs typeface="Times New Roman" panose="02020603050405020304" pitchFamily="18" charset="0"/>
+                              </a:rPr>
+                              <m:t>𝑤</m:t>
+                            </m:r>
+                          </m:e>
+                          <m:sub>
+                            <m:r>
+                              <a:rPr lang="ru-RU" sz="1800" i="1">
+                                <a:effectLst/>
+                                <a:latin typeface="Cambria Math" panose="02040503050406030204" pitchFamily="18" charset="0"/>
+                                <a:ea typeface="Calibri" panose="020F0502020204030204" pitchFamily="34" charset="0"/>
+                                <a:cs typeface="Times New Roman" panose="02020603050405020304" pitchFamily="18" charset="0"/>
+                              </a:rPr>
+                              <m:t>𝑝𝑠</m:t>
+                            </m:r>
+                          </m:sub>
+                        </m:sSub>
+                        <m:sSub>
+                          <m:sSubPr>
+                            <m:ctrlPr>
+                              <a:rPr lang="ru-RU" sz="2000" i="1">
+                                <a:effectLst/>
+                                <a:latin typeface="Cambria Math" panose="02040503050406030204" pitchFamily="18" charset="0"/>
+                              </a:rPr>
+                            </m:ctrlPr>
+                          </m:sSubPr>
+                          <m:e>
+                            <m:r>
+                              <a:rPr lang="en-US" sz="1800" i="1">
+                                <a:effectLst/>
+                                <a:latin typeface="Cambria Math" panose="02040503050406030204" pitchFamily="18" charset="0"/>
+                                <a:ea typeface="Calibri" panose="020F0502020204030204" pitchFamily="34" charset="0"/>
+                                <a:cs typeface="Times New Roman" panose="02020603050405020304" pitchFamily="18" charset="0"/>
+                              </a:rPr>
+                              <m:t>𝜌</m:t>
+                            </m:r>
+                          </m:e>
+                          <m:sub>
+                            <m:r>
+                              <a:rPr lang="en-US" sz="1800" i="1">
+                                <a:effectLst/>
+                                <a:latin typeface="Cambria Math" panose="02040503050406030204" pitchFamily="18" charset="0"/>
+                                <a:ea typeface="Calibri" panose="020F0502020204030204" pitchFamily="34" charset="0"/>
+                                <a:cs typeface="Times New Roman" panose="02020603050405020304" pitchFamily="18" charset="0"/>
+                              </a:rPr>
+                              <m:t>𝑝</m:t>
+                            </m:r>
+                          </m:sub>
+                        </m:sSub>
+                        <m:r>
+                          <a:rPr lang="ru-RU" sz="1800" i="1">
+                            <a:effectLst/>
+                            <a:latin typeface="Cambria Math" panose="02040503050406030204" pitchFamily="18" charset="0"/>
+                            <a:ea typeface="Calibri" panose="020F0502020204030204" pitchFamily="34" charset="0"/>
+                            <a:cs typeface="Times New Roman" panose="02020603050405020304" pitchFamily="18" charset="0"/>
+                          </a:rPr>
+                          <m:t>+</m:t>
+                        </m:r>
+                        <m:r>
+                          <a:rPr lang="en-US" sz="1800" i="1">
+                            <a:effectLst/>
+                            <a:latin typeface="Cambria Math" panose="02040503050406030204" pitchFamily="18" charset="0"/>
+                            <a:ea typeface="Calibri" panose="020F0502020204030204" pitchFamily="34" charset="0"/>
+                            <a:cs typeface="Times New Roman" panose="02020603050405020304" pitchFamily="18" charset="0"/>
+                          </a:rPr>
+                          <m:t>𝑚</m:t>
+                        </m:r>
+                        <m:sSub>
+                          <m:sSubPr>
+                            <m:ctrlPr>
+                              <a:rPr lang="ru-RU" sz="2000" i="1">
+                                <a:effectLst/>
+                                <a:latin typeface="Cambria Math" panose="02040503050406030204" pitchFamily="18" charset="0"/>
+                              </a:rPr>
+                            </m:ctrlPr>
+                          </m:sSubPr>
+                          <m:e>
+                            <m:r>
+                              <a:rPr lang="en-US" sz="1800" i="1">
+                                <a:effectLst/>
+                                <a:latin typeface="Cambria Math" panose="02040503050406030204" pitchFamily="18" charset="0"/>
+                                <a:ea typeface="Calibri" panose="020F0502020204030204" pitchFamily="34" charset="0"/>
+                                <a:cs typeface="Times New Roman" panose="02020603050405020304" pitchFamily="18" charset="0"/>
+                              </a:rPr>
+                              <m:t>𝑆</m:t>
+                            </m:r>
+                          </m:e>
+                          <m:sub>
+                            <m:r>
+                              <a:rPr lang="en-US" sz="1800" i="1">
+                                <a:effectLst/>
+                                <a:latin typeface="Cambria Math" panose="02040503050406030204" pitchFamily="18" charset="0"/>
+                                <a:ea typeface="Calibri" panose="020F0502020204030204" pitchFamily="34" charset="0"/>
+                                <a:cs typeface="Times New Roman" panose="02020603050405020304" pitchFamily="18" charset="0"/>
+                              </a:rPr>
+                              <m:t>𝑜</m:t>
+                            </m:r>
+                          </m:sub>
+                        </m:sSub>
+                        <m:sSub>
+                          <m:sSubPr>
+                            <m:ctrlPr>
+                              <a:rPr lang="ru-RU" sz="2000" i="1">
+                                <a:effectLst/>
+                                <a:latin typeface="Cambria Math" panose="02040503050406030204" pitchFamily="18" charset="0"/>
+                              </a:rPr>
+                            </m:ctrlPr>
+                          </m:sSubPr>
+                          <m:e>
+                            <m:r>
+                              <a:rPr lang="en-US" sz="1800" i="1">
+                                <a:effectLst/>
+                                <a:latin typeface="Cambria Math" panose="02040503050406030204" pitchFamily="18" charset="0"/>
+                                <a:ea typeface="Calibri" panose="020F0502020204030204" pitchFamily="34" charset="0"/>
+                                <a:cs typeface="Times New Roman" panose="02020603050405020304" pitchFamily="18" charset="0"/>
+                              </a:rPr>
+                              <m:t>𝑤</m:t>
+                            </m:r>
+                          </m:e>
+                          <m:sub>
+                            <m:r>
+                              <a:rPr lang="en-US" sz="1800" i="1">
+                                <a:effectLst/>
+                                <a:latin typeface="Cambria Math" panose="02040503050406030204" pitchFamily="18" charset="0"/>
+                                <a:ea typeface="Calibri" panose="020F0502020204030204" pitchFamily="34" charset="0"/>
+                                <a:cs typeface="Times New Roman" panose="02020603050405020304" pitchFamily="18" charset="0"/>
+                              </a:rPr>
+                              <m:t>𝑝</m:t>
+                            </m:r>
+                          </m:sub>
+                        </m:sSub>
+                        <m:sSub>
+                          <m:sSubPr>
+                            <m:ctrlPr>
+                              <a:rPr lang="ru-RU" sz="2000" i="1">
+                                <a:effectLst/>
+                                <a:latin typeface="Cambria Math" panose="02040503050406030204" pitchFamily="18" charset="0"/>
+                              </a:rPr>
+                            </m:ctrlPr>
+                          </m:sSubPr>
+                          <m:e>
+                            <m:r>
+                              <a:rPr lang="en-US" sz="1800" i="1">
+                                <a:effectLst/>
+                                <a:latin typeface="Cambria Math" panose="02040503050406030204" pitchFamily="18" charset="0"/>
+                                <a:ea typeface="Calibri" panose="020F0502020204030204" pitchFamily="34" charset="0"/>
+                                <a:cs typeface="Times New Roman" panose="02020603050405020304" pitchFamily="18" charset="0"/>
+                              </a:rPr>
+                              <m:t>𝜌</m:t>
+                            </m:r>
+                          </m:e>
+                          <m:sub>
+                            <m:r>
+                              <a:rPr lang="en-US" sz="1800" i="1">
+                                <a:effectLst/>
+                                <a:latin typeface="Cambria Math" panose="02040503050406030204" pitchFamily="18" charset="0"/>
+                                <a:ea typeface="Calibri" panose="020F0502020204030204" pitchFamily="34" charset="0"/>
+                                <a:cs typeface="Times New Roman" panose="02020603050405020304" pitchFamily="18" charset="0"/>
+                              </a:rPr>
+                              <m:t>𝑜</m:t>
+                            </m:r>
+                          </m:sub>
+                        </m:sSub>
+                      </m:e>
+                    </m:d>
+                    <m:r>
+                      <a:rPr lang="ru-RU" sz="1800" i="1">
+                        <a:effectLst/>
+                        <a:latin typeface="Cambria Math" panose="02040503050406030204" pitchFamily="18" charset="0"/>
+                        <a:ea typeface="Calibri" panose="020F0502020204030204" pitchFamily="34" charset="0"/>
+                        <a:cs typeface="Times New Roman" panose="02020603050405020304" pitchFamily="18" charset="0"/>
+                      </a:rPr>
+                      <m:t>+</m:t>
+                    </m:r>
+                    <m:r>
+                      <a:rPr lang="ru-RU" sz="1800" i="1">
+                        <a:effectLst/>
+                        <a:latin typeface="Cambria Math" panose="02040503050406030204" pitchFamily="18" charset="0"/>
+                        <a:ea typeface="Calibri" panose="020F0502020204030204" pitchFamily="34" charset="0"/>
+                        <a:cs typeface="Cambria Math" panose="02040503050406030204" pitchFamily="18" charset="0"/>
+                      </a:rPr>
+                      <m:t>𝛻</m:t>
+                    </m:r>
+                    <m:d>
+                      <m:dPr>
+                        <m:ctrlPr>
+                          <a:rPr lang="ru-RU" sz="2000" i="1">
+                            <a:effectLst/>
+                            <a:latin typeface="Cambria Math" panose="02040503050406030204" pitchFamily="18" charset="0"/>
+                          </a:rPr>
+                        </m:ctrlPr>
+                      </m:dPr>
+                      <m:e>
+                        <m:sSub>
+                          <m:sSubPr>
+                            <m:ctrlPr>
+                              <a:rPr lang="ru-RU" sz="2000" i="1">
+                                <a:effectLst/>
+                                <a:latin typeface="Cambria Math" panose="02040503050406030204" pitchFamily="18" charset="0"/>
+                              </a:rPr>
+                            </m:ctrlPr>
+                          </m:sSubPr>
+                          <m:e>
+                            <m:r>
+                              <a:rPr lang="en-US" sz="1800" i="1">
+                                <a:effectLst/>
+                                <a:latin typeface="Cambria Math" panose="02040503050406030204" pitchFamily="18" charset="0"/>
+                                <a:ea typeface="Calibri" panose="020F0502020204030204" pitchFamily="34" charset="0"/>
+                                <a:cs typeface="Times New Roman" panose="02020603050405020304" pitchFamily="18" charset="0"/>
+                              </a:rPr>
+                              <m:t>𝑤</m:t>
+                            </m:r>
+                          </m:e>
+                          <m:sub>
+                            <m:r>
+                              <a:rPr lang="en-US" sz="1800" i="1">
+                                <a:effectLst/>
+                                <a:latin typeface="Cambria Math" panose="02040503050406030204" pitchFamily="18" charset="0"/>
+                                <a:ea typeface="Calibri" panose="020F0502020204030204" pitchFamily="34" charset="0"/>
+                                <a:cs typeface="Times New Roman" panose="02020603050405020304" pitchFamily="18" charset="0"/>
+                              </a:rPr>
+                              <m:t>𝑝𝑠</m:t>
+                            </m:r>
+                          </m:sub>
+                        </m:sSub>
+                        <m:sSub>
+                          <m:sSubPr>
+                            <m:ctrlPr>
+                              <a:rPr lang="ru-RU" sz="2000" i="1">
+                                <a:effectLst/>
+                                <a:latin typeface="Cambria Math" panose="02040503050406030204" pitchFamily="18" charset="0"/>
+                              </a:rPr>
+                            </m:ctrlPr>
+                          </m:sSubPr>
+                          <m:e>
+                            <m:r>
+                              <a:rPr lang="en-US" sz="1800" i="1">
+                                <a:effectLst/>
+                                <a:latin typeface="Cambria Math" panose="02040503050406030204" pitchFamily="18" charset="0"/>
+                                <a:ea typeface="Calibri" panose="020F0502020204030204" pitchFamily="34" charset="0"/>
+                                <a:cs typeface="Times New Roman" panose="02020603050405020304" pitchFamily="18" charset="0"/>
+                              </a:rPr>
+                              <m:t>𝜌</m:t>
+                            </m:r>
+                          </m:e>
+                          <m:sub>
+                            <m:r>
+                              <a:rPr lang="en-US" sz="1800" i="1">
+                                <a:effectLst/>
+                                <a:latin typeface="Cambria Math" panose="02040503050406030204" pitchFamily="18" charset="0"/>
+                                <a:ea typeface="Calibri" panose="020F0502020204030204" pitchFamily="34" charset="0"/>
+                                <a:cs typeface="Times New Roman" panose="02020603050405020304" pitchFamily="18" charset="0"/>
+                              </a:rPr>
+                              <m:t>𝑝</m:t>
+                            </m:r>
+                          </m:sub>
+                        </m:sSub>
+                        <m:sSub>
+                          <m:sSubPr>
+                            <m:ctrlPr>
+                              <a:rPr lang="ru-RU" sz="2000" b="1" i="1">
+                                <a:effectLst/>
+                                <a:latin typeface="Cambria Math" panose="02040503050406030204" pitchFamily="18" charset="0"/>
+                              </a:rPr>
+                            </m:ctrlPr>
+                          </m:sSubPr>
+                          <m:e>
+                            <m:r>
+                              <a:rPr lang="en-US" sz="1800" b="1" i="1">
+                                <a:effectLst/>
+                                <a:latin typeface="Cambria Math" panose="02040503050406030204" pitchFamily="18" charset="0"/>
+                                <a:ea typeface="Calibri" panose="020F0502020204030204" pitchFamily="34" charset="0"/>
+                                <a:cs typeface="Times New Roman" panose="02020603050405020304" pitchFamily="18" charset="0"/>
+                              </a:rPr>
+                              <m:t>𝑼</m:t>
+                            </m:r>
+                          </m:e>
+                          <m:sub>
+                            <m:r>
+                              <a:rPr lang="en-US" sz="1800" b="1" i="1">
+                                <a:effectLst/>
+                                <a:latin typeface="Cambria Math" panose="02040503050406030204" pitchFamily="18" charset="0"/>
+                                <a:ea typeface="Calibri" panose="020F0502020204030204" pitchFamily="34" charset="0"/>
+                                <a:cs typeface="Times New Roman" panose="02020603050405020304" pitchFamily="18" charset="0"/>
+                              </a:rPr>
+                              <m:t>𝒐</m:t>
+                            </m:r>
+                          </m:sub>
+                        </m:sSub>
+                        <m:r>
+                          <a:rPr lang="ru-RU" sz="1800" b="1" i="1">
+                            <a:effectLst/>
+                            <a:latin typeface="Cambria Math" panose="02040503050406030204" pitchFamily="18" charset="0"/>
+                            <a:ea typeface="Calibri" panose="020F0502020204030204" pitchFamily="34" charset="0"/>
+                            <a:cs typeface="Times New Roman" panose="02020603050405020304" pitchFamily="18" charset="0"/>
+                          </a:rPr>
+                          <m:t>+</m:t>
+                        </m:r>
+                        <m:sSub>
+                          <m:sSubPr>
+                            <m:ctrlPr>
+                              <a:rPr lang="ru-RU" sz="2000" i="1">
+                                <a:effectLst/>
+                                <a:latin typeface="Cambria Math" panose="02040503050406030204" pitchFamily="18" charset="0"/>
+                              </a:rPr>
+                            </m:ctrlPr>
+                          </m:sSubPr>
+                          <m:e>
+                            <m:r>
+                              <a:rPr lang="en-US" sz="1800" i="1">
+                                <a:effectLst/>
+                                <a:latin typeface="Cambria Math" panose="02040503050406030204" pitchFamily="18" charset="0"/>
+                                <a:ea typeface="Calibri" panose="020F0502020204030204" pitchFamily="34" charset="0"/>
+                                <a:cs typeface="Times New Roman" panose="02020603050405020304" pitchFamily="18" charset="0"/>
+                              </a:rPr>
+                              <m:t>𝑤</m:t>
+                            </m:r>
+                          </m:e>
+                          <m:sub>
+                            <m:r>
+                              <a:rPr lang="en-US" sz="1800" i="1">
+                                <a:effectLst/>
+                                <a:latin typeface="Cambria Math" panose="02040503050406030204" pitchFamily="18" charset="0"/>
+                                <a:ea typeface="Calibri" panose="020F0502020204030204" pitchFamily="34" charset="0"/>
+                                <a:cs typeface="Times New Roman" panose="02020603050405020304" pitchFamily="18" charset="0"/>
+                              </a:rPr>
+                              <m:t>𝑝</m:t>
+                            </m:r>
+                          </m:sub>
+                        </m:sSub>
+                        <m:sSub>
+                          <m:sSubPr>
+                            <m:ctrlPr>
+                              <a:rPr lang="ru-RU" sz="2000" i="1">
+                                <a:effectLst/>
+                                <a:latin typeface="Cambria Math" panose="02040503050406030204" pitchFamily="18" charset="0"/>
+                              </a:rPr>
+                            </m:ctrlPr>
+                          </m:sSubPr>
+                          <m:e>
+                            <m:r>
+                              <a:rPr lang="en-US" sz="1800" i="1">
+                                <a:effectLst/>
+                                <a:latin typeface="Cambria Math" panose="02040503050406030204" pitchFamily="18" charset="0"/>
+                                <a:ea typeface="Calibri" panose="020F0502020204030204" pitchFamily="34" charset="0"/>
+                                <a:cs typeface="Times New Roman" panose="02020603050405020304" pitchFamily="18" charset="0"/>
+                              </a:rPr>
+                              <m:t>𝜌</m:t>
+                            </m:r>
+                          </m:e>
+                          <m:sub>
+                            <m:r>
+                              <a:rPr lang="en-US" sz="1800" i="1">
+                                <a:effectLst/>
+                                <a:latin typeface="Cambria Math" panose="02040503050406030204" pitchFamily="18" charset="0"/>
+                                <a:ea typeface="Calibri" panose="020F0502020204030204" pitchFamily="34" charset="0"/>
+                                <a:cs typeface="Times New Roman" panose="02020603050405020304" pitchFamily="18" charset="0"/>
+                              </a:rPr>
+                              <m:t>𝑜</m:t>
+                            </m:r>
+                          </m:sub>
+                        </m:sSub>
+                        <m:sSub>
+                          <m:sSubPr>
+                            <m:ctrlPr>
+                              <a:rPr lang="ru-RU" sz="2000" b="1" i="1">
+                                <a:effectLst/>
+                                <a:latin typeface="Cambria Math" panose="02040503050406030204" pitchFamily="18" charset="0"/>
+                              </a:rPr>
+                            </m:ctrlPr>
+                          </m:sSubPr>
+                          <m:e>
+                            <m:r>
+                              <a:rPr lang="en-US" sz="1800" b="1" i="1">
+                                <a:effectLst/>
+                                <a:latin typeface="Cambria Math" panose="02040503050406030204" pitchFamily="18" charset="0"/>
+                                <a:ea typeface="Calibri" panose="020F0502020204030204" pitchFamily="34" charset="0"/>
+                                <a:cs typeface="Times New Roman" panose="02020603050405020304" pitchFamily="18" charset="0"/>
+                              </a:rPr>
+                              <m:t>𝑼</m:t>
+                            </m:r>
+                          </m:e>
+                          <m:sub>
+                            <m:r>
+                              <a:rPr lang="en-US" sz="1800" b="1" i="1">
+                                <a:effectLst/>
+                                <a:latin typeface="Cambria Math" panose="02040503050406030204" pitchFamily="18" charset="0"/>
+                                <a:ea typeface="Calibri" panose="020F0502020204030204" pitchFamily="34" charset="0"/>
+                                <a:cs typeface="Times New Roman" panose="02020603050405020304" pitchFamily="18" charset="0"/>
+                              </a:rPr>
+                              <m:t>𝒐</m:t>
+                            </m:r>
+                          </m:sub>
+                        </m:sSub>
+                      </m:e>
+                    </m:d>
+                    <m:r>
+                      <a:rPr lang="ru-RU" sz="1800" i="1">
+                        <a:effectLst/>
+                        <a:latin typeface="Cambria Math" panose="02040503050406030204" pitchFamily="18" charset="0"/>
+                        <a:ea typeface="Calibri" panose="020F0502020204030204" pitchFamily="34" charset="0"/>
+                        <a:cs typeface="Times New Roman" panose="02020603050405020304" pitchFamily="18" charset="0"/>
+                      </a:rPr>
+                      <m:t>=</m:t>
+                    </m:r>
+                    <m:sSub>
+                      <m:sSubPr>
+                        <m:ctrlPr>
+                          <a:rPr lang="ru-RU" sz="2000" i="1">
+                            <a:effectLst/>
+                            <a:latin typeface="Cambria Math" panose="02040503050406030204" pitchFamily="18" charset="0"/>
+                          </a:rPr>
+                        </m:ctrlPr>
+                      </m:sSubPr>
+                      <m:e>
+                        <m:r>
+                          <a:rPr lang="en-US" sz="1800" i="1">
+                            <a:effectLst/>
+                            <a:latin typeface="Cambria Math" panose="02040503050406030204" pitchFamily="18" charset="0"/>
+                            <a:ea typeface="Calibri" panose="020F0502020204030204" pitchFamily="34" charset="0"/>
+                            <a:cs typeface="Times New Roman" panose="02020603050405020304" pitchFamily="18" charset="0"/>
+                          </a:rPr>
+                          <m:t>𝑞</m:t>
+                        </m:r>
+                      </m:e>
+                      <m:sub>
+                        <m:r>
+                          <a:rPr lang="ru-RU" sz="1800" i="1">
+                            <a:effectLst/>
+                            <a:latin typeface="Cambria Math" panose="02040503050406030204" pitchFamily="18" charset="0"/>
+                            <a:ea typeface="Calibri" panose="020F0502020204030204" pitchFamily="34" charset="0"/>
+                            <a:cs typeface="Times New Roman" panose="02020603050405020304" pitchFamily="18" charset="0"/>
+                          </a:rPr>
+                          <m:t>𝑝</m:t>
+                        </m:r>
+                      </m:sub>
+                    </m:sSub>
+                    <m:sSub>
+                      <m:sSubPr>
+                        <m:ctrlPr>
+                          <a:rPr lang="ru-RU" sz="2000" i="1">
+                            <a:effectLst/>
+                            <a:latin typeface="Cambria Math" panose="02040503050406030204" pitchFamily="18" charset="0"/>
+                          </a:rPr>
+                        </m:ctrlPr>
+                      </m:sSubPr>
+                      <m:e>
+                        <m:r>
+                          <a:rPr lang="en-US" sz="1800" i="1">
+                            <a:effectLst/>
+                            <a:latin typeface="Cambria Math" panose="02040503050406030204" pitchFamily="18" charset="0"/>
+                            <a:ea typeface="Calibri" panose="020F0502020204030204" pitchFamily="34" charset="0"/>
+                            <a:cs typeface="Times New Roman" panose="02020603050405020304" pitchFamily="18" charset="0"/>
+                          </a:rPr>
+                          <m:t>𝜌</m:t>
+                        </m:r>
+                      </m:e>
+                      <m:sub>
+                        <m:r>
+                          <a:rPr lang="en-US" sz="1800" i="1">
+                            <a:effectLst/>
+                            <a:latin typeface="Cambria Math" panose="02040503050406030204" pitchFamily="18" charset="0"/>
+                            <a:ea typeface="Calibri" panose="020F0502020204030204" pitchFamily="34" charset="0"/>
+                            <a:cs typeface="Times New Roman" panose="02020603050405020304" pitchFamily="18" charset="0"/>
+                          </a:rPr>
+                          <m:t>𝑝</m:t>
+                        </m:r>
+                      </m:sub>
+                    </m:sSub>
+                    <m:r>
+                      <a:rPr lang="ru-RU" sz="1800" i="1">
+                        <a:effectLst/>
+                        <a:latin typeface="Cambria Math" panose="02040503050406030204" pitchFamily="18" charset="0"/>
+                        <a:ea typeface="Calibri" panose="020F0502020204030204" pitchFamily="34" charset="0"/>
+                        <a:cs typeface="Times New Roman" panose="02020603050405020304" pitchFamily="18" charset="0"/>
+                      </a:rPr>
+                      <m:t>+</m:t>
+                    </m:r>
+                    <m:sSub>
+                      <m:sSubPr>
+                        <m:ctrlPr>
+                          <a:rPr lang="ru-RU" sz="2000" i="1">
+                            <a:effectLst/>
+                            <a:latin typeface="Cambria Math" panose="02040503050406030204" pitchFamily="18" charset="0"/>
+                          </a:rPr>
+                        </m:ctrlPr>
+                      </m:sSubPr>
+                      <m:e>
+                        <m:r>
+                          <a:rPr lang="en-US" sz="1800" i="1">
+                            <a:effectLst/>
+                            <a:latin typeface="Cambria Math" panose="02040503050406030204" pitchFamily="18" charset="0"/>
+                            <a:ea typeface="Calibri" panose="020F0502020204030204" pitchFamily="34" charset="0"/>
+                            <a:cs typeface="Times New Roman" panose="02020603050405020304" pitchFamily="18" charset="0"/>
+                          </a:rPr>
+                          <m:t>𝑞</m:t>
+                        </m:r>
+                      </m:e>
+                      <m:sub>
+                        <m:r>
+                          <a:rPr lang="ru-RU" sz="1800" i="1">
+                            <a:effectLst/>
+                            <a:latin typeface="Cambria Math" panose="02040503050406030204" pitchFamily="18" charset="0"/>
+                            <a:ea typeface="Calibri" panose="020F0502020204030204" pitchFamily="34" charset="0"/>
+                            <a:cs typeface="Times New Roman" panose="02020603050405020304" pitchFamily="18" charset="0"/>
+                          </a:rPr>
+                          <m:t>𝑜</m:t>
+                        </m:r>
+                      </m:sub>
+                    </m:sSub>
+                    <m:d>
+                      <m:dPr>
+                        <m:ctrlPr>
+                          <a:rPr lang="ru-RU" sz="2000" i="1">
+                            <a:effectLst/>
+                            <a:latin typeface="Cambria Math" panose="02040503050406030204" pitchFamily="18" charset="0"/>
+                          </a:rPr>
+                        </m:ctrlPr>
+                      </m:dPr>
+                      <m:e>
+                        <m:sSub>
+                          <m:sSubPr>
+                            <m:ctrlPr>
+                              <a:rPr lang="ru-RU" sz="2000" i="1">
+                                <a:effectLst/>
+                                <a:latin typeface="Cambria Math" panose="02040503050406030204" pitchFamily="18" charset="0"/>
+                              </a:rPr>
+                            </m:ctrlPr>
+                          </m:sSubPr>
+                          <m:e>
+                            <m:sSub>
+                              <m:sSubPr>
+                                <m:ctrlPr>
+                                  <a:rPr lang="ru-RU" sz="2000" i="1">
+                                    <a:effectLst/>
+                                    <a:latin typeface="Cambria Math" panose="02040503050406030204" pitchFamily="18" charset="0"/>
+                                  </a:rPr>
+                                </m:ctrlPr>
+                              </m:sSubPr>
+                              <m:e>
+                                <m:r>
+                                  <a:rPr lang="ru-RU" sz="1800" i="1">
+                                    <a:effectLst/>
+                                    <a:latin typeface="Cambria Math" panose="02040503050406030204" pitchFamily="18" charset="0"/>
+                                    <a:ea typeface="Calibri" panose="020F0502020204030204" pitchFamily="34" charset="0"/>
+                                    <a:cs typeface="Times New Roman" panose="02020603050405020304" pitchFamily="18" charset="0"/>
+                                  </a:rPr>
+                                  <m:t>𝑤</m:t>
+                                </m:r>
+                              </m:e>
+                              <m:sub>
+                                <m:r>
+                                  <a:rPr lang="ru-RU" sz="1800" i="1">
+                                    <a:effectLst/>
+                                    <a:latin typeface="Cambria Math" panose="02040503050406030204" pitchFamily="18" charset="0"/>
+                                    <a:ea typeface="Calibri" panose="020F0502020204030204" pitchFamily="34" charset="0"/>
+                                    <a:cs typeface="Times New Roman" panose="02020603050405020304" pitchFamily="18" charset="0"/>
+                                  </a:rPr>
+                                  <m:t>𝑝𝑠</m:t>
+                                </m:r>
+                              </m:sub>
+                            </m:sSub>
+                            <m:r>
+                              <a:rPr lang="en-US" sz="1800" i="1">
+                                <a:effectLst/>
+                                <a:latin typeface="Cambria Math" panose="02040503050406030204" pitchFamily="18" charset="0"/>
+                                <a:ea typeface="Calibri" panose="020F0502020204030204" pitchFamily="34" charset="0"/>
+                                <a:cs typeface="Times New Roman" panose="02020603050405020304" pitchFamily="18" charset="0"/>
+                              </a:rPr>
+                              <m:t>𝜌</m:t>
+                            </m:r>
+                          </m:e>
+                          <m:sub>
+                            <m:r>
+                              <a:rPr lang="en-US" sz="1800" i="1">
+                                <a:effectLst/>
+                                <a:latin typeface="Cambria Math" panose="02040503050406030204" pitchFamily="18" charset="0"/>
+                                <a:ea typeface="Calibri" panose="020F0502020204030204" pitchFamily="34" charset="0"/>
+                                <a:cs typeface="Times New Roman" panose="02020603050405020304" pitchFamily="18" charset="0"/>
+                              </a:rPr>
+                              <m:t>𝑝</m:t>
+                            </m:r>
+                          </m:sub>
+                        </m:sSub>
+                        <m:sSub>
+                          <m:sSubPr>
+                            <m:ctrlPr>
+                              <a:rPr lang="ru-RU" sz="2000" i="1">
+                                <a:effectLst/>
+                                <a:latin typeface="Cambria Math" panose="02040503050406030204" pitchFamily="18" charset="0"/>
+                              </a:rPr>
+                            </m:ctrlPr>
+                          </m:sSubPr>
+                          <m:e>
+                            <m:r>
+                              <a:rPr lang="ru-RU" sz="1800" i="1">
+                                <a:effectLst/>
+                                <a:latin typeface="Cambria Math" panose="02040503050406030204" pitchFamily="18" charset="0"/>
+                                <a:ea typeface="Calibri" panose="020F0502020204030204" pitchFamily="34" charset="0"/>
+                                <a:cs typeface="Times New Roman" panose="02020603050405020304" pitchFamily="18" charset="0"/>
+                              </a:rPr>
+                              <m:t>+</m:t>
+                            </m:r>
+                            <m:r>
+                              <a:rPr lang="ru-RU" sz="1800" i="1">
+                                <a:effectLst/>
+                                <a:latin typeface="Cambria Math" panose="02040503050406030204" pitchFamily="18" charset="0"/>
+                                <a:ea typeface="Calibri" panose="020F0502020204030204" pitchFamily="34" charset="0"/>
+                                <a:cs typeface="Times New Roman" panose="02020603050405020304" pitchFamily="18" charset="0"/>
+                              </a:rPr>
+                              <m:t>𝑤</m:t>
+                            </m:r>
+                          </m:e>
+                          <m:sub>
+                            <m:r>
+                              <a:rPr lang="ru-RU" sz="1800" i="1">
+                                <a:effectLst/>
+                                <a:latin typeface="Cambria Math" panose="02040503050406030204" pitchFamily="18" charset="0"/>
+                                <a:ea typeface="Calibri" panose="020F0502020204030204" pitchFamily="34" charset="0"/>
+                                <a:cs typeface="Times New Roman" panose="02020603050405020304" pitchFamily="18" charset="0"/>
+                              </a:rPr>
+                              <m:t>𝑝</m:t>
+                            </m:r>
+                          </m:sub>
+                        </m:sSub>
+                        <m:sSub>
+                          <m:sSubPr>
+                            <m:ctrlPr>
+                              <a:rPr lang="ru-RU" sz="2000" i="1">
+                                <a:effectLst/>
+                                <a:latin typeface="Cambria Math" panose="02040503050406030204" pitchFamily="18" charset="0"/>
+                              </a:rPr>
+                            </m:ctrlPr>
+                          </m:sSubPr>
+                          <m:e>
+                            <m:r>
+                              <a:rPr lang="en-US" sz="1800" i="1">
+                                <a:effectLst/>
+                                <a:latin typeface="Cambria Math" panose="02040503050406030204" pitchFamily="18" charset="0"/>
+                                <a:ea typeface="Calibri" panose="020F0502020204030204" pitchFamily="34" charset="0"/>
+                                <a:cs typeface="Times New Roman" panose="02020603050405020304" pitchFamily="18" charset="0"/>
+                              </a:rPr>
+                              <m:t>𝜌</m:t>
+                            </m:r>
+                          </m:e>
+                          <m:sub>
+                            <m:r>
+                              <a:rPr lang="en-US" sz="1800" i="1">
+                                <a:effectLst/>
+                                <a:latin typeface="Cambria Math" panose="02040503050406030204" pitchFamily="18" charset="0"/>
+                                <a:ea typeface="Calibri" panose="020F0502020204030204" pitchFamily="34" charset="0"/>
+                                <a:cs typeface="Times New Roman" panose="02020603050405020304" pitchFamily="18" charset="0"/>
+                              </a:rPr>
+                              <m:t>𝑜</m:t>
+                            </m:r>
+                          </m:sub>
+                        </m:sSub>
+                      </m:e>
+                    </m:d>
+                  </m:oMath>
+                </a14:m>
+                <a:r>
+                  <a:rPr lang="ru-RU" sz="2000" b="1" i="1" dirty="0">
+                    <a:effectLst/>
+                    <a:latin typeface="Times New Roman" panose="02020603050405020304" pitchFamily="18" charset="0"/>
+                    <a:ea typeface="Calibri" panose="020F0502020204030204" pitchFamily="34" charset="0"/>
+                  </a:rPr>
+                  <a:t> </a:t>
+                </a:r>
+                <a:endParaRPr lang="ru-RU" sz="2000" dirty="0">
+                  <a:effectLst/>
+                  <a:latin typeface="Times New Roman" panose="02020603050405020304" pitchFamily="18" charset="0"/>
+                  <a:ea typeface="Calibri" panose="020F0502020204030204" pitchFamily="34" charset="0"/>
+                </a:endParaRPr>
+              </a:p>
+            </p:txBody>
+          </p:sp>
+        </mc:Choice>
+        <mc:Fallback>
+          <p:sp>
+            <p:nvSpPr>
+              <p:cNvPr id="4" name="TextBox 3">
+                <a:extLst>
+                  <a:ext uri="{FF2B5EF4-FFF2-40B4-BE49-F238E27FC236}">
+                    <a16:creationId xmlns:a16="http://schemas.microsoft.com/office/drawing/2014/main" id="{456A890B-8C15-42D5-819D-6F5036C7C1D2}"/>
+                  </a:ext>
+                </a:extLst>
+              </p:cNvPr>
+              <p:cNvSpPr txBox="1">
+                <a:spLocks noRot="1" noChangeAspect="1" noMove="1" noResize="1" noEditPoints="1" noAdjustHandles="1" noChangeArrowheads="1" noChangeShapeType="1" noTextEdit="1"/>
+              </p:cNvSpPr>
+              <p:nvPr/>
+            </p:nvSpPr>
+            <p:spPr>
+              <a:xfrm>
+                <a:off x="589934" y="1895556"/>
+                <a:ext cx="8996517" cy="2564933"/>
+              </a:xfrm>
+              <a:prstGeom prst="rect">
+                <a:avLst/>
+              </a:prstGeom>
+              <a:blipFill>
+                <a:blip r:embed="rId2"/>
+                <a:stretch>
+                  <a:fillRect/>
+                </a:stretch>
+              </a:blipFill>
+            </p:spPr>
+            <p:txBody>
+              <a:bodyPr/>
+              <a:lstStyle/>
+              <a:p>
+                <a:r>
+                  <a:rPr lang="ru-RU">
+                    <a:noFill/>
+                  </a:rPr>
+                  <a:t> </a:t>
+                </a:r>
+              </a:p>
+            </p:txBody>
+          </p:sp>
+        </mc:Fallback>
+      </mc:AlternateContent>
+      <mc:AlternateContent xmlns:mc="http://schemas.openxmlformats.org/markup-compatibility/2006">
+        <mc:Choice xmlns:a14="http://schemas.microsoft.com/office/drawing/2010/main" Requires="a14">
+          <p:sp>
+            <p:nvSpPr>
+              <p:cNvPr id="6" name="TextBox 5">
+                <a:extLst>
+                  <a:ext uri="{FF2B5EF4-FFF2-40B4-BE49-F238E27FC236}">
+                    <a16:creationId xmlns:a16="http://schemas.microsoft.com/office/drawing/2014/main" id="{E2E30F23-9BBB-4E0E-8B14-5AB1F8E3E5B4}"/>
+                  </a:ext>
+                </a:extLst>
+              </p:cNvPr>
+              <p:cNvSpPr txBox="1"/>
+              <p:nvPr/>
+            </p:nvSpPr>
+            <p:spPr>
+              <a:xfrm>
+                <a:off x="245806" y="5055139"/>
+                <a:ext cx="6096000" cy="665695"/>
+              </a:xfrm>
+              <a:prstGeom prst="rect">
+                <a:avLst/>
+              </a:prstGeom>
+              <a:noFill/>
+            </p:spPr>
+            <p:txBody>
+              <a:bodyPr wrap="square">
+                <a:spAutoFit/>
+              </a:bodyPr>
+              <a:lstStyle/>
+              <a:p>
+                <a14:m>
+                  <m:oMathPara xmlns:m="http://schemas.openxmlformats.org/officeDocument/2006/math">
+                    <m:oMathParaPr>
+                      <m:jc m:val="centerGroup"/>
+                    </m:oMathParaPr>
+                    <m:oMath xmlns:m="http://schemas.openxmlformats.org/officeDocument/2006/math">
+                      <m:sSub>
+                        <m:sSubPr>
+                          <m:ctrlPr>
+                            <a:rPr lang="ru-RU" b="1" i="1" smtClean="0">
+                              <a:effectLst/>
+                              <a:latin typeface="Cambria Math" panose="02040503050406030204" pitchFamily="18" charset="0"/>
+                            </a:rPr>
+                          </m:ctrlPr>
+                        </m:sSubPr>
+                        <m:e>
+                          <m:r>
+                            <a:rPr lang="en-US" sz="1800" b="1" i="1">
+                              <a:effectLst/>
+                              <a:latin typeface="Cambria Math" panose="02040503050406030204" pitchFamily="18" charset="0"/>
+                              <a:ea typeface="Calibri" panose="020F0502020204030204" pitchFamily="34" charset="0"/>
+                              <a:cs typeface="Times New Roman" panose="02020603050405020304" pitchFamily="18" charset="0"/>
+                            </a:rPr>
+                            <m:t>𝑼</m:t>
+                          </m:r>
+                        </m:e>
+                        <m:sub>
+                          <m:r>
+                            <a:rPr lang="en-US" sz="1800" b="1" i="1">
+                              <a:effectLst/>
+                              <a:latin typeface="Cambria Math" panose="02040503050406030204" pitchFamily="18" charset="0"/>
+                              <a:ea typeface="Calibri" panose="020F0502020204030204" pitchFamily="34" charset="0"/>
+                              <a:cs typeface="Times New Roman" panose="02020603050405020304" pitchFamily="18" charset="0"/>
+                            </a:rPr>
+                            <m:t>𝜶</m:t>
+                          </m:r>
+                        </m:sub>
+                      </m:sSub>
+                      <m:r>
+                        <a:rPr lang="ru-RU" sz="1800" i="1">
+                          <a:effectLst/>
+                          <a:latin typeface="Cambria Math" panose="02040503050406030204" pitchFamily="18" charset="0"/>
+                          <a:ea typeface="Calibri" panose="020F0502020204030204" pitchFamily="34" charset="0"/>
+                          <a:cs typeface="Times New Roman" panose="02020603050405020304" pitchFamily="18" charset="0"/>
+                        </a:rPr>
+                        <m:t>=</m:t>
+                      </m:r>
+                      <m:r>
+                        <a:rPr lang="ru-RU" sz="1800" i="1">
+                          <a:effectLst/>
+                          <a:latin typeface="Cambria Math" panose="02040503050406030204" pitchFamily="18" charset="0"/>
+                          <a:ea typeface="Calibri" panose="020F0502020204030204" pitchFamily="34" charset="0"/>
+                        </a:rPr>
+                        <m:t>−</m:t>
+                      </m:r>
+                      <m:r>
+                        <a:rPr lang="en-US" i="1">
+                          <a:latin typeface="Cambria Math" panose="02040503050406030204" pitchFamily="18" charset="0"/>
+                          <a:ea typeface="Calibri" panose="020F0502020204030204" pitchFamily="34" charset="0"/>
+                          <a:cs typeface="Times New Roman" panose="02020603050405020304" pitchFamily="18" charset="0"/>
+                        </a:rPr>
+                        <m:t>𝑘</m:t>
+                      </m:r>
+                      <m:f>
+                        <m:fPr>
+                          <m:ctrlPr>
+                            <a:rPr lang="ru-RU" i="1">
+                              <a:latin typeface="Cambria Math" panose="02040503050406030204" pitchFamily="18" charset="0"/>
+                            </a:rPr>
+                          </m:ctrlPr>
+                        </m:fPr>
+                        <m:num>
+                          <m:sSub>
+                            <m:sSubPr>
+                              <m:ctrlPr>
+                                <a:rPr lang="ru-RU" i="1">
+                                  <a:latin typeface="Cambria Math" panose="02040503050406030204" pitchFamily="18" charset="0"/>
+                                </a:rPr>
+                              </m:ctrlPr>
+                            </m:sSubPr>
+                            <m:e>
+                              <m:r>
+                                <a:rPr lang="en-US" i="1">
+                                  <a:latin typeface="Cambria Math" panose="02040503050406030204" pitchFamily="18" charset="0"/>
+                                  <a:ea typeface="Calibri" panose="020F0502020204030204" pitchFamily="34" charset="0"/>
+                                  <a:cs typeface="Times New Roman" panose="02020603050405020304" pitchFamily="18" charset="0"/>
+                                </a:rPr>
+                                <m:t>𝑓</m:t>
+                              </m:r>
+                            </m:e>
+                            <m:sub>
+                              <m:r>
+                                <a:rPr lang="en-US" i="1">
+                                  <a:latin typeface="Cambria Math" panose="02040503050406030204" pitchFamily="18" charset="0"/>
+                                  <a:ea typeface="Calibri" panose="020F0502020204030204" pitchFamily="34" charset="0"/>
+                                  <a:cs typeface="Times New Roman" panose="02020603050405020304" pitchFamily="18" charset="0"/>
+                                </a:rPr>
+                                <m:t>𝛼</m:t>
+                              </m:r>
+                            </m:sub>
+                          </m:sSub>
+                        </m:num>
+                        <m:den>
+                          <m:sSub>
+                            <m:sSubPr>
+                              <m:ctrlPr>
+                                <a:rPr lang="ru-RU" i="1">
+                                  <a:latin typeface="Cambria Math" panose="02040503050406030204" pitchFamily="18" charset="0"/>
+                                </a:rPr>
+                              </m:ctrlPr>
+                            </m:sSubPr>
+                            <m:e>
+                              <m:r>
+                                <a:rPr lang="en-US" i="1">
+                                  <a:latin typeface="Cambria Math" panose="02040503050406030204" pitchFamily="18" charset="0"/>
+                                  <a:ea typeface="Calibri" panose="020F0502020204030204" pitchFamily="34" charset="0"/>
+                                  <a:cs typeface="Times New Roman" panose="02020603050405020304" pitchFamily="18" charset="0"/>
+                                </a:rPr>
+                                <m:t>𝜇</m:t>
+                              </m:r>
+                            </m:e>
+                            <m:sub>
+                              <m:r>
+                                <a:rPr lang="en-US" i="1">
+                                  <a:latin typeface="Cambria Math" panose="02040503050406030204" pitchFamily="18" charset="0"/>
+                                  <a:ea typeface="Calibri" panose="020F0502020204030204" pitchFamily="34" charset="0"/>
+                                  <a:cs typeface="Times New Roman" panose="02020603050405020304" pitchFamily="18" charset="0"/>
+                                </a:rPr>
+                                <m:t>𝛼</m:t>
+                              </m:r>
+                            </m:sub>
+                          </m:sSub>
+                        </m:den>
+                      </m:f>
+                      <m:r>
+                        <a:rPr lang="en-US" sz="1800" i="1">
+                          <a:effectLst/>
+                          <a:latin typeface="Cambria Math" panose="02040503050406030204" pitchFamily="18" charset="0"/>
+                          <a:ea typeface="Calibri" panose="020F0502020204030204" pitchFamily="34" charset="0"/>
+                          <a:cs typeface="Cambria Math" panose="02040503050406030204" pitchFamily="18" charset="0"/>
+                        </a:rPr>
+                        <m:t>𝛻</m:t>
+                      </m:r>
+                      <m:r>
+                        <a:rPr lang="en-US" b="0" i="1" smtClean="0">
+                          <a:effectLst/>
+                          <a:latin typeface="Cambria Math" panose="02040503050406030204" pitchFamily="18" charset="0"/>
+                        </a:rPr>
+                        <m:t>𝑃</m:t>
+                      </m:r>
+                      <m:r>
+                        <a:rPr lang="ru-RU" sz="1800" i="1">
+                          <a:effectLst/>
+                          <a:latin typeface="Cambria Math" panose="02040503050406030204" pitchFamily="18" charset="0"/>
+                          <a:ea typeface="Calibri" panose="020F0502020204030204" pitchFamily="34" charset="0"/>
+                          <a:cs typeface="Times New Roman" panose="02020603050405020304" pitchFamily="18" charset="0"/>
+                        </a:rPr>
+                        <m:t>,    </m:t>
+                      </m:r>
+                      <m:r>
+                        <a:rPr lang="ru-RU" sz="1800">
+                          <a:effectLst/>
+                          <a:latin typeface="Cambria Math" panose="02040503050406030204" pitchFamily="18" charset="0"/>
+                          <a:ea typeface="Calibri" panose="020F0502020204030204" pitchFamily="34" charset="0"/>
+                        </a:rPr>
+                        <m:t>где</m:t>
+                      </m:r>
+                      <m:r>
+                        <a:rPr lang="ru-RU" sz="1800">
+                          <a:effectLst/>
+                          <a:latin typeface="Cambria Math" panose="02040503050406030204" pitchFamily="18" charset="0"/>
+                          <a:ea typeface="Calibri" panose="020F0502020204030204" pitchFamily="34" charset="0"/>
+                          <a:cs typeface="Times New Roman" panose="02020603050405020304" pitchFamily="18" charset="0"/>
+                        </a:rPr>
+                        <m:t> </m:t>
+                      </m:r>
+                      <m:r>
+                        <a:rPr lang="en-US" sz="1800" i="1">
+                          <a:effectLst/>
+                          <a:latin typeface="Cambria Math" panose="02040503050406030204" pitchFamily="18" charset="0"/>
+                          <a:ea typeface="Calibri" panose="020F0502020204030204" pitchFamily="34" charset="0"/>
+                          <a:cs typeface="Times New Roman" panose="02020603050405020304" pitchFamily="18" charset="0"/>
+                        </a:rPr>
+                        <m:t>𝛼</m:t>
+                      </m:r>
+                      <m:r>
+                        <a:rPr lang="ru-RU" sz="1800" i="1">
+                          <a:effectLst/>
+                          <a:latin typeface="Cambria Math" panose="02040503050406030204" pitchFamily="18" charset="0"/>
+                          <a:ea typeface="Calibri" panose="020F0502020204030204" pitchFamily="34" charset="0"/>
+                          <a:cs typeface="Times New Roman" panose="02020603050405020304" pitchFamily="18" charset="0"/>
+                        </a:rPr>
+                        <m:t>=</m:t>
+                      </m:r>
+                      <m:r>
+                        <a:rPr lang="en-US" sz="1800" i="1">
+                          <a:effectLst/>
+                          <a:latin typeface="Cambria Math" panose="02040503050406030204" pitchFamily="18" charset="0"/>
+                          <a:ea typeface="Calibri" panose="020F0502020204030204" pitchFamily="34" charset="0"/>
+                          <a:cs typeface="Times New Roman" panose="02020603050405020304" pitchFamily="18" charset="0"/>
+                        </a:rPr>
+                        <m:t>𝑜</m:t>
+                      </m:r>
+                      <m:r>
+                        <a:rPr lang="ru-RU" sz="1800" i="1">
+                          <a:effectLst/>
+                          <a:latin typeface="Cambria Math" panose="02040503050406030204" pitchFamily="18" charset="0"/>
+                          <a:ea typeface="Calibri" panose="020F0502020204030204" pitchFamily="34" charset="0"/>
+                          <a:cs typeface="Times New Roman" panose="02020603050405020304" pitchFamily="18" charset="0"/>
+                        </a:rPr>
+                        <m:t>,</m:t>
+                      </m:r>
+                      <m:r>
+                        <a:rPr lang="en-US" sz="1800" i="1">
+                          <a:effectLst/>
+                          <a:latin typeface="Cambria Math" panose="02040503050406030204" pitchFamily="18" charset="0"/>
+                          <a:ea typeface="Calibri" panose="020F0502020204030204" pitchFamily="34" charset="0"/>
+                          <a:cs typeface="Times New Roman" panose="02020603050405020304" pitchFamily="18" charset="0"/>
+                        </a:rPr>
+                        <m:t>𝑤</m:t>
+                      </m:r>
+                    </m:oMath>
+                  </m:oMathPara>
+                </a14:m>
+                <a:endParaRPr lang="ru-RU" dirty="0"/>
+              </a:p>
+            </p:txBody>
+          </p:sp>
+        </mc:Choice>
+        <mc:Fallback>
+          <p:sp>
+            <p:nvSpPr>
+              <p:cNvPr id="6" name="TextBox 5">
+                <a:extLst>
+                  <a:ext uri="{FF2B5EF4-FFF2-40B4-BE49-F238E27FC236}">
+                    <a16:creationId xmlns:a16="http://schemas.microsoft.com/office/drawing/2014/main" id="{E2E30F23-9BBB-4E0E-8B14-5AB1F8E3E5B4}"/>
+                  </a:ext>
+                </a:extLst>
+              </p:cNvPr>
+              <p:cNvSpPr txBox="1">
+                <a:spLocks noRot="1" noChangeAspect="1" noMove="1" noResize="1" noEditPoints="1" noAdjustHandles="1" noChangeArrowheads="1" noChangeShapeType="1" noTextEdit="1"/>
+              </p:cNvSpPr>
+              <p:nvPr/>
+            </p:nvSpPr>
+            <p:spPr>
+              <a:xfrm>
+                <a:off x="245806" y="5055139"/>
+                <a:ext cx="6096000" cy="665695"/>
+              </a:xfrm>
+              <a:prstGeom prst="rect">
+                <a:avLst/>
+              </a:prstGeom>
+              <a:blipFill>
+                <a:blip r:embed="rId3"/>
+                <a:stretch>
+                  <a:fillRect/>
+                </a:stretch>
+              </a:blipFill>
+            </p:spPr>
+            <p:txBody>
+              <a:bodyPr/>
+              <a:lstStyle/>
+              <a:p>
+                <a:r>
+                  <a:rPr lang="ru-RU">
+                    <a:noFill/>
+                  </a:rPr>
+                  <a:t> </a:t>
+                </a:r>
+              </a:p>
+            </p:txBody>
+          </p:sp>
+        </mc:Fallback>
+      </mc:AlternateContent>
     </p:spTree>
     <p:extLst>
       <p:ext uri="{BB962C8B-B14F-4D97-AF65-F5344CB8AC3E}">

--- a/resources/Лазарев.pptx
+++ b/resources/Лазарев.pptx
@@ -9,13 +9,12 @@
     <p:sldId id="257" r:id="rId3"/>
     <p:sldId id="258" r:id="rId4"/>
     <p:sldId id="259" r:id="rId5"/>
-    <p:sldId id="261" r:id="rId6"/>
-    <p:sldId id="260" r:id="rId7"/>
-    <p:sldId id="262" r:id="rId8"/>
-    <p:sldId id="263" r:id="rId9"/>
-    <p:sldId id="265" r:id="rId10"/>
-    <p:sldId id="264" r:id="rId11"/>
-    <p:sldId id="266" r:id="rId12"/>
+    <p:sldId id="260" r:id="rId6"/>
+    <p:sldId id="262" r:id="rId7"/>
+    <p:sldId id="263" r:id="rId8"/>
+    <p:sldId id="265" r:id="rId9"/>
+    <p:sldId id="264" r:id="rId10"/>
+    <p:sldId id="266" r:id="rId11"/>
   </p:sldIdLst>
   <p:sldSz cx="12192000" cy="6858000"/>
   <p:notesSz cx="6858000" cy="9144000"/>
@@ -122,7 +121,7 @@
             <a:srgbClr val="A4A3A4"/>
           </p15:clr>
         </p15:guide>
-        <p15:guide id="2" pos="3840" userDrawn="1">
+        <p15:guide id="2" pos="3795" userDrawn="1">
           <p15:clr>
             <a:srgbClr val="A4A3A4"/>
           </p15:clr>
@@ -280,7 +279,7 @@
           <a:p>
             <a:fld id="{E0F2420A-8A13-49D6-BFC1-3E3D3B647068}" type="datetimeFigureOut">
               <a:rPr lang="ru-RU" smtClean="0"/>
-              <a:t>04.07.2025</a:t>
+              <a:t>05.07.2025</a:t>
             </a:fld>
             <a:endParaRPr lang="ru-RU"/>
           </a:p>
@@ -478,7 +477,7 @@
           <a:p>
             <a:fld id="{E0F2420A-8A13-49D6-BFC1-3E3D3B647068}" type="datetimeFigureOut">
               <a:rPr lang="ru-RU" smtClean="0"/>
-              <a:t>04.07.2025</a:t>
+              <a:t>05.07.2025</a:t>
             </a:fld>
             <a:endParaRPr lang="ru-RU"/>
           </a:p>
@@ -686,7 +685,7 @@
           <a:p>
             <a:fld id="{E0F2420A-8A13-49D6-BFC1-3E3D3B647068}" type="datetimeFigureOut">
               <a:rPr lang="ru-RU" smtClean="0"/>
-              <a:t>04.07.2025</a:t>
+              <a:t>05.07.2025</a:t>
             </a:fld>
             <a:endParaRPr lang="ru-RU"/>
           </a:p>
@@ -884,7 +883,7 @@
           <a:p>
             <a:fld id="{E0F2420A-8A13-49D6-BFC1-3E3D3B647068}" type="datetimeFigureOut">
               <a:rPr lang="ru-RU" smtClean="0"/>
-              <a:t>04.07.2025</a:t>
+              <a:t>05.07.2025</a:t>
             </a:fld>
             <a:endParaRPr lang="ru-RU"/>
           </a:p>
@@ -1159,7 +1158,7 @@
           <a:p>
             <a:fld id="{E0F2420A-8A13-49D6-BFC1-3E3D3B647068}" type="datetimeFigureOut">
               <a:rPr lang="ru-RU" smtClean="0"/>
-              <a:t>04.07.2025</a:t>
+              <a:t>05.07.2025</a:t>
             </a:fld>
             <a:endParaRPr lang="ru-RU"/>
           </a:p>
@@ -1424,7 +1423,7 @@
           <a:p>
             <a:fld id="{E0F2420A-8A13-49D6-BFC1-3E3D3B647068}" type="datetimeFigureOut">
               <a:rPr lang="ru-RU" smtClean="0"/>
-              <a:t>04.07.2025</a:t>
+              <a:t>05.07.2025</a:t>
             </a:fld>
             <a:endParaRPr lang="ru-RU"/>
           </a:p>
@@ -1836,7 +1835,7 @@
           <a:p>
             <a:fld id="{E0F2420A-8A13-49D6-BFC1-3E3D3B647068}" type="datetimeFigureOut">
               <a:rPr lang="ru-RU" smtClean="0"/>
-              <a:t>04.07.2025</a:t>
+              <a:t>05.07.2025</a:t>
             </a:fld>
             <a:endParaRPr lang="ru-RU"/>
           </a:p>
@@ -1977,7 +1976,7 @@
           <a:p>
             <a:fld id="{E0F2420A-8A13-49D6-BFC1-3E3D3B647068}" type="datetimeFigureOut">
               <a:rPr lang="ru-RU" smtClean="0"/>
-              <a:t>04.07.2025</a:t>
+              <a:t>05.07.2025</a:t>
             </a:fld>
             <a:endParaRPr lang="ru-RU"/>
           </a:p>
@@ -2090,7 +2089,7 @@
           <a:p>
             <a:fld id="{E0F2420A-8A13-49D6-BFC1-3E3D3B647068}" type="datetimeFigureOut">
               <a:rPr lang="ru-RU" smtClean="0"/>
-              <a:t>04.07.2025</a:t>
+              <a:t>05.07.2025</a:t>
             </a:fld>
             <a:endParaRPr lang="ru-RU"/>
           </a:p>
@@ -2401,7 +2400,7 @@
           <a:p>
             <a:fld id="{E0F2420A-8A13-49D6-BFC1-3E3D3B647068}" type="datetimeFigureOut">
               <a:rPr lang="ru-RU" smtClean="0"/>
-              <a:t>04.07.2025</a:t>
+              <a:t>05.07.2025</a:t>
             </a:fld>
             <a:endParaRPr lang="ru-RU"/>
           </a:p>
@@ -2689,7 +2688,7 @@
           <a:p>
             <a:fld id="{E0F2420A-8A13-49D6-BFC1-3E3D3B647068}" type="datetimeFigureOut">
               <a:rPr lang="ru-RU" smtClean="0"/>
-              <a:t>04.07.2025</a:t>
+              <a:t>05.07.2025</a:t>
             </a:fld>
             <a:endParaRPr lang="ru-RU"/>
           </a:p>
@@ -2930,7 +2929,7 @@
           <a:p>
             <a:fld id="{E0F2420A-8A13-49D6-BFC1-3E3D3B647068}" type="datetimeFigureOut">
               <a:rPr lang="ru-RU" smtClean="0"/>
-              <a:t>04.07.2025</a:t>
+              <a:t>05.07.2025</a:t>
             </a:fld>
             <a:endParaRPr lang="ru-RU"/>
           </a:p>
@@ -3743,691 +3742,6 @@
 </file>
 
 <file path=ppt/slides/slide10.xml><?xml version="1.0" encoding="utf-8"?>
-<p:sld xmlns:a="http://schemas.openxmlformats.org/drawingml/2006/main" xmlns:r="http://schemas.openxmlformats.org/officeDocument/2006/relationships" xmlns:p="http://schemas.openxmlformats.org/presentationml/2006/main">
-  <p:cSld>
-    <p:spTree>
-      <p:nvGrpSpPr>
-        <p:cNvPr id="1" name=""/>
-        <p:cNvGrpSpPr/>
-        <p:nvPr/>
-      </p:nvGrpSpPr>
-      <p:grpSpPr>
-        <a:xfrm>
-          <a:off x="0" y="0"/>
-          <a:ext cx="0" cy="0"/>
-          <a:chOff x="0" y="0"/>
-          <a:chExt cx="0" cy="0"/>
-        </a:xfrm>
-      </p:grpSpPr>
-      <p:sp>
-        <p:nvSpPr>
-          <p:cNvPr id="2" name="Rectangle 7">
-            <a:extLst>
-              <a:ext uri="{FF2B5EF4-FFF2-40B4-BE49-F238E27FC236}">
-                <a16:creationId xmlns:a16="http://schemas.microsoft.com/office/drawing/2014/main" id="{DF5A8599-252C-41B5-904A-A02A2240B53C}"/>
-              </a:ext>
-            </a:extLst>
-          </p:cNvPr>
-          <p:cNvSpPr>
-            <a:spLocks noChangeArrowheads="1"/>
-          </p:cNvSpPr>
-          <p:nvPr/>
-        </p:nvSpPr>
-        <p:spPr bwMode="auto">
-          <a:xfrm>
-            <a:off x="1603247" y="2005583"/>
-            <a:ext cx="16111407" cy="45719"/>
-          </a:xfrm>
-          <a:prstGeom prst="rect">
-            <a:avLst/>
-          </a:prstGeom>
-          <a:noFill/>
-          <a:ln>
-            <a:noFill/>
-          </a:ln>
-          <a:effectLst/>
-          <a:extLst>
-            <a:ext uri="{909E8E84-426E-40DD-AFC4-6F175D3DCCD1}">
-              <a14:hiddenFill xmlns:a14="http://schemas.microsoft.com/office/drawing/2010/main">
-                <a:solidFill>
-                  <a:schemeClr val="accent1"/>
-                </a:solidFill>
-              </a14:hiddenFill>
-            </a:ext>
-            <a:ext uri="{91240B29-F687-4F45-9708-019B960494DF}">
-              <a14:hiddenLine xmlns:a14="http://schemas.microsoft.com/office/drawing/2010/main" w="9525">
-                <a:solidFill>
-                  <a:schemeClr val="tx1"/>
-                </a:solidFill>
-                <a:miter lim="800000"/>
-                <a:headEnd/>
-                <a:tailEnd/>
-              </a14:hiddenLine>
-            </a:ext>
-            <a:ext uri="{AF507438-7753-43E0-B8FC-AC1667EBCBE1}">
-              <a14:hiddenEffects xmlns:a14="http://schemas.microsoft.com/office/drawing/2010/main">
-                <a:effectLst>
-                  <a:outerShdw dist="35921" dir="2700000" algn="ctr" rotWithShape="0">
-                    <a:schemeClr val="bg2"/>
-                  </a:outerShdw>
-                </a:effectLst>
-              </a14:hiddenEffects>
-            </a:ext>
-          </a:extLst>
-        </p:spPr>
-        <p:txBody>
-          <a:bodyPr vert="horz" wrap="square" lIns="91440" tIns="45720" rIns="91440" bIns="45720" numCol="1" anchor="ctr" anchorCtr="0" compatLnSpc="1">
-            <a:prstTxWarp prst="textNoShape">
-              <a:avLst/>
-            </a:prstTxWarp>
-            <a:spAutoFit/>
-          </a:bodyPr>
-          <a:lstStyle/>
-          <a:p>
-            <a:endParaRPr lang="ru-RU"/>
-          </a:p>
-        </p:txBody>
-      </p:sp>
-      <p:grpSp>
-        <p:nvGrpSpPr>
-          <p:cNvPr id="3" name="Полотно 11">
-            <a:extLst>
-              <a:ext uri="{FF2B5EF4-FFF2-40B4-BE49-F238E27FC236}">
-                <a16:creationId xmlns:a16="http://schemas.microsoft.com/office/drawing/2014/main" id="{1D6769A1-C319-45D0-99EE-4B360C756733}"/>
-              </a:ext>
-            </a:extLst>
-          </p:cNvPr>
-          <p:cNvGrpSpPr>
-            <a:grpSpLocks/>
-          </p:cNvGrpSpPr>
-          <p:nvPr/>
-        </p:nvGrpSpPr>
-        <p:grpSpPr bwMode="auto">
-          <a:xfrm>
-            <a:off x="3226150" y="2028480"/>
-            <a:ext cx="4271804" cy="3444189"/>
-            <a:chOff x="17130" y="162"/>
-            <a:chExt cx="24497" cy="24369"/>
-          </a:xfrm>
-        </p:grpSpPr>
-        <p:sp>
-          <p:nvSpPr>
-            <p:cNvPr id="5" name="Надпись 2">
-              <a:extLst>
-                <a:ext uri="{FF2B5EF4-FFF2-40B4-BE49-F238E27FC236}">
-                  <a16:creationId xmlns:a16="http://schemas.microsoft.com/office/drawing/2014/main" id="{6D9A45B3-4434-469E-8659-667B5B03E02A}"/>
-                </a:ext>
-              </a:extLst>
-            </p:cNvPr>
-            <p:cNvSpPr txBox="1">
-              <a:spLocks noChangeArrowheads="1"/>
-            </p:cNvSpPr>
-            <p:nvPr/>
-          </p:nvSpPr>
-          <p:spPr bwMode="auto">
-            <a:xfrm>
-              <a:off x="17130" y="162"/>
-              <a:ext cx="21437" cy="6696"/>
-            </a:xfrm>
-            <a:prstGeom prst="rect">
-              <a:avLst/>
-            </a:prstGeom>
-            <a:solidFill>
-              <a:srgbClr val="FFFFFF"/>
-            </a:solidFill>
-            <a:ln>
-              <a:noFill/>
-            </a:ln>
-            <a:extLst>
-              <a:ext uri="{91240B29-F687-4F45-9708-019B960494DF}">
-                <a14:hiddenLine xmlns:a14="http://schemas.microsoft.com/office/drawing/2010/main" w="9525">
-                  <a:solidFill>
-                    <a:srgbClr val="000000"/>
-                  </a:solidFill>
-                  <a:miter lim="800000"/>
-                  <a:headEnd/>
-                  <a:tailEnd/>
-                </a14:hiddenLine>
-              </a:ext>
-            </a:extLst>
-          </p:spPr>
-          <p:txBody>
-            <a:bodyPr vert="horz" wrap="square" lIns="91440" tIns="45720" rIns="91440" bIns="45720" numCol="1" anchor="t" anchorCtr="0" compatLnSpc="1">
-              <a:prstTxWarp prst="textNoShape">
-                <a:avLst/>
-              </a:prstTxWarp>
-            </a:bodyPr>
-            <a:lstStyle/>
-            <a:p>
-              <a:pPr eaLnBrk="0" fontAlgn="base" hangingPunct="0">
-                <a:spcBef>
-                  <a:spcPct val="0"/>
-                </a:spcBef>
-                <a:spcAft>
-                  <a:spcPct val="0"/>
-                </a:spcAft>
-              </a:pPr>
-              <a:r>
-                <a:rPr kumimoji="0" lang="ru-RU" altLang="ru-RU" b="0" i="0" u="none" strike="noStrike" cap="none" normalizeH="0" baseline="0" dirty="0">
-                  <a:ln>
-                    <a:noFill/>
-                  </a:ln>
-                  <a:solidFill>
-                    <a:schemeClr val="tx1"/>
-                  </a:solidFill>
-                  <a:effectLst/>
-                  <a:latin typeface="Times New Roman" panose="02020603050405020304" pitchFamily="18" charset="0"/>
-                  <a:ea typeface="Calibri" panose="020F0502020204030204" pitchFamily="34" charset="0"/>
-                  <a:cs typeface="Times New Roman" panose="02020603050405020304" pitchFamily="18" charset="0"/>
-                </a:rPr>
-                <a:t>Множитель абсолютной пористости </a:t>
-              </a:r>
-              <a:r>
-                <a:rPr lang="ru-RU" altLang="ru-RU" dirty="0">
-                  <a:latin typeface="Times New Roman" panose="02020603050405020304" pitchFamily="18" charset="0"/>
-                  <a:cs typeface="Times New Roman" panose="02020603050405020304" pitchFamily="18" charset="0"/>
-                </a:rPr>
-                <a:t>в момент достижения предельной обводненности</a:t>
-              </a:r>
-              <a:endParaRPr kumimoji="0" lang="ru-RU" altLang="ru-RU" b="0" i="0" u="none" strike="noStrike" cap="none" normalizeH="0" baseline="0" dirty="0">
-                <a:ln>
-                  <a:noFill/>
-                </a:ln>
-                <a:solidFill>
-                  <a:schemeClr val="tx1"/>
-                </a:solidFill>
-                <a:effectLst/>
-                <a:latin typeface="Arial" panose="020B0604020202020204" pitchFamily="34" charset="0"/>
-              </a:endParaRPr>
-            </a:p>
-            <a:p>
-              <a:pPr marL="0" marR="0" lvl="0" indent="0" algn="l" defTabSz="914400" rtl="0" eaLnBrk="0" fontAlgn="base" latinLnBrk="0" hangingPunct="0">
-                <a:lnSpc>
-                  <a:spcPct val="100000"/>
-                </a:lnSpc>
-                <a:spcBef>
-                  <a:spcPct val="0"/>
-                </a:spcBef>
-                <a:spcAft>
-                  <a:spcPct val="0"/>
-                </a:spcAft>
-                <a:buClrTx/>
-                <a:buSzTx/>
-                <a:buFontTx/>
-                <a:buNone/>
-                <a:tabLst/>
-              </a:pPr>
-              <a:endParaRPr kumimoji="0" lang="ru-RU" altLang="ru-RU" sz="2000" b="0" i="0" u="none" strike="noStrike" cap="none" normalizeH="0" baseline="0" dirty="0">
-                <a:ln>
-                  <a:noFill/>
-                </a:ln>
-                <a:solidFill>
-                  <a:schemeClr val="tx1"/>
-                </a:solidFill>
-                <a:effectLst/>
-                <a:latin typeface="Times New Roman" panose="02020603050405020304" pitchFamily="18" charset="0"/>
-                <a:ea typeface="Calibri" panose="020F0502020204030204" pitchFamily="34" charset="0"/>
-                <a:cs typeface="Times New Roman" panose="02020603050405020304" pitchFamily="18" charset="0"/>
-              </a:endParaRPr>
-            </a:p>
-          </p:txBody>
-        </p:sp>
-        <p:sp>
-          <p:nvSpPr>
-            <p:cNvPr id="6" name="Надпись 2">
-              <a:extLst>
-                <a:ext uri="{FF2B5EF4-FFF2-40B4-BE49-F238E27FC236}">
-                  <a16:creationId xmlns:a16="http://schemas.microsoft.com/office/drawing/2014/main" id="{F63C9362-B6F7-4B9D-8B33-1B2F3A7F6F4B}"/>
-                </a:ext>
-              </a:extLst>
-            </p:cNvPr>
-            <p:cNvSpPr txBox="1">
-              <a:spLocks noChangeArrowheads="1"/>
-            </p:cNvSpPr>
-            <p:nvPr/>
-          </p:nvSpPr>
-          <p:spPr bwMode="auto">
-            <a:xfrm>
-              <a:off x="17829" y="17835"/>
-              <a:ext cx="23798" cy="6696"/>
-            </a:xfrm>
-            <a:prstGeom prst="rect">
-              <a:avLst/>
-            </a:prstGeom>
-            <a:solidFill>
-              <a:srgbClr val="FFFFFF"/>
-            </a:solidFill>
-            <a:ln>
-              <a:noFill/>
-            </a:ln>
-            <a:extLst>
-              <a:ext uri="{91240B29-F687-4F45-9708-019B960494DF}">
-                <a14:hiddenLine xmlns:a14="http://schemas.microsoft.com/office/drawing/2010/main" w="9525">
-                  <a:solidFill>
-                    <a:srgbClr val="000000"/>
-                  </a:solidFill>
-                  <a:miter lim="800000"/>
-                  <a:headEnd/>
-                  <a:tailEnd/>
-                </a14:hiddenLine>
-              </a:ext>
-            </a:extLst>
-          </p:spPr>
-          <p:txBody>
-            <a:bodyPr vert="horz" wrap="square" lIns="91440" tIns="45720" rIns="91440" bIns="45720" numCol="1" anchor="t" anchorCtr="0" compatLnSpc="1">
-              <a:prstTxWarp prst="textNoShape">
-                <a:avLst/>
-              </a:prstTxWarp>
-            </a:bodyPr>
-            <a:lstStyle/>
-            <a:p>
-              <a:pPr marL="0" marR="0" lvl="0" indent="0" defTabSz="914400" rtl="0" eaLnBrk="0" fontAlgn="base" latinLnBrk="0" hangingPunct="0">
-                <a:lnSpc>
-                  <a:spcPct val="100000"/>
-                </a:lnSpc>
-                <a:spcBef>
-                  <a:spcPct val="0"/>
-                </a:spcBef>
-                <a:spcAft>
-                  <a:spcPct val="0"/>
-                </a:spcAft>
-                <a:buClrTx/>
-                <a:buSzTx/>
-                <a:buFontTx/>
-                <a:buNone/>
-                <a:tabLst/>
-              </a:pPr>
-              <a:r>
-                <a:rPr kumimoji="0" lang="ru-RU" altLang="ru-RU" b="0" i="0" u="none" strike="noStrike" cap="none" normalizeH="0" baseline="0" dirty="0">
-                  <a:ln>
-                    <a:noFill/>
-                  </a:ln>
-                  <a:solidFill>
-                    <a:schemeClr val="tx1"/>
-                  </a:solidFill>
-                  <a:effectLst/>
-                  <a:latin typeface="Times New Roman" panose="02020603050405020304" pitchFamily="18" charset="0"/>
-                  <a:ea typeface="Calibri" panose="020F0502020204030204" pitchFamily="34" charset="0"/>
-                  <a:cs typeface="Times New Roman" panose="02020603050405020304" pitchFamily="18" charset="0"/>
-                </a:rPr>
-                <a:t>Множитель абсолютной проницаемости </a:t>
-              </a:r>
-              <a:r>
-                <a:rPr lang="ru-RU" altLang="ru-RU" dirty="0">
-                  <a:latin typeface="Times New Roman" panose="02020603050405020304" pitchFamily="18" charset="0"/>
-                  <a:cs typeface="Times New Roman" panose="02020603050405020304" pitchFamily="18" charset="0"/>
-                </a:rPr>
-                <a:t>в момент достижения предельной обводненности</a:t>
-              </a:r>
-              <a:r>
-                <a:rPr kumimoji="0" lang="ru-RU" altLang="ru-RU" b="0" i="0" u="none" strike="noStrike" cap="none" normalizeH="0" baseline="0" dirty="0">
-                  <a:ln>
-                    <a:noFill/>
-                  </a:ln>
-                  <a:solidFill>
-                    <a:schemeClr val="tx1"/>
-                  </a:solidFill>
-                  <a:effectLst/>
-                  <a:latin typeface="Times New Roman" panose="02020603050405020304" pitchFamily="18" charset="0"/>
-                  <a:ea typeface="Calibri" panose="020F0502020204030204" pitchFamily="34" charset="0"/>
-                  <a:cs typeface="Times New Roman" panose="02020603050405020304" pitchFamily="18" charset="0"/>
-                </a:rPr>
-                <a:t> </a:t>
-              </a:r>
-              <a:endParaRPr kumimoji="0" lang="ru-RU" altLang="ru-RU" b="0" i="0" u="none" strike="noStrike" cap="none" normalizeH="0" baseline="0" dirty="0">
-                <a:ln>
-                  <a:noFill/>
-                </a:ln>
-                <a:solidFill>
-                  <a:schemeClr val="tx1"/>
-                </a:solidFill>
-                <a:effectLst/>
-                <a:latin typeface="Arial" panose="020B0604020202020204" pitchFamily="34" charset="0"/>
-              </a:endParaRPr>
-            </a:p>
-          </p:txBody>
-        </p:sp>
-      </p:grpSp>
-      <p:sp>
-        <p:nvSpPr>
-          <p:cNvPr id="9" name="TextBox 8">
-            <a:extLst>
-              <a:ext uri="{FF2B5EF4-FFF2-40B4-BE49-F238E27FC236}">
-                <a16:creationId xmlns:a16="http://schemas.microsoft.com/office/drawing/2014/main" id="{EC8DDECC-35A0-4B22-9DAC-6F85DD990BFE}"/>
-              </a:ext>
-            </a:extLst>
-          </p:cNvPr>
-          <p:cNvSpPr txBox="1"/>
-          <p:nvPr/>
-        </p:nvSpPr>
-        <p:spPr>
-          <a:xfrm>
-            <a:off x="554967" y="636615"/>
-            <a:ext cx="6156960" cy="461665"/>
-          </a:xfrm>
-          <a:prstGeom prst="rect">
-            <a:avLst/>
-          </a:prstGeom>
-          <a:noFill/>
-        </p:spPr>
-        <p:txBody>
-          <a:bodyPr wrap="square">
-            <a:spAutoFit/>
-          </a:bodyPr>
-          <a:lstStyle/>
-          <a:p>
-            <a:r>
-              <a:rPr lang="ru-RU" sz="2400" dirty="0">
-                <a:latin typeface="Times New Roman" panose="02020603050405020304" pitchFamily="18" charset="0"/>
-              </a:rPr>
-              <a:t>Структурные изменения пористой среды</a:t>
-            </a:r>
-            <a:endParaRPr lang="ru-RU" sz="2400" dirty="0"/>
-          </a:p>
-        </p:txBody>
-      </p:sp>
-      <p:pic>
-        <p:nvPicPr>
-          <p:cNvPr id="10" name="Picture 2">
-            <a:extLst>
-              <a:ext uri="{FF2B5EF4-FFF2-40B4-BE49-F238E27FC236}">
-                <a16:creationId xmlns:a16="http://schemas.microsoft.com/office/drawing/2014/main" id="{531F3FD6-28F1-4A6C-BB6B-E2BA3846D3C4}"/>
-              </a:ext>
-            </a:extLst>
-          </p:cNvPr>
-          <p:cNvPicPr>
-            <a:picLocks noChangeAspect="1" noChangeArrowheads="1"/>
-          </p:cNvPicPr>
-          <p:nvPr/>
-        </p:nvPicPr>
-        <p:blipFill>
-          <a:blip r:embed="rId2">
-            <a:extLst>
-              <a:ext uri="{28A0092B-C50C-407E-A947-70E740481C1C}">
-                <a14:useLocalDpi xmlns:a14="http://schemas.microsoft.com/office/drawing/2010/main" val="0"/>
-              </a:ext>
-            </a:extLst>
-          </a:blip>
-          <a:srcRect/>
-          <a:stretch>
-            <a:fillRect/>
-          </a:stretch>
-        </p:blipFill>
-        <p:spPr bwMode="auto">
-          <a:xfrm>
-            <a:off x="298935" y="4042985"/>
-            <a:ext cx="2838343" cy="2278763"/>
-          </a:xfrm>
-          <a:prstGeom prst="rect">
-            <a:avLst/>
-          </a:prstGeom>
-          <a:noFill/>
-          <a:extLst>
-            <a:ext uri="{909E8E84-426E-40DD-AFC4-6F175D3DCCD1}">
-              <a14:hiddenFill xmlns:a14="http://schemas.microsoft.com/office/drawing/2010/main">
-                <a:solidFill>
-                  <a:srgbClr val="FFFFFF"/>
-                </a:solidFill>
-              </a14:hiddenFill>
-            </a:ext>
-          </a:extLst>
-        </p:spPr>
-      </p:pic>
-      <p:pic>
-        <p:nvPicPr>
-          <p:cNvPr id="8" name="Рисунок 7">
-            <a:extLst>
-              <a:ext uri="{FF2B5EF4-FFF2-40B4-BE49-F238E27FC236}">
-                <a16:creationId xmlns:a16="http://schemas.microsoft.com/office/drawing/2014/main" id="{55206CAE-84D6-4CB2-BDA4-34998A970928}"/>
-              </a:ext>
-            </a:extLst>
-          </p:cNvPr>
-          <p:cNvPicPr>
-            <a:picLocks noChangeAspect="1"/>
-          </p:cNvPicPr>
-          <p:nvPr/>
-        </p:nvPicPr>
-        <p:blipFill>
-          <a:blip r:embed="rId3"/>
-          <a:stretch>
-            <a:fillRect/>
-          </a:stretch>
-        </p:blipFill>
-        <p:spPr>
-          <a:xfrm>
-            <a:off x="298935" y="1482558"/>
-            <a:ext cx="2780855" cy="2226945"/>
-          </a:xfrm>
-          <a:prstGeom prst="rect">
-            <a:avLst/>
-          </a:prstGeom>
-        </p:spPr>
-      </p:pic>
-      <p:sp>
-        <p:nvSpPr>
-          <p:cNvPr id="14" name="Прямоугольник 13">
-            <a:extLst>
-              <a:ext uri="{FF2B5EF4-FFF2-40B4-BE49-F238E27FC236}">
-                <a16:creationId xmlns:a16="http://schemas.microsoft.com/office/drawing/2014/main" id="{2F73B0DE-06C4-41A7-909E-26EFC8BD13EF}"/>
-              </a:ext>
-            </a:extLst>
-          </p:cNvPr>
-          <p:cNvSpPr/>
-          <p:nvPr/>
-        </p:nvSpPr>
-        <p:spPr>
-          <a:xfrm>
-            <a:off x="8107680" y="1326405"/>
-            <a:ext cx="2648146" cy="2312433"/>
-          </a:xfrm>
-          <a:prstGeom prst="rect">
-            <a:avLst/>
-          </a:prstGeom>
-          <a:solidFill>
-            <a:schemeClr val="bg1"/>
-          </a:solidFill>
-        </p:spPr>
-        <p:style>
-          <a:lnRef idx="2">
-            <a:schemeClr val="accent1">
-              <a:shade val="50000"/>
-            </a:schemeClr>
-          </a:lnRef>
-          <a:fillRef idx="1">
-            <a:schemeClr val="accent1"/>
-          </a:fillRef>
-          <a:effectRef idx="0">
-            <a:schemeClr val="accent1"/>
-          </a:effectRef>
-          <a:fontRef idx="minor">
-            <a:schemeClr val="lt1"/>
-          </a:fontRef>
-        </p:style>
-        <p:txBody>
-          <a:bodyPr rtlCol="0" anchor="ctr"/>
-          <a:lstStyle/>
-          <a:p>
-            <a:pPr algn="ctr"/>
-            <a:endParaRPr lang="ru-RU"/>
-          </a:p>
-        </p:txBody>
-      </p:sp>
-      <p:sp>
-        <p:nvSpPr>
-          <p:cNvPr id="15" name="TextBox 14">
-            <a:extLst>
-              <a:ext uri="{FF2B5EF4-FFF2-40B4-BE49-F238E27FC236}">
-                <a16:creationId xmlns:a16="http://schemas.microsoft.com/office/drawing/2014/main" id="{AACDF662-FBBB-4ACA-9E0D-5A9B2086B880}"/>
-              </a:ext>
-            </a:extLst>
-          </p:cNvPr>
-          <p:cNvSpPr txBox="1"/>
-          <p:nvPr/>
-        </p:nvSpPr>
-        <p:spPr>
-          <a:xfrm>
-            <a:off x="8205289" y="2121644"/>
-            <a:ext cx="2526227" cy="646331"/>
-          </a:xfrm>
-          <a:prstGeom prst="rect">
-            <a:avLst/>
-          </a:prstGeom>
-          <a:noFill/>
-        </p:spPr>
-        <p:txBody>
-          <a:bodyPr wrap="square">
-            <a:spAutoFit/>
-          </a:bodyPr>
-          <a:lstStyle/>
-          <a:p>
-            <a:r>
-              <a:rPr lang="ru-RU" sz="1800" dirty="0">
-                <a:effectLst/>
-                <a:latin typeface="Times New Roman" panose="02020603050405020304" pitchFamily="18" charset="0"/>
-                <a:ea typeface="Calibri" panose="020F0502020204030204" pitchFamily="34" charset="0"/>
-              </a:rPr>
-              <a:t>Красивая </a:t>
-            </a:r>
-            <a:r>
-              <a:rPr lang="en-US" sz="1800" dirty="0">
-                <a:effectLst/>
-                <a:latin typeface="Times New Roman" panose="02020603050405020304" pitchFamily="18" charset="0"/>
-                <a:ea typeface="Calibri" panose="020F0502020204030204" pitchFamily="34" charset="0"/>
-              </a:rPr>
-              <a:t>gif-</a:t>
-            </a:r>
-            <a:r>
-              <a:rPr lang="ru-RU" sz="1800" dirty="0">
-                <a:effectLst/>
-                <a:latin typeface="Times New Roman" panose="02020603050405020304" pitchFamily="18" charset="0"/>
-                <a:ea typeface="Calibri" panose="020F0502020204030204" pitchFamily="34" charset="0"/>
-              </a:rPr>
-              <a:t>анимация множителя пористости</a:t>
-            </a:r>
-            <a:endParaRPr lang="ru-RU" dirty="0"/>
-          </a:p>
-        </p:txBody>
-      </p:sp>
-      <p:sp>
-        <p:nvSpPr>
-          <p:cNvPr id="16" name="Прямоугольник 15">
-            <a:extLst>
-              <a:ext uri="{FF2B5EF4-FFF2-40B4-BE49-F238E27FC236}">
-                <a16:creationId xmlns:a16="http://schemas.microsoft.com/office/drawing/2014/main" id="{47AD3A47-4AA9-4D12-9A78-2B6E69535F8D}"/>
-              </a:ext>
-            </a:extLst>
-          </p:cNvPr>
-          <p:cNvSpPr/>
-          <p:nvPr/>
-        </p:nvSpPr>
-        <p:spPr>
-          <a:xfrm>
-            <a:off x="8083370" y="4009315"/>
-            <a:ext cx="2648146" cy="2312433"/>
-          </a:xfrm>
-          <a:prstGeom prst="rect">
-            <a:avLst/>
-          </a:prstGeom>
-          <a:solidFill>
-            <a:schemeClr val="bg1"/>
-          </a:solidFill>
-        </p:spPr>
-        <p:style>
-          <a:lnRef idx="2">
-            <a:schemeClr val="accent1">
-              <a:shade val="50000"/>
-            </a:schemeClr>
-          </a:lnRef>
-          <a:fillRef idx="1">
-            <a:schemeClr val="accent1"/>
-          </a:fillRef>
-          <a:effectRef idx="0">
-            <a:schemeClr val="accent1"/>
-          </a:effectRef>
-          <a:fontRef idx="minor">
-            <a:schemeClr val="lt1"/>
-          </a:fontRef>
-        </p:style>
-        <p:txBody>
-          <a:bodyPr rtlCol="0" anchor="ctr"/>
-          <a:lstStyle/>
-          <a:p>
-            <a:pPr algn="ctr"/>
-            <a:endParaRPr lang="ru-RU"/>
-          </a:p>
-        </p:txBody>
-      </p:sp>
-      <p:sp>
-        <p:nvSpPr>
-          <p:cNvPr id="17" name="TextBox 16">
-            <a:extLst>
-              <a:ext uri="{FF2B5EF4-FFF2-40B4-BE49-F238E27FC236}">
-                <a16:creationId xmlns:a16="http://schemas.microsoft.com/office/drawing/2014/main" id="{7D462BC6-4E61-4CCD-B29A-8E5F41D0E7A8}"/>
-              </a:ext>
-            </a:extLst>
-          </p:cNvPr>
-          <p:cNvSpPr txBox="1"/>
-          <p:nvPr/>
-        </p:nvSpPr>
-        <p:spPr>
-          <a:xfrm>
-            <a:off x="8205289" y="4832044"/>
-            <a:ext cx="2428764" cy="923330"/>
-          </a:xfrm>
-          <a:prstGeom prst="rect">
-            <a:avLst/>
-          </a:prstGeom>
-          <a:noFill/>
-        </p:spPr>
-        <p:txBody>
-          <a:bodyPr wrap="square">
-            <a:spAutoFit/>
-          </a:bodyPr>
-          <a:lstStyle/>
-          <a:p>
-            <a:pPr algn="ctr"/>
-            <a:r>
-              <a:rPr lang="ru-RU" sz="1800" dirty="0">
-                <a:effectLst/>
-                <a:latin typeface="Times New Roman" panose="02020603050405020304" pitchFamily="18" charset="0"/>
-                <a:ea typeface="Calibri" panose="020F0502020204030204" pitchFamily="34" charset="0"/>
-              </a:rPr>
-              <a:t>Красивая </a:t>
-            </a:r>
-            <a:r>
-              <a:rPr lang="en-US" sz="1800" dirty="0">
-                <a:effectLst/>
-                <a:latin typeface="Times New Roman" panose="02020603050405020304" pitchFamily="18" charset="0"/>
-                <a:ea typeface="Calibri" panose="020F0502020204030204" pitchFamily="34" charset="0"/>
-              </a:rPr>
-              <a:t>gif-</a:t>
-            </a:r>
-            <a:r>
-              <a:rPr lang="ru-RU" sz="1800" dirty="0">
-                <a:effectLst/>
-                <a:latin typeface="Times New Roman" panose="02020603050405020304" pitchFamily="18" charset="0"/>
-                <a:ea typeface="Calibri" panose="020F0502020204030204" pitchFamily="34" charset="0"/>
-              </a:rPr>
-              <a:t>анимация множителя проницаемости</a:t>
-            </a:r>
-            <a:endParaRPr lang="ru-RU" dirty="0"/>
-          </a:p>
-        </p:txBody>
-      </p:sp>
-    </p:spTree>
-    <p:extLst>
-      <p:ext uri="{BB962C8B-B14F-4D97-AF65-F5344CB8AC3E}">
-        <p14:creationId xmlns:p14="http://schemas.microsoft.com/office/powerpoint/2010/main" val="1025445536"/>
-      </p:ext>
-    </p:extLst>
-  </p:cSld>
-  <p:clrMapOvr>
-    <a:masterClrMapping/>
-  </p:clrMapOvr>
-</p:sld>
-</file>
-
-<file path=ppt/slides/slide11.xml><?xml version="1.0" encoding="utf-8"?>
 <p:sld xmlns:a="http://schemas.openxmlformats.org/drawingml/2006/main" xmlns:r="http://schemas.openxmlformats.org/officeDocument/2006/relationships" xmlns:p="http://schemas.openxmlformats.org/presentationml/2006/main">
   <p:cSld>
     <p:spTree>
@@ -5945,8 +5259,8 @@
           </p:txBody>
         </p:sp>
       </p:grpSp>
-      <mc:AlternateContent xmlns:mc="http://schemas.openxmlformats.org/markup-compatibility/2006" xmlns:a14="http://schemas.microsoft.com/office/drawing/2010/main">
-        <mc:Choice Requires="a14">
+      <mc:AlternateContent xmlns:mc="http://schemas.openxmlformats.org/markup-compatibility/2006">
+        <mc:Choice xmlns:a14="http://schemas.microsoft.com/office/drawing/2010/main" Requires="a14">
           <p:sp>
             <p:nvSpPr>
               <p:cNvPr id="25" name="TextBox 24">
@@ -5983,7 +5297,7 @@
                     </m:oMathParaPr>
                     <m:oMath xmlns:m="http://schemas.openxmlformats.org/officeDocument/2006/math">
                       <m:r>
-                        <a:rPr lang="ru-RU" sz="2000" b="1" i="1">
+                        <a:rPr lang="ru-RU" sz="2000" b="1" i="1" smtClean="0">
                           <a:latin typeface="Cambria Math" panose="02040503050406030204" pitchFamily="18" charset="0"/>
                         </a:rPr>
                         <m:t>𝒙</m:t>
@@ -6057,10 +5371,13 @@
                             </m:e>
                             <m:sub>
                               <m:r>
-                                <a:rPr lang="ru-RU" sz="2000">
+                                <m:rPr>
+                                  <m:sty m:val="p"/>
+                                </m:rPr>
+                                <a:rPr lang="en-US" sz="2000" b="0" i="0" smtClean="0">
                                   <a:latin typeface="Cambria Math" panose="02040503050406030204" pitchFamily="18" charset="0"/>
                                 </a:rPr>
-                                <m:t>∗</m:t>
+                                <m:t>o</m:t>
                               </m:r>
                             </m:sub>
                           </m:sSub>
@@ -6071,27 +5388,33 @@
                             <m:t>,</m:t>
                           </m:r>
                           <m:r>
-                            <a:rPr lang="ru-RU" sz="2000" i="1">
+                            <a:rPr lang="en-US" sz="2000" b="0" i="1" smtClean="0">
                               <a:latin typeface="Cambria Math" panose="02040503050406030204" pitchFamily="18" charset="0"/>
                             </a:rPr>
-                            <m:t>𝑤</m:t>
+                            <m:t>𝑇</m:t>
+                          </m:r>
+                          <m:r>
+                            <a:rPr lang="en-US" sz="2000" b="0" i="1" smtClean="0">
+                              <a:latin typeface="Cambria Math" panose="02040503050406030204" pitchFamily="18" charset="0"/>
+                            </a:rPr>
+                            <m:t>=</m:t>
+                          </m:r>
+                          <m:r>
+                            <a:rPr lang="en-US" sz="2000" b="0" i="1" smtClean="0">
+                              <a:latin typeface="Cambria Math" panose="02040503050406030204" pitchFamily="18" charset="0"/>
+                            </a:rPr>
+                            <m:t>𝑇</m:t>
                           </m:r>
                         </m:e>
                         <m:sub>
                           <m:r>
-                            <a:rPr lang="ru-RU" sz="2000" i="1">
+                            <a:rPr lang="en-US" sz="2000" b="0" i="1" smtClean="0">
                               <a:latin typeface="Cambria Math" panose="02040503050406030204" pitchFamily="18" charset="0"/>
                             </a:rPr>
-                            <m:t>𝑝𝑠</m:t>
+                            <m:t>𝑜</m:t>
                           </m:r>
                         </m:sub>
                       </m:sSub>
-                      <m:r>
-                        <a:rPr lang="ru-RU" sz="2000">
-                          <a:latin typeface="Cambria Math" panose="02040503050406030204" pitchFamily="18" charset="0"/>
-                        </a:rPr>
-                        <m:t>=0</m:t>
-                      </m:r>
                       <m:sSub>
                         <m:sSubPr>
                           <m:ctrlPr>
@@ -6181,7 +5504,7 @@
             </p:txBody>
           </p:sp>
         </mc:Choice>
-        <mc:Fallback xmlns="">
+        <mc:Fallback>
           <p:sp>
             <p:nvSpPr>
               <p:cNvPr id="25" name="TextBox 24">
@@ -6903,8 +6226,8 @@
         </p:nvSpPr>
         <p:spPr>
           <a:xfrm>
-            <a:off x="503645" y="474340"/>
-            <a:ext cx="6636054" cy="1923172"/>
+            <a:off x="513477" y="808041"/>
+            <a:ext cx="6636054" cy="1216808"/>
           </a:xfrm>
           <a:prstGeom prst="rect">
             <a:avLst/>
@@ -6944,8 +6267,8 @@
           </a:p>
         </p:txBody>
       </p:sp>
-      <mc:AlternateContent xmlns:mc="http://schemas.openxmlformats.org/markup-compatibility/2006">
-        <mc:Choice xmlns:a14="http://schemas.microsoft.com/office/drawing/2010/main" Requires="a14">
+      <mc:AlternateContent xmlns:mc="http://schemas.openxmlformats.org/markup-compatibility/2006" xmlns:a14="http://schemas.microsoft.com/office/drawing/2010/main">
+        <mc:Choice Requires="a14">
           <p:sp>
             <p:nvSpPr>
               <p:cNvPr id="4" name="TextBox 3">
@@ -6960,8 +6283,8 @@
             </p:nvSpPr>
             <p:spPr>
               <a:xfrm>
-                <a:off x="411806" y="1669013"/>
-                <a:ext cx="11658273" cy="3852080"/>
+                <a:off x="266863" y="2131129"/>
+                <a:ext cx="11658273" cy="3918830"/>
               </a:xfrm>
               <a:prstGeom prst="rect">
                 <a:avLst/>
@@ -9190,14 +8513,14 @@
                     <m:sSub>
                       <m:sSubPr>
                         <m:ctrlPr>
-                          <a:rPr lang="ru-RU" sz="1800" b="1" i="1">
+                          <a:rPr lang="ru-RU" sz="2000" b="1" i="1">
                             <a:latin typeface="Cambria Math" panose="02040503050406030204" pitchFamily="18" charset="0"/>
                           </a:rPr>
                         </m:ctrlPr>
                       </m:sSubPr>
                       <m:e>
                         <m:r>
-                          <a:rPr lang="en-US" sz="1800" b="1" i="1">
+                          <a:rPr lang="en-US" sz="2000" b="1" i="1">
                             <a:latin typeface="Cambria Math" panose="02040503050406030204" pitchFamily="18" charset="0"/>
                             <a:ea typeface="Calibri" panose="020F0502020204030204" pitchFamily="34" charset="0"/>
                             <a:cs typeface="Times New Roman" panose="02020603050405020304" pitchFamily="18" charset="0"/>
@@ -9207,7 +8530,7 @@
                       </m:e>
                       <m:sub>
                         <m:r>
-                          <a:rPr lang="en-US" sz="1800" b="1" i="1">
+                          <a:rPr lang="en-US" sz="2000" b="1" i="1">
                             <a:latin typeface="Cambria Math" panose="02040503050406030204" pitchFamily="18" charset="0"/>
                             <a:ea typeface="Calibri" panose="020F0502020204030204" pitchFamily="34" charset="0"/>
                             <a:cs typeface="Times New Roman" panose="02020603050405020304" pitchFamily="18" charset="0"/>
@@ -9217,7 +8540,7 @@
                       </m:sub>
                     </m:sSub>
                     <m:r>
-                      <a:rPr lang="ru-RU" sz="1800" i="1">
+                      <a:rPr lang="ru-RU" sz="2000" i="1">
                         <a:latin typeface="Cambria Math" panose="02040503050406030204" pitchFamily="18" charset="0"/>
                         <a:ea typeface="Calibri" panose="020F0502020204030204" pitchFamily="34" charset="0"/>
                         <a:cs typeface="Times New Roman" panose="02020603050405020304" pitchFamily="18" charset="0"/>
@@ -9225,14 +8548,14 @@
                       <m:t>=</m:t>
                     </m:r>
                     <m:r>
-                      <a:rPr lang="ru-RU" sz="1800" i="1">
+                      <a:rPr lang="ru-RU" sz="2000" i="1">
                         <a:latin typeface="Cambria Math" panose="02040503050406030204" pitchFamily="18" charset="0"/>
                         <a:ea typeface="Calibri" panose="020F0502020204030204" pitchFamily="34" charset="0"/>
                       </a:rPr>
                       <m:t>−</m:t>
                     </m:r>
                     <m:r>
-                      <a:rPr lang="en-US" sz="1800" i="1">
+                      <a:rPr lang="en-US" sz="2000" i="1">
                         <a:latin typeface="Cambria Math" panose="02040503050406030204" pitchFamily="18" charset="0"/>
                         <a:ea typeface="Calibri" panose="020F0502020204030204" pitchFamily="34" charset="0"/>
                         <a:cs typeface="Times New Roman" panose="02020603050405020304" pitchFamily="18" charset="0"/>
@@ -9242,7 +8565,7 @@
                     <m:f>
                       <m:fPr>
                         <m:ctrlPr>
-                          <a:rPr lang="ru-RU" sz="1800" i="1">
+                          <a:rPr lang="ru-RU" sz="2000" i="1">
                             <a:latin typeface="Cambria Math" panose="02040503050406030204" pitchFamily="18" charset="0"/>
                           </a:rPr>
                         </m:ctrlPr>
@@ -9251,14 +8574,14 @@
                         <m:sSub>
                           <m:sSubPr>
                             <m:ctrlPr>
-                              <a:rPr lang="ru-RU" sz="1800" i="1">
+                              <a:rPr lang="ru-RU" sz="2000" i="1">
                                 <a:latin typeface="Cambria Math" panose="02040503050406030204" pitchFamily="18" charset="0"/>
                               </a:rPr>
                             </m:ctrlPr>
                           </m:sSubPr>
                           <m:e>
                             <m:r>
-                              <a:rPr lang="en-US" sz="1800" i="1">
+                              <a:rPr lang="en-US" sz="2000" i="1">
                                 <a:latin typeface="Cambria Math" panose="02040503050406030204" pitchFamily="18" charset="0"/>
                                 <a:ea typeface="Calibri" panose="020F0502020204030204" pitchFamily="34" charset="0"/>
                                 <a:cs typeface="Times New Roman" panose="02020603050405020304" pitchFamily="18" charset="0"/>
@@ -9268,7 +8591,7 @@
                           </m:e>
                           <m:sub>
                             <m:r>
-                              <a:rPr lang="en-US" sz="1800" i="1">
+                              <a:rPr lang="en-US" sz="2000" i="1">
                                 <a:latin typeface="Cambria Math" panose="02040503050406030204" pitchFamily="18" charset="0"/>
                                 <a:ea typeface="Calibri" panose="020F0502020204030204" pitchFamily="34" charset="0"/>
                                 <a:cs typeface="Times New Roman" panose="02020603050405020304" pitchFamily="18" charset="0"/>
@@ -9282,14 +8605,14 @@
                         <m:sSub>
                           <m:sSubPr>
                             <m:ctrlPr>
-                              <a:rPr lang="ru-RU" sz="1800" i="1">
+                              <a:rPr lang="ru-RU" sz="2000" i="1">
                                 <a:latin typeface="Cambria Math" panose="02040503050406030204" pitchFamily="18" charset="0"/>
                               </a:rPr>
                             </m:ctrlPr>
                           </m:sSubPr>
                           <m:e>
                             <m:r>
-                              <a:rPr lang="en-US" sz="1800" i="1">
+                              <a:rPr lang="en-US" sz="2000" i="1">
                                 <a:latin typeface="Cambria Math" panose="02040503050406030204" pitchFamily="18" charset="0"/>
                                 <a:ea typeface="Calibri" panose="020F0502020204030204" pitchFamily="34" charset="0"/>
                                 <a:cs typeface="Times New Roman" panose="02020603050405020304" pitchFamily="18" charset="0"/>
@@ -9299,7 +8622,7 @@
                           </m:e>
                           <m:sub>
                             <m:r>
-                              <a:rPr lang="en-US" sz="1800" i="1">
+                              <a:rPr lang="en-US" sz="2000" i="1">
                                 <a:latin typeface="Cambria Math" panose="02040503050406030204" pitchFamily="18" charset="0"/>
                                 <a:ea typeface="Calibri" panose="020F0502020204030204" pitchFamily="34" charset="0"/>
                                 <a:cs typeface="Times New Roman" panose="02020603050405020304" pitchFamily="18" charset="0"/>
@@ -9311,7 +8634,7 @@
                       </m:den>
                     </m:f>
                     <m:r>
-                      <a:rPr lang="en-US" sz="1800" i="1">
+                      <a:rPr lang="en-US" sz="2000" i="1">
                         <a:latin typeface="Cambria Math" panose="02040503050406030204" pitchFamily="18" charset="0"/>
                         <a:ea typeface="Calibri" panose="020F0502020204030204" pitchFamily="34" charset="0"/>
                         <a:cs typeface="Cambria Math" panose="02040503050406030204" pitchFamily="18" charset="0"/>
@@ -9319,13 +8642,13 @@
                       <m:t>𝛻</m:t>
                     </m:r>
                     <m:r>
-                      <a:rPr lang="en-US" sz="1800" i="1">
+                      <a:rPr lang="en-US" sz="2000" i="1">
                         <a:latin typeface="Cambria Math" panose="02040503050406030204" pitchFamily="18" charset="0"/>
                       </a:rPr>
                       <m:t>𝑃</m:t>
                     </m:r>
                     <m:r>
-                      <a:rPr lang="ru-RU" sz="1800" i="1">
+                      <a:rPr lang="ru-RU" sz="2000" i="1">
                         <a:latin typeface="Cambria Math" panose="02040503050406030204" pitchFamily="18" charset="0"/>
                         <a:ea typeface="Calibri" panose="020F0502020204030204" pitchFamily="34" charset="0"/>
                         <a:cs typeface="Times New Roman" panose="02020603050405020304" pitchFamily="18" charset="0"/>
@@ -9333,14 +8656,14 @@
                       <m:t>,    </m:t>
                     </m:r>
                     <m:r>
-                      <a:rPr lang="ru-RU" sz="1800">
+                      <a:rPr lang="ru-RU" sz="2000">
                         <a:latin typeface="Cambria Math" panose="02040503050406030204" pitchFamily="18" charset="0"/>
                         <a:ea typeface="Calibri" panose="020F0502020204030204" pitchFamily="34" charset="0"/>
                       </a:rPr>
                       <m:t>где</m:t>
                     </m:r>
                     <m:r>
-                      <a:rPr lang="ru-RU" sz="1800" smtClean="0">
+                      <a:rPr lang="ru-RU" sz="2000" smtClean="0">
                         <a:latin typeface="Cambria Math" panose="02040503050406030204" pitchFamily="18" charset="0"/>
                         <a:ea typeface="Calibri" panose="020F0502020204030204" pitchFamily="34" charset="0"/>
                         <a:cs typeface="Times New Roman" panose="02020603050405020304" pitchFamily="18" charset="0"/>
@@ -9348,7 +8671,7 @@
                       <m:t> </m:t>
                     </m:r>
                     <m:r>
-                      <a:rPr lang="en-US" sz="1800" i="1">
+                      <a:rPr lang="en-US" sz="2000" i="1">
                         <a:latin typeface="Cambria Math" panose="02040503050406030204" pitchFamily="18" charset="0"/>
                         <a:ea typeface="Calibri" panose="020F0502020204030204" pitchFamily="34" charset="0"/>
                         <a:cs typeface="Times New Roman" panose="02020603050405020304" pitchFamily="18" charset="0"/>
@@ -9356,7 +8679,7 @@
                       <m:t>𝛼</m:t>
                     </m:r>
                     <m:r>
-                      <a:rPr lang="ru-RU" sz="1800" i="1">
+                      <a:rPr lang="ru-RU" sz="2000" i="1">
                         <a:latin typeface="Cambria Math" panose="02040503050406030204" pitchFamily="18" charset="0"/>
                         <a:ea typeface="Calibri" panose="020F0502020204030204" pitchFamily="34" charset="0"/>
                         <a:cs typeface="Times New Roman" panose="02020603050405020304" pitchFamily="18" charset="0"/>
@@ -9364,7 +8687,7 @@
                       <m:t>=</m:t>
                     </m:r>
                     <m:r>
-                      <a:rPr lang="en-US" sz="1800" i="1">
+                      <a:rPr lang="en-US" sz="2000" i="1">
                         <a:latin typeface="Cambria Math" panose="02040503050406030204" pitchFamily="18" charset="0"/>
                         <a:ea typeface="Calibri" panose="020F0502020204030204" pitchFamily="34" charset="0"/>
                         <a:cs typeface="Times New Roman" panose="02020603050405020304" pitchFamily="18" charset="0"/>
@@ -9372,7 +8695,7 @@
                       <m:t>𝑜</m:t>
                     </m:r>
                     <m:r>
-                      <a:rPr lang="ru-RU" sz="1800" i="1">
+                      <a:rPr lang="ru-RU" sz="2000" i="1">
                         <a:latin typeface="Cambria Math" panose="02040503050406030204" pitchFamily="18" charset="0"/>
                         <a:ea typeface="Calibri" panose="020F0502020204030204" pitchFamily="34" charset="0"/>
                         <a:cs typeface="Times New Roman" panose="02020603050405020304" pitchFamily="18" charset="0"/>
@@ -9380,7 +8703,7 @@
                       <m:t>,</m:t>
                     </m:r>
                     <m:r>
-                      <a:rPr lang="en-US" sz="1800" i="1">
+                      <a:rPr lang="en-US" sz="2000" i="1">
                         <a:latin typeface="Cambria Math" panose="02040503050406030204" pitchFamily="18" charset="0"/>
                         <a:ea typeface="Calibri" panose="020F0502020204030204" pitchFamily="34" charset="0"/>
                         <a:cs typeface="Times New Roman" panose="02020603050405020304" pitchFamily="18" charset="0"/>
@@ -9390,13 +8713,13 @@
                   </m:oMath>
                 </a14:m>
                 <a:r>
-                  <a:rPr lang="en-US" sz="1800" b="1" dirty="0"/>
+                  <a:rPr lang="en-US" sz="2000" b="1" dirty="0"/>
                   <a:t>   </a:t>
                 </a:r>
                 <a14:m>
                   <m:oMath xmlns:m="http://schemas.openxmlformats.org/officeDocument/2006/math">
                     <m:r>
-                      <a:rPr lang="en-US" sz="1800" b="0" i="1" dirty="0" smtClean="0">
+                      <a:rPr lang="en-US" sz="2200" b="0" i="1" dirty="0" smtClean="0">
                         <a:latin typeface="Cambria Math" panose="02040503050406030204" pitchFamily="18" charset="0"/>
                       </a:rPr>
                       <m:t>−</m:t>
@@ -9404,15 +8727,15 @@
                   </m:oMath>
                 </a14:m>
                 <a:r>
-                  <a:rPr lang="ru-RU" sz="1800" dirty="0"/>
+                  <a:rPr lang="ru-RU" sz="2200" dirty="0"/>
                   <a:t> Закон Дарси</a:t>
                 </a:r>
-                <a:endParaRPr lang="en-US" sz="1800" dirty="0"/>
+                <a:endParaRPr lang="en-US" sz="2200" dirty="0"/>
               </a:p>
             </p:txBody>
           </p:sp>
         </mc:Choice>
-        <mc:Fallback>
+        <mc:Fallback xmlns="">
           <p:sp>
             <p:nvSpPr>
               <p:cNvPr id="4" name="TextBox 3">
@@ -9429,8 +8752,8 @@
             </p:nvSpPr>
             <p:spPr>
               <a:xfrm>
-                <a:off x="411806" y="1669013"/>
-                <a:ext cx="11658273" cy="3852080"/>
+                <a:off x="266863" y="2131129"/>
+                <a:ext cx="11658273" cy="3918830"/>
               </a:xfrm>
               <a:prstGeom prst="rect">
                 <a:avLst/>
@@ -9486,7 +8809,7 @@
         </p:blipFill>
         <p:spPr bwMode="auto">
           <a:xfrm>
-            <a:off x="8866390" y="1157833"/>
+            <a:off x="8908260" y="838311"/>
             <a:ext cx="3203689" cy="2479357"/>
           </a:xfrm>
           <a:prstGeom prst="rect">
@@ -9563,7 +8886,7 @@
         </p:nvSpPr>
         <p:spPr>
           <a:xfrm>
-            <a:off x="841219" y="432717"/>
+            <a:off x="565915" y="149278"/>
             <a:ext cx="9299116" cy="847443"/>
           </a:xfrm>
           <a:prstGeom prst="rect">
@@ -9618,8 +8941,8 @@
         </p:nvSpPr>
         <p:spPr>
           <a:xfrm>
-            <a:off x="221459" y="1590484"/>
-            <a:ext cx="11493021" cy="3147272"/>
+            <a:off x="477520" y="952058"/>
+            <a:ext cx="11493021" cy="2824106"/>
           </a:xfrm>
           <a:prstGeom prst="rect">
             <a:avLst/>
@@ -9647,7 +8970,7 @@
                 <a:latin typeface="Times New Roman" panose="02020603050405020304" pitchFamily="18" charset="0"/>
                 <a:ea typeface="Times New Roman" panose="02020603050405020304" pitchFamily="18" charset="0"/>
               </a:rPr>
-              <a:t>Для простоты будем использовать следующие допущения: </a:t>
+              <a:t>Основные допущения: </a:t>
             </a:r>
           </a:p>
           <a:p>
@@ -9696,16 +9019,27 @@
               </a:rPr>
               <a:t>Частицы парафина имеют шарообразную форму одинакового размера;</a:t>
             </a:r>
-            <a:endParaRPr lang="ru-RU" sz="2000" dirty="0">
-              <a:effectLst/>
-              <a:latin typeface="Times New Roman" panose="02020603050405020304" pitchFamily="18" charset="0"/>
-              <a:ea typeface="Times New Roman" panose="02020603050405020304" pitchFamily="18" charset="0"/>
-            </a:endParaRPr>
+            <a:r>
+              <a:rPr lang="ru-RU" sz="2000" dirty="0">
+                <a:effectLst/>
+                <a:latin typeface="Times New Roman" panose="02020603050405020304" pitchFamily="18" charset="0"/>
+                <a:ea typeface="Times New Roman" panose="02020603050405020304" pitchFamily="18" charset="0"/>
+              </a:rPr>
+              <a:t> </a:t>
+            </a:r>
+            <a:r>
+              <a:rPr lang="ru-RU" sz="1800" dirty="0">
+                <a:effectLst/>
+                <a:latin typeface="Times New Roman" panose="02020603050405020304" pitchFamily="18" charset="0"/>
+                <a:ea typeface="Times New Roman" panose="02020603050405020304" pitchFamily="18" charset="0"/>
+              </a:rPr>
+              <a:t>Капилляр полностью блокируется при попадании частиц, если характерный размер частиц не меньше диаметра горловины;</a:t>
+            </a:r>
           </a:p>
           <a:p>
             <a:pPr marL="342900" lvl="0" indent="-342900" algn="just">
               <a:lnSpc>
-                <a:spcPct val="120000"/>
+                <a:spcPct val="115000"/>
               </a:lnSpc>
               <a:buFont typeface="+mj-lt"/>
               <a:buAutoNum type="arabicPeriod"/>
@@ -9722,16 +9056,11 @@
               </a:rPr>
               <a:t>Количество оседающих частиц пропорционально их долям в движущейся фазе;</a:t>
             </a:r>
-            <a:endParaRPr lang="ru-RU" sz="2000" dirty="0">
-              <a:effectLst/>
-              <a:latin typeface="Times New Roman" panose="02020603050405020304" pitchFamily="18" charset="0"/>
-              <a:ea typeface="Times New Roman" panose="02020603050405020304" pitchFamily="18" charset="0"/>
-            </a:endParaRPr>
           </a:p>
           <a:p>
             <a:pPr marL="342900" lvl="0" indent="-342900" algn="just">
               <a:lnSpc>
-                <a:spcPct val="120000"/>
+                <a:spcPct val="115000"/>
               </a:lnSpc>
               <a:buFont typeface="+mj-lt"/>
               <a:buAutoNum type="arabicPeriod"/>
@@ -9746,33 +9075,7 @@
                 <a:latin typeface="Times New Roman" panose="02020603050405020304" pitchFamily="18" charset="0"/>
                 <a:ea typeface="Times New Roman" panose="02020603050405020304" pitchFamily="18" charset="0"/>
               </a:rPr>
-              <a:t>Капилляр полностью блокируется при попадании частиц, если характерный размер частиц не меньше диаметра горловины,</a:t>
-            </a:r>
-            <a:endParaRPr lang="en-US" sz="1800" dirty="0">
-              <a:effectLst/>
-              <a:latin typeface="Times New Roman" panose="02020603050405020304" pitchFamily="18" charset="0"/>
-              <a:ea typeface="Times New Roman" panose="02020603050405020304" pitchFamily="18" charset="0"/>
-            </a:endParaRPr>
-          </a:p>
-          <a:p>
-            <a:pPr marL="342900" lvl="0" indent="-342900" algn="just">
-              <a:lnSpc>
-                <a:spcPct val="120000"/>
-              </a:lnSpc>
-              <a:buFont typeface="+mj-lt"/>
-              <a:buAutoNum type="arabicPeriod"/>
-              <a:tabLst>
-                <a:tab pos="5904865" algn="r"/>
-                <a:tab pos="449580" algn="l"/>
-              </a:tabLst>
-            </a:pPr>
-            <a:r>
-              <a:rPr lang="ru-RU" sz="1800" dirty="0">
-                <a:effectLst/>
-                <a:latin typeface="Times New Roman" panose="02020603050405020304" pitchFamily="18" charset="0"/>
-                <a:ea typeface="Times New Roman" panose="02020603050405020304" pitchFamily="18" charset="0"/>
-              </a:rPr>
-              <a:t>Собственная пористость осевших частиц пренебрежимо мала по сравнению с пористостью пласта;</a:t>
+              <a:t>Капилляр полностью блокируется при попадании частиц, если размер частиц не меньше диаметра горловины;</a:t>
             </a:r>
             <a:endParaRPr lang="ru-RU" sz="2000" dirty="0">
               <a:effectLst/>
@@ -9805,7 +9108,7 @@
                 <a:latin typeface="Times New Roman" panose="02020603050405020304" pitchFamily="18" charset="0"/>
                 <a:ea typeface="Times New Roman" panose="02020603050405020304" pitchFamily="18" charset="0"/>
               </a:rPr>
-              <a:t>я частиц</a:t>
+              <a:t>я (вынос) частиц</a:t>
             </a:r>
             <a:r>
               <a:rPr lang="ru-RU" sz="1800" dirty="0">
@@ -9813,7 +9116,7 @@
                 <a:latin typeface="Times New Roman" panose="02020603050405020304" pitchFamily="18" charset="0"/>
                 <a:ea typeface="Times New Roman" panose="02020603050405020304" pitchFamily="18" charset="0"/>
               </a:rPr>
-              <a:t> пренебрегается</a:t>
+              <a:t> не учитывается</a:t>
             </a:r>
             <a:endParaRPr lang="ru-RU" sz="2000" dirty="0">
               <a:effectLst/>
@@ -9823,136 +9126,14 @@
           </a:p>
         </p:txBody>
       </p:sp>
-      <p:pic>
-        <p:nvPicPr>
-          <p:cNvPr id="8" name="Рисунок 7">
-            <a:extLst>
-              <a:ext uri="{FF2B5EF4-FFF2-40B4-BE49-F238E27FC236}">
-                <a16:creationId xmlns:a16="http://schemas.microsoft.com/office/drawing/2014/main" id="{141A5E79-9E49-4F02-8DF3-B98C6BD079EE}"/>
-              </a:ext>
-            </a:extLst>
-          </p:cNvPr>
-          <p:cNvPicPr>
-            <a:picLocks noChangeAspect="1"/>
-          </p:cNvPicPr>
-          <p:nvPr/>
-        </p:nvPicPr>
-        <p:blipFill rotWithShape="1">
-          <a:blip r:embed="rId2">
-            <a:extLst>
-              <a:ext uri="{28A0092B-C50C-407E-A947-70E740481C1C}">
-                <a14:useLocalDpi xmlns:a14="http://schemas.microsoft.com/office/drawing/2010/main" val="0"/>
-              </a:ext>
-            </a:extLst>
-          </a:blip>
-          <a:srcRect l="4595" t="27675" r="37549" b="17606"/>
-          <a:stretch/>
-        </p:blipFill>
-        <p:spPr>
-          <a:xfrm>
-            <a:off x="6197311" y="4518437"/>
-            <a:ext cx="5517169" cy="2008445"/>
-          </a:xfrm>
-          <a:prstGeom prst="rect">
-            <a:avLst/>
-          </a:prstGeom>
-        </p:spPr>
-      </p:pic>
-    </p:spTree>
-    <p:extLst>
-      <p:ext uri="{BB962C8B-B14F-4D97-AF65-F5344CB8AC3E}">
-        <p14:creationId xmlns:p14="http://schemas.microsoft.com/office/powerpoint/2010/main" val="1885289699"/>
-      </p:ext>
-    </p:extLst>
-  </p:cSld>
-  <p:clrMapOvr>
-    <a:masterClrMapping/>
-  </p:clrMapOvr>
-</p:sld>
-</file>
-
-<file path=ppt/slides/slide5.xml><?xml version="1.0" encoding="utf-8"?>
-<p:sld xmlns:a="http://schemas.openxmlformats.org/drawingml/2006/main" xmlns:r="http://schemas.openxmlformats.org/officeDocument/2006/relationships" xmlns:p="http://schemas.openxmlformats.org/presentationml/2006/main">
-  <p:cSld>
-    <p:spTree>
-      <p:nvGrpSpPr>
-        <p:cNvPr id="1" name=""/>
-        <p:cNvGrpSpPr/>
-        <p:nvPr/>
-      </p:nvGrpSpPr>
-      <p:grpSpPr>
-        <a:xfrm>
-          <a:off x="0" y="0"/>
-          <a:ext cx="0" cy="0"/>
-          <a:chOff x="0" y="0"/>
-          <a:chExt cx="0" cy="0"/>
-        </a:xfrm>
-      </p:grpSpPr>
-      <p:sp>
-        <p:nvSpPr>
-          <p:cNvPr id="2" name="Заголовок 1">
-            <a:extLst>
-              <a:ext uri="{FF2B5EF4-FFF2-40B4-BE49-F238E27FC236}">
-                <a16:creationId xmlns:a16="http://schemas.microsoft.com/office/drawing/2014/main" id="{C67242B4-E6E1-483D-BD37-E3E1824D3513}"/>
-              </a:ext>
-            </a:extLst>
-          </p:cNvPr>
-          <p:cNvSpPr txBox="1">
-            <a:spLocks/>
-          </p:cNvSpPr>
-          <p:nvPr/>
-        </p:nvSpPr>
-        <p:spPr>
-          <a:xfrm>
-            <a:off x="841219" y="432717"/>
-            <a:ext cx="9299116" cy="847443"/>
-          </a:xfrm>
-          <a:prstGeom prst="rect">
-            <a:avLst/>
-          </a:prstGeom>
-        </p:spPr>
-        <p:txBody>
-          <a:bodyPr>
-            <a:noAutofit/>
-          </a:bodyPr>
-          <a:lstStyle>
-            <a:lvl1pPr algn="l" defTabSz="914400" rtl="0" eaLnBrk="1" latinLnBrk="0" hangingPunct="1">
-              <a:lnSpc>
-                <a:spcPct val="90000"/>
-              </a:lnSpc>
-              <a:spcBef>
-                <a:spcPct val="0"/>
-              </a:spcBef>
-              <a:buNone/>
-              <a:defRPr sz="4400" kern="1200">
-                <a:solidFill>
-                  <a:schemeClr val="tx1"/>
-                </a:solidFill>
-                <a:latin typeface="+mj-lt"/>
-                <a:ea typeface="+mj-ea"/>
-                <a:cs typeface="+mj-cs"/>
-              </a:defRPr>
-            </a:lvl1pPr>
-          </a:lstStyle>
-          <a:p>
-            <a:r>
-              <a:rPr lang="ru-RU" dirty="0">
-                <a:latin typeface="Times New Roman" panose="02020603050405020304" pitchFamily="18" charset="0"/>
-                <a:cs typeface="Times New Roman" panose="02020603050405020304" pitchFamily="18" charset="0"/>
-              </a:rPr>
-              <a:t>Модель пористой среды</a:t>
-            </a:r>
-          </a:p>
-        </p:txBody>
-      </p:sp>
-      <mc:AlternateContent xmlns:mc="http://schemas.openxmlformats.org/markup-compatibility/2006" xmlns:a14="http://schemas.microsoft.com/office/drawing/2010/main">
-        <mc:Choice Requires="a14">
+      <mc:AlternateContent xmlns:mc="http://schemas.openxmlformats.org/markup-compatibility/2006">
+        <mc:Choice xmlns:a14="http://schemas.microsoft.com/office/drawing/2010/main" Requires="a14">
           <p:sp>
             <p:nvSpPr>
-              <p:cNvPr id="6" name="TextBox 5">
+              <p:cNvPr id="5" name="TextBox 4">
                 <a:extLst>
                   <a:ext uri="{FF2B5EF4-FFF2-40B4-BE49-F238E27FC236}">
-                    <a16:creationId xmlns:a16="http://schemas.microsoft.com/office/drawing/2014/main" id="{BA86832A-3EA1-41CE-B4EB-D47C165410B9}"/>
+                    <a16:creationId xmlns:a16="http://schemas.microsoft.com/office/drawing/2014/main" id="{CECF6FC0-F1BA-4EBB-9AC4-80206768749C}"/>
                   </a:ext>
                 </a:extLst>
               </p:cNvPr>
@@ -9961,7 +9142,7 @@
             </p:nvSpPr>
             <p:spPr>
               <a:xfrm>
-                <a:off x="248920" y="2211804"/>
+                <a:off x="477520" y="3841035"/>
                 <a:ext cx="5196840" cy="1164037"/>
               </a:xfrm>
               <a:prstGeom prst="rect">
@@ -10413,13 +9594,13 @@
             </p:txBody>
           </p:sp>
         </mc:Choice>
-        <mc:Fallback xmlns="">
+        <mc:Fallback>
           <p:sp>
             <p:nvSpPr>
-              <p:cNvPr id="6" name="TextBox 5">
+              <p:cNvPr id="5" name="TextBox 4">
                 <a:extLst>
                   <a:ext uri="{FF2B5EF4-FFF2-40B4-BE49-F238E27FC236}">
-                    <a16:creationId xmlns:a16="http://schemas.microsoft.com/office/drawing/2014/main" id="{BA86832A-3EA1-41CE-B4EB-D47C165410B9}"/>
+                    <a16:creationId xmlns:a16="http://schemas.microsoft.com/office/drawing/2014/main" id="{CECF6FC0-F1BA-4EBB-9AC4-80206768749C}"/>
                   </a:ext>
                 </a:extLst>
               </p:cNvPr>
@@ -10430,16 +9611,16 @@
             </p:nvSpPr>
             <p:spPr>
               <a:xfrm>
-                <a:off x="248920" y="2211804"/>
+                <a:off x="477520" y="3841035"/>
                 <a:ext cx="5196840" cy="1164037"/>
               </a:xfrm>
               <a:prstGeom prst="rect">
                 <a:avLst/>
               </a:prstGeom>
               <a:blipFill>
-                <a:blip r:embed="rId3"/>
+                <a:blip r:embed="rId2"/>
                 <a:stretch>
-                  <a:fillRect l="-235" t="-3141"/>
+                  <a:fillRect l="-117" t="-2618"/>
                 </a:stretch>
               </a:blipFill>
             </p:spPr>
@@ -10458,14 +9639,14 @@
           </p:sp>
         </mc:Fallback>
       </mc:AlternateContent>
-      <mc:AlternateContent xmlns:mc="http://schemas.openxmlformats.org/markup-compatibility/2006" xmlns:a14="http://schemas.microsoft.com/office/drawing/2010/main">
-        <mc:Choice Requires="a14">
+      <mc:AlternateContent xmlns:mc="http://schemas.openxmlformats.org/markup-compatibility/2006">
+        <mc:Choice xmlns:a14="http://schemas.microsoft.com/office/drawing/2010/main" Requires="a14">
           <p:sp>
             <p:nvSpPr>
-              <p:cNvPr id="8" name="TextBox 7">
+              <p:cNvPr id="6" name="TextBox 5">
                 <a:extLst>
                   <a:ext uri="{FF2B5EF4-FFF2-40B4-BE49-F238E27FC236}">
-                    <a16:creationId xmlns:a16="http://schemas.microsoft.com/office/drawing/2014/main" id="{C5D536AA-84F6-4A9E-87C0-0FAFFBAEE5BE}"/>
+                    <a16:creationId xmlns:a16="http://schemas.microsoft.com/office/drawing/2014/main" id="{7BF92EBB-1558-4273-8DF3-34E404093957}"/>
                   </a:ext>
                 </a:extLst>
               </p:cNvPr>
@@ -10474,7 +9655,7 @@
             </p:nvSpPr>
             <p:spPr>
               <a:xfrm>
-                <a:off x="-1239520" y="4116225"/>
+                <a:off x="-929640" y="5069944"/>
                 <a:ext cx="7025640" cy="1671996"/>
               </a:xfrm>
               <a:prstGeom prst="rect">
@@ -11013,13 +10194,13 @@
             </p:txBody>
           </p:sp>
         </mc:Choice>
-        <mc:Fallback xmlns="">
+        <mc:Fallback>
           <p:sp>
             <p:nvSpPr>
-              <p:cNvPr id="8" name="TextBox 7">
+              <p:cNvPr id="6" name="TextBox 5">
                 <a:extLst>
                   <a:ext uri="{FF2B5EF4-FFF2-40B4-BE49-F238E27FC236}">
-                    <a16:creationId xmlns:a16="http://schemas.microsoft.com/office/drawing/2014/main" id="{C5D536AA-84F6-4A9E-87C0-0FAFFBAEE5BE}"/>
+                    <a16:creationId xmlns:a16="http://schemas.microsoft.com/office/drawing/2014/main" id="{7BF92EBB-1558-4273-8DF3-34E404093957}"/>
                   </a:ext>
                 </a:extLst>
               </p:cNvPr>
@@ -11030,14 +10211,14 @@
             </p:nvSpPr>
             <p:spPr>
               <a:xfrm>
-                <a:off x="-1239520" y="4116225"/>
+                <a:off x="-929640" y="5069944"/>
                 <a:ext cx="7025640" cy="1671996"/>
               </a:xfrm>
               <a:prstGeom prst="rect">
                 <a:avLst/>
               </a:prstGeom>
               <a:blipFill>
-                <a:blip r:embed="rId4"/>
+                <a:blip r:embed="rId3"/>
                 <a:stretch>
                   <a:fillRect/>
                 </a:stretch>
@@ -11060,10 +10241,46 @@
       </mc:AlternateContent>
       <p:pic>
         <p:nvPicPr>
-          <p:cNvPr id="4" name="Рисунок 3">
+          <p:cNvPr id="15" name="Рисунок 14">
             <a:extLst>
               <a:ext uri="{FF2B5EF4-FFF2-40B4-BE49-F238E27FC236}">
-                <a16:creationId xmlns:a16="http://schemas.microsoft.com/office/drawing/2014/main" id="{BBD85C53-D5FD-4FAC-BB4D-4ADCE21AE9DF}"/>
+                <a16:creationId xmlns:a16="http://schemas.microsoft.com/office/drawing/2014/main" id="{1AE0B428-EAFC-4B7C-A686-670CA2CA98E5}"/>
+              </a:ext>
+            </a:extLst>
+          </p:cNvPr>
+          <p:cNvPicPr>
+            <a:picLocks noChangeAspect="1"/>
+          </p:cNvPicPr>
+          <p:nvPr/>
+        </p:nvPicPr>
+        <p:blipFill>
+          <a:blip r:embed="rId4">
+            <a:extLst>
+              <a:ext uri="{28A0092B-C50C-407E-A947-70E740481C1C}">
+                <a14:useLocalDpi xmlns:a14="http://schemas.microsoft.com/office/drawing/2010/main" val="0"/>
+              </a:ext>
+            </a:extLst>
+          </a:blip>
+          <a:stretch>
+            <a:fillRect/>
+          </a:stretch>
+        </p:blipFill>
+        <p:spPr>
+          <a:xfrm>
+            <a:off x="6738188" y="5233049"/>
+            <a:ext cx="4976291" cy="1508891"/>
+          </a:xfrm>
+          <a:prstGeom prst="rect">
+            <a:avLst/>
+          </a:prstGeom>
+        </p:spPr>
+      </p:pic>
+      <p:pic>
+        <p:nvPicPr>
+          <p:cNvPr id="17" name="Рисунок 16">
+            <a:extLst>
+              <a:ext uri="{FF2B5EF4-FFF2-40B4-BE49-F238E27FC236}">
+                <a16:creationId xmlns:a16="http://schemas.microsoft.com/office/drawing/2014/main" id="{6A522C82-2BA6-4A2C-A1DC-BBDEFA244CA4}"/>
               </a:ext>
             </a:extLst>
           </p:cNvPr>
@@ -11086,44 +10303,8 @@
         </p:blipFill>
         <p:spPr>
           <a:xfrm>
-            <a:off x="6257377" y="2104152"/>
-            <a:ext cx="5604426" cy="1553448"/>
-          </a:xfrm>
-          <a:prstGeom prst="rect">
-            <a:avLst/>
-          </a:prstGeom>
-        </p:spPr>
-      </p:pic>
-      <p:pic>
-        <p:nvPicPr>
-          <p:cNvPr id="12" name="Рисунок 11">
-            <a:extLst>
-              <a:ext uri="{FF2B5EF4-FFF2-40B4-BE49-F238E27FC236}">
-                <a16:creationId xmlns:a16="http://schemas.microsoft.com/office/drawing/2014/main" id="{03922B1C-5FB0-45B7-8020-F1142FA5E69A}"/>
-              </a:ext>
-            </a:extLst>
-          </p:cNvPr>
-          <p:cNvPicPr>
-            <a:picLocks noChangeAspect="1"/>
-          </p:cNvPicPr>
-          <p:nvPr/>
-        </p:nvPicPr>
-        <p:blipFill>
-          <a:blip r:embed="rId6">
-            <a:extLst>
-              <a:ext uri="{28A0092B-C50C-407E-A947-70E740481C1C}">
-                <a14:useLocalDpi xmlns:a14="http://schemas.microsoft.com/office/drawing/2010/main" val="0"/>
-              </a:ext>
-            </a:extLst>
-          </a:blip>
-          <a:stretch>
-            <a:fillRect/>
-          </a:stretch>
-        </p:blipFill>
-        <p:spPr>
-          <a:xfrm>
-            <a:off x="6257377" y="4262553"/>
-            <a:ext cx="5604426" cy="1553448"/>
+            <a:off x="6738189" y="3711319"/>
+            <a:ext cx="4976291" cy="1508891"/>
           </a:xfrm>
           <a:prstGeom prst="rect">
             <a:avLst/>
@@ -11133,7 +10314,7 @@
     </p:spTree>
     <p:extLst>
       <p:ext uri="{BB962C8B-B14F-4D97-AF65-F5344CB8AC3E}">
-        <p14:creationId xmlns:p14="http://schemas.microsoft.com/office/powerpoint/2010/main" val="443815554"/>
+        <p14:creationId xmlns:p14="http://schemas.microsoft.com/office/powerpoint/2010/main" val="1885289699"/>
       </p:ext>
     </p:extLst>
   </p:cSld>
@@ -11143,7 +10324,7 @@
 </p:sld>
 </file>
 
-<file path=ppt/slides/slide6.xml><?xml version="1.0" encoding="utf-8"?>
+<file path=ppt/slides/slide5.xml><?xml version="1.0" encoding="utf-8"?>
 <p:sld xmlns:a="http://schemas.openxmlformats.org/drawingml/2006/main" xmlns:r="http://schemas.openxmlformats.org/officeDocument/2006/relationships" xmlns:p="http://schemas.openxmlformats.org/presentationml/2006/main">
   <p:cSld>
     <p:spTree>
@@ -11223,8 +10404,8 @@
             </p:nvSpPr>
             <p:spPr>
               <a:xfrm>
-                <a:off x="1865376" y="1319287"/>
-                <a:ext cx="6096000" cy="570221"/>
+                <a:off x="2691535" y="1382801"/>
+                <a:ext cx="6096000" cy="629852"/>
               </a:xfrm>
               <a:prstGeom prst="rect">
                 <a:avLst/>
@@ -11247,7 +10428,7 @@
                       <m:f>
                         <m:fPr>
                           <m:ctrlPr>
-                            <a:rPr lang="ru-RU" sz="1600" i="1" smtClean="0">
+                            <a:rPr lang="ru-RU" i="1" smtClean="0">
                               <a:solidFill>
                                 <a:srgbClr val="836967"/>
                               </a:solidFill>
@@ -11257,13 +10438,13 @@
                         </m:fPr>
                         <m:num>
                           <m:r>
-                            <a:rPr lang="ru-RU" sz="1600">
+                            <a:rPr lang="ru-RU">
                               <a:latin typeface="Cambria Math" panose="02040503050406030204" pitchFamily="18" charset="0"/>
                             </a:rPr>
                             <m:t>𝜕</m:t>
                           </m:r>
                           <m:r>
-                            <a:rPr lang="ru-RU" sz="1600" i="1">
+                            <a:rPr lang="ru-RU" i="1">
                               <a:latin typeface="Cambria Math" panose="02040503050406030204" pitchFamily="18" charset="0"/>
                             </a:rPr>
                             <m:t>𝜑</m:t>
@@ -11271,13 +10452,13 @@
                         </m:num>
                         <m:den>
                           <m:r>
-                            <a:rPr lang="ru-RU" sz="1600" i="0">
+                            <a:rPr lang="ru-RU" i="0">
                               <a:latin typeface="Cambria Math" panose="02040503050406030204" pitchFamily="18" charset="0"/>
                             </a:rPr>
                             <m:t>𝜕</m:t>
                           </m:r>
                           <m:r>
-                            <a:rPr lang="ru-RU" sz="1600" i="1">
+                            <a:rPr lang="ru-RU" i="1">
                               <a:latin typeface="Cambria Math" panose="02040503050406030204" pitchFamily="18" charset="0"/>
                             </a:rPr>
                             <m:t>𝑡</m:t>
@@ -11285,7 +10466,7 @@
                         </m:den>
                       </m:f>
                       <m:r>
-                        <a:rPr lang="ru-RU" sz="1600" i="0">
+                        <a:rPr lang="ru-RU" i="0">
                           <a:latin typeface="Cambria Math" panose="02040503050406030204" pitchFamily="18" charset="0"/>
                         </a:rPr>
                         <m:t>+</m:t>
@@ -11293,7 +10474,7 @@
                       <m:f>
                         <m:fPr>
                           <m:ctrlPr>
-                            <a:rPr lang="ru-RU" sz="1600" i="1">
+                            <a:rPr lang="ru-RU" i="1">
                               <a:solidFill>
                                 <a:srgbClr val="836967"/>
                               </a:solidFill>
@@ -11303,7 +10484,7 @@
                         </m:fPr>
                         <m:num>
                           <m:r>
-                            <a:rPr lang="ru-RU" sz="1600" i="0">
+                            <a:rPr lang="ru-RU" i="0">
                               <a:latin typeface="Cambria Math" panose="02040503050406030204" pitchFamily="18" charset="0"/>
                             </a:rPr>
                             <m:t>𝜕</m:t>
@@ -11311,7 +10492,7 @@
                           <m:d>
                             <m:dPr>
                               <m:ctrlPr>
-                                <a:rPr lang="ru-RU" sz="1600" i="1">
+                                <a:rPr lang="ru-RU" i="1">
                                   <a:latin typeface="Cambria Math" panose="02040503050406030204" pitchFamily="18" charset="0"/>
                                 </a:rPr>
                               </m:ctrlPr>
@@ -11320,7 +10501,7 @@
                               <m:sSub>
                                 <m:sSubPr>
                                   <m:ctrlPr>
-                                    <a:rPr lang="ru-RU" sz="1600" i="1">
+                                    <a:rPr lang="ru-RU" i="1">
                                       <a:solidFill>
                                         <a:srgbClr val="836967"/>
                                       </a:solidFill>
@@ -11330,7 +10511,7 @@
                                 </m:sSubPr>
                                 <m:e>
                                   <m:r>
-                                    <a:rPr lang="ru-RU" sz="1600" i="1">
+                                    <a:rPr lang="ru-RU" i="1">
                                       <a:latin typeface="Cambria Math" panose="02040503050406030204" pitchFamily="18" charset="0"/>
                                     </a:rPr>
                                     <m:t>𝜗</m:t>
@@ -11338,7 +10519,7 @@
                                 </m:e>
                                 <m:sub>
                                   <m:r>
-                                    <a:rPr lang="ru-RU" sz="1600" i="1">
+                                    <a:rPr lang="ru-RU" i="1">
                                       <a:latin typeface="Cambria Math" panose="02040503050406030204" pitchFamily="18" charset="0"/>
                                     </a:rPr>
                                     <m:t>𝑟</m:t>
@@ -11346,7 +10527,7 @@
                                 </m:sub>
                               </m:sSub>
                               <m:r>
-                                <a:rPr lang="ru-RU" sz="1600" i="1">
+                                <a:rPr lang="ru-RU" i="1">
                                   <a:latin typeface="Cambria Math" panose="02040503050406030204" pitchFamily="18" charset="0"/>
                                 </a:rPr>
                                 <m:t>𝜑</m:t>
@@ -11356,13 +10537,13 @@
                         </m:num>
                         <m:den>
                           <m:r>
-                            <a:rPr lang="ru-RU" sz="1600" i="0">
+                            <a:rPr lang="ru-RU" i="0">
                               <a:latin typeface="Cambria Math" panose="02040503050406030204" pitchFamily="18" charset="0"/>
                             </a:rPr>
                             <m:t>𝜕</m:t>
                           </m:r>
                           <m:r>
-                            <a:rPr lang="ru-RU" sz="1600" i="1">
+                            <a:rPr lang="ru-RU" i="1">
                               <a:latin typeface="Cambria Math" panose="02040503050406030204" pitchFamily="18" charset="0"/>
                             </a:rPr>
                             <m:t>𝑟</m:t>
@@ -11370,7 +10551,7 @@
                         </m:den>
                       </m:f>
                       <m:r>
-                        <a:rPr lang="ru-RU" sz="1600" i="0">
+                        <a:rPr lang="ru-RU" i="0">
                           <a:latin typeface="Cambria Math" panose="02040503050406030204" pitchFamily="18" charset="0"/>
                         </a:rPr>
                         <m:t>+</m:t>
@@ -11378,7 +10559,7 @@
                       <m:sSub>
                         <m:sSubPr>
                           <m:ctrlPr>
-                            <a:rPr lang="ru-RU" sz="1600" i="1">
+                            <a:rPr lang="ru-RU" i="1">
                               <a:solidFill>
                                 <a:srgbClr val="836967"/>
                               </a:solidFill>
@@ -11388,7 +10569,7 @@
                         </m:sSubPr>
                         <m:e>
                           <m:r>
-                            <a:rPr lang="ru-RU" sz="1600" i="1">
+                            <a:rPr lang="ru-RU" i="1">
                               <a:latin typeface="Cambria Math" panose="02040503050406030204" pitchFamily="18" charset="0"/>
                             </a:rPr>
                             <m:t>𝜗</m:t>
@@ -11396,7 +10577,7 @@
                         </m:e>
                         <m:sub>
                           <m:r>
-                            <a:rPr lang="ru-RU" sz="1600" i="1">
+                            <a:rPr lang="ru-RU" i="1">
                               <a:latin typeface="Cambria Math" panose="02040503050406030204" pitchFamily="18" charset="0"/>
                             </a:rPr>
                             <m:t>𝑏</m:t>
@@ -11404,7 +10585,7 @@
                         </m:sub>
                       </m:sSub>
                       <m:r>
-                        <a:rPr lang="ru-RU" sz="1600" i="0">
+                        <a:rPr lang="ru-RU" i="0">
                           <a:latin typeface="Cambria Math" panose="02040503050406030204" pitchFamily="18" charset="0"/>
                         </a:rPr>
                         <m:t>=0</m:t>
@@ -11412,7 +10593,7 @@
                     </m:oMath>
                   </m:oMathPara>
                 </a14:m>
-                <a:endParaRPr lang="ru-RU" sz="1600" dirty="0"/>
+                <a:endParaRPr lang="ru-RU" dirty="0"/>
               </a:p>
             </p:txBody>
           </p:sp>
@@ -11434,8 +10615,8 @@
             </p:nvSpPr>
             <p:spPr>
               <a:xfrm>
-                <a:off x="1865376" y="1319287"/>
-                <a:ext cx="6096000" cy="570221"/>
+                <a:off x="2691535" y="1382801"/>
+                <a:ext cx="6096000" cy="629852"/>
               </a:xfrm>
               <a:prstGeom prst="rect">
                 <a:avLst/>
@@ -11478,8 +10659,8 @@
             </p:nvSpPr>
             <p:spPr>
               <a:xfrm>
-                <a:off x="0" y="2803892"/>
-                <a:ext cx="4517136" cy="625108"/>
+                <a:off x="810768" y="2986798"/>
+                <a:ext cx="4517136" cy="691664"/>
               </a:xfrm>
               <a:prstGeom prst="rect">
                 <a:avLst/>
@@ -11502,7 +10683,7 @@
                       <m:sSub>
                         <m:sSubPr>
                           <m:ctrlPr>
-                            <a:rPr lang="ru-RU" sz="1600" i="1" smtClean="0">
+                            <a:rPr lang="ru-RU" i="1" smtClean="0">
                               <a:solidFill>
                                 <a:srgbClr val="836967"/>
                               </a:solidFill>
@@ -11512,7 +10693,7 @@
                         </m:sSubPr>
                         <m:e>
                           <m:r>
-                            <a:rPr lang="ru-RU" sz="1600" i="1">
+                            <a:rPr lang="ru-RU" i="1">
                               <a:latin typeface="Cambria Math" panose="02040503050406030204" pitchFamily="18" charset="0"/>
                             </a:rPr>
                             <m:t>𝑚</m:t>
@@ -11520,7 +10701,7 @@
                         </m:e>
                         <m:sub>
                           <m:r>
-                            <a:rPr lang="ru-RU" sz="1600" i="1">
+                            <a:rPr lang="ru-RU" i="1">
                               <a:latin typeface="Cambria Math" panose="02040503050406030204" pitchFamily="18" charset="0"/>
                             </a:rPr>
                             <m:t>𝑓</m:t>
@@ -11528,7 +10709,7 @@
                         </m:sub>
                       </m:sSub>
                       <m:r>
-                        <a:rPr lang="ru-RU" sz="1600" i="0">
+                        <a:rPr lang="ru-RU" i="0">
                           <a:latin typeface="Cambria Math" panose="02040503050406030204" pitchFamily="18" charset="0"/>
                         </a:rPr>
                         <m:t>=</m:t>
@@ -11537,7 +10718,7 @@
                         <m:fPr>
                           <m:type m:val="lin"/>
                           <m:ctrlPr>
-                            <a:rPr lang="ru-RU" sz="1600" i="1">
+                            <a:rPr lang="ru-RU" i="1">
                               <a:latin typeface="Cambria Math" panose="02040503050406030204" pitchFamily="18" charset="0"/>
                             </a:rPr>
                           </m:ctrlPr>
@@ -11547,14 +10728,14 @@
                             <m:naryPr>
                               <m:limLoc m:val="subSup"/>
                               <m:ctrlPr>
-                                <a:rPr lang="ru-RU" sz="1600" i="1">
+                                <a:rPr lang="ru-RU" i="1">
                                   <a:latin typeface="Cambria Math" panose="02040503050406030204" pitchFamily="18" charset="0"/>
                                 </a:rPr>
                               </m:ctrlPr>
                             </m:naryPr>
                             <m:sub>
                               <m:r>
-                                <a:rPr lang="ru-RU" sz="1600" i="0">
+                                <a:rPr lang="ru-RU" i="0">
                                   <a:latin typeface="Cambria Math" panose="02040503050406030204" pitchFamily="18" charset="0"/>
                                 </a:rPr>
                                 <m:t>0</m:t>
@@ -11562,7 +10743,7 @@
                             </m:sub>
                             <m:sup>
                               <m:r>
-                                <a:rPr lang="ru-RU" sz="1600" i="0">
+                                <a:rPr lang="ru-RU" i="0">
                                   <a:latin typeface="Cambria Math" panose="02040503050406030204" pitchFamily="18" charset="0"/>
                                 </a:rPr>
                                 <m:t>∞</m:t>
@@ -11572,7 +10753,7 @@
                               <m:sSup>
                                 <m:sSupPr>
                                   <m:ctrlPr>
-                                    <a:rPr lang="ru-RU" sz="1600" i="1">
+                                    <a:rPr lang="ru-RU" i="1">
                                       <a:solidFill>
                                         <a:srgbClr val="836967"/>
                                       </a:solidFill>
@@ -11582,7 +10763,7 @@
                                 </m:sSupPr>
                                 <m:e>
                                   <m:r>
-                                    <a:rPr lang="ru-RU" sz="1600" i="1">
+                                    <a:rPr lang="ru-RU" i="1">
                                       <a:latin typeface="Cambria Math" panose="02040503050406030204" pitchFamily="18" charset="0"/>
                                     </a:rPr>
                                     <m:t>𝑟</m:t>
@@ -11590,7 +10771,7 @@
                                 </m:e>
                                 <m:sup>
                                   <m:r>
-                                    <a:rPr lang="ru-RU" sz="1600" i="0">
+                                    <a:rPr lang="ru-RU" i="0">
                                       <a:latin typeface="Cambria Math" panose="02040503050406030204" pitchFamily="18" charset="0"/>
                                     </a:rPr>
                                     <m:t>2</m:t>
@@ -11598,7 +10779,7 @@
                                 </m:sup>
                               </m:sSup>
                               <m:r>
-                                <a:rPr lang="ru-RU" sz="1600" i="1">
+                                <a:rPr lang="ru-RU" i="1">
                                   <a:latin typeface="Cambria Math" panose="02040503050406030204" pitchFamily="18" charset="0"/>
                                 </a:rPr>
                                 <m:t>𝜑</m:t>
@@ -11606,14 +10787,14 @@
                               <m:d>
                                 <m:dPr>
                                   <m:ctrlPr>
-                                    <a:rPr lang="ru-RU" sz="1600" i="1">
+                                    <a:rPr lang="ru-RU" i="1">
                                       <a:latin typeface="Cambria Math" panose="02040503050406030204" pitchFamily="18" charset="0"/>
                                     </a:rPr>
                                   </m:ctrlPr>
                                 </m:dPr>
                                 <m:e>
                                   <m:r>
-                                    <a:rPr lang="ru-RU" sz="1600" i="1">
+                                    <a:rPr lang="ru-RU" i="1">
                                       <a:latin typeface="Cambria Math" panose="02040503050406030204" pitchFamily="18" charset="0"/>
                                     </a:rPr>
                                     <m:t>𝑟</m:t>
@@ -11621,7 +10802,7 @@
                                 </m:e>
                               </m:d>
                               <m:r>
-                                <a:rPr lang="ru-RU" sz="1600" i="1">
+                                <a:rPr lang="ru-RU" i="1">
                                   <a:latin typeface="Cambria Math" panose="02040503050406030204" pitchFamily="18" charset="0"/>
                                 </a:rPr>
                                 <m:t>𝑑𝑟</m:t>
@@ -11634,14 +10815,14 @@
                             <m:naryPr>
                               <m:limLoc m:val="subSup"/>
                               <m:ctrlPr>
-                                <a:rPr lang="ru-RU" sz="1600" i="1">
+                                <a:rPr lang="ru-RU" i="1">
                                   <a:latin typeface="Cambria Math" panose="02040503050406030204" pitchFamily="18" charset="0"/>
                                 </a:rPr>
                               </m:ctrlPr>
                             </m:naryPr>
                             <m:sub>
                               <m:r>
-                                <a:rPr lang="ru-RU" sz="1600" i="0">
+                                <a:rPr lang="ru-RU" i="0">
                                   <a:latin typeface="Cambria Math" panose="02040503050406030204" pitchFamily="18" charset="0"/>
                                 </a:rPr>
                                 <m:t>0</m:t>
@@ -11649,7 +10830,7 @@
                             </m:sub>
                             <m:sup>
                               <m:r>
-                                <a:rPr lang="ru-RU" sz="1600" i="0">
+                                <a:rPr lang="ru-RU" i="0">
                                   <a:latin typeface="Cambria Math" panose="02040503050406030204" pitchFamily="18" charset="0"/>
                                 </a:rPr>
                                 <m:t>∞</m:t>
@@ -11659,7 +10840,7 @@
                               <m:sSup>
                                 <m:sSupPr>
                                   <m:ctrlPr>
-                                    <a:rPr lang="ru-RU" sz="1600" i="1">
+                                    <a:rPr lang="ru-RU" i="1">
                                       <a:solidFill>
                                         <a:srgbClr val="836967"/>
                                       </a:solidFill>
@@ -11669,7 +10850,7 @@
                                 </m:sSupPr>
                                 <m:e>
                                   <m:r>
-                                    <a:rPr lang="ru-RU" sz="1600" i="1">
+                                    <a:rPr lang="ru-RU" i="1">
                                       <a:latin typeface="Cambria Math" panose="02040503050406030204" pitchFamily="18" charset="0"/>
                                     </a:rPr>
                                     <m:t>𝑟</m:t>
@@ -11677,7 +10858,7 @@
                                 </m:e>
                                 <m:sup>
                                   <m:r>
-                                    <a:rPr lang="ru-RU" sz="1600" i="0">
+                                    <a:rPr lang="ru-RU" i="0">
                                       <a:latin typeface="Cambria Math" panose="02040503050406030204" pitchFamily="18" charset="0"/>
                                     </a:rPr>
                                     <m:t>2</m:t>
@@ -11687,7 +10868,7 @@
                               <m:sSub>
                                 <m:sSubPr>
                                   <m:ctrlPr>
-                                    <a:rPr lang="ru-RU" sz="1600" i="1">
+                                    <a:rPr lang="ru-RU" i="1">
                                       <a:solidFill>
                                         <a:srgbClr val="836967"/>
                                       </a:solidFill>
@@ -11697,7 +10878,7 @@
                                 </m:sSubPr>
                                 <m:e>
                                   <m:r>
-                                    <a:rPr lang="ru-RU" sz="1600" i="1">
+                                    <a:rPr lang="ru-RU" i="1">
                                       <a:latin typeface="Cambria Math" panose="02040503050406030204" pitchFamily="18" charset="0"/>
                                     </a:rPr>
                                     <m:t>𝜑</m:t>
@@ -11705,7 +10886,7 @@
                                 </m:e>
                                 <m:sub>
                                   <m:r>
-                                    <a:rPr lang="ru-RU" sz="1600" i="0">
+                                    <a:rPr lang="ru-RU" i="0">
                                       <a:latin typeface="Cambria Math" panose="02040503050406030204" pitchFamily="18" charset="0"/>
                                     </a:rPr>
                                     <m:t>0</m:t>
@@ -11715,14 +10896,14 @@
                               <m:d>
                                 <m:dPr>
                                   <m:ctrlPr>
-                                    <a:rPr lang="ru-RU" sz="1600" i="1">
+                                    <a:rPr lang="ru-RU" i="1">
                                       <a:latin typeface="Cambria Math" panose="02040503050406030204" pitchFamily="18" charset="0"/>
                                     </a:rPr>
                                   </m:ctrlPr>
                                 </m:dPr>
                                 <m:e>
                                   <m:r>
-                                    <a:rPr lang="ru-RU" sz="1600" i="1">
+                                    <a:rPr lang="ru-RU" i="1">
                                       <a:latin typeface="Cambria Math" panose="02040503050406030204" pitchFamily="18" charset="0"/>
                                     </a:rPr>
                                     <m:t>𝑟</m:t>
@@ -11730,7 +10911,7 @@
                                 </m:e>
                               </m:d>
                               <m:r>
-                                <a:rPr lang="ru-RU" sz="1600" i="1">
+                                <a:rPr lang="ru-RU" i="1">
                                   <a:latin typeface="Cambria Math" panose="02040503050406030204" pitchFamily="18" charset="0"/>
                                 </a:rPr>
                                 <m:t>𝑑𝑟</m:t>
@@ -11742,7 +10923,7 @@
                     </m:oMath>
                   </m:oMathPara>
                 </a14:m>
-                <a:endParaRPr lang="ru-RU" sz="1600" dirty="0"/>
+                <a:endParaRPr lang="ru-RU" dirty="0"/>
               </a:p>
             </p:txBody>
           </p:sp>
@@ -11764,8 +10945,8 @@
             </p:nvSpPr>
             <p:spPr>
               <a:xfrm>
-                <a:off x="0" y="2803892"/>
-                <a:ext cx="4517136" cy="625108"/>
+                <a:off x="810768" y="2986798"/>
+                <a:ext cx="4517136" cy="691664"/>
               </a:xfrm>
               <a:prstGeom prst="rect">
                 <a:avLst/>
@@ -11808,8 +10989,8 @@
             </p:nvSpPr>
             <p:spPr>
               <a:xfrm>
-                <a:off x="5571744" y="2852130"/>
-                <a:ext cx="3706368" cy="625108"/>
+                <a:off x="6096000" y="3048250"/>
+                <a:ext cx="3706368" cy="691664"/>
               </a:xfrm>
               <a:prstGeom prst="rect">
                 <a:avLst/>
@@ -11832,7 +11013,7 @@
                       <m:sSub>
                         <m:sSubPr>
                           <m:ctrlPr>
-                            <a:rPr lang="ru-RU" sz="1600" i="1" smtClean="0">
+                            <a:rPr lang="ru-RU" i="1" smtClean="0">
                               <a:solidFill>
                                 <a:srgbClr val="836967"/>
                               </a:solidFill>
@@ -11842,7 +11023,7 @@
                         </m:sSubPr>
                         <m:e>
                           <m:r>
-                            <a:rPr lang="ru-RU" sz="1600" i="1">
+                            <a:rPr lang="ru-RU" i="1">
                               <a:latin typeface="Cambria Math" panose="02040503050406030204" pitchFamily="18" charset="0"/>
                             </a:rPr>
                             <m:t>𝑘</m:t>
@@ -11850,7 +11031,7 @@
                         </m:e>
                         <m:sub>
                           <m:r>
-                            <a:rPr lang="ru-RU" sz="1600" i="1">
+                            <a:rPr lang="ru-RU" i="1">
                               <a:latin typeface="Cambria Math" panose="02040503050406030204" pitchFamily="18" charset="0"/>
                             </a:rPr>
                             <m:t>𝑓</m:t>
@@ -11858,7 +11039,7 @@
                         </m:sub>
                       </m:sSub>
                       <m:r>
-                        <a:rPr lang="ru-RU" sz="1600" i="0">
+                        <a:rPr lang="ru-RU" i="0">
                           <a:latin typeface="Cambria Math" panose="02040503050406030204" pitchFamily="18" charset="0"/>
                         </a:rPr>
                         <m:t>=</m:t>
@@ -11867,7 +11048,7 @@
                         <m:fPr>
                           <m:type m:val="lin"/>
                           <m:ctrlPr>
-                            <a:rPr lang="ru-RU" sz="1600" i="1">
+                            <a:rPr lang="ru-RU" i="1">
                               <a:latin typeface="Cambria Math" panose="02040503050406030204" pitchFamily="18" charset="0"/>
                             </a:rPr>
                           </m:ctrlPr>
@@ -11877,14 +11058,14 @@
                             <m:naryPr>
                               <m:limLoc m:val="subSup"/>
                               <m:ctrlPr>
-                                <a:rPr lang="ru-RU" sz="1600" i="1">
+                                <a:rPr lang="ru-RU" i="1">
                                   <a:latin typeface="Cambria Math" panose="02040503050406030204" pitchFamily="18" charset="0"/>
                                 </a:rPr>
                               </m:ctrlPr>
                             </m:naryPr>
                             <m:sub>
                               <m:r>
-                                <a:rPr lang="ru-RU" sz="1600" i="0">
+                                <a:rPr lang="ru-RU" i="0">
                                   <a:latin typeface="Cambria Math" panose="02040503050406030204" pitchFamily="18" charset="0"/>
                                 </a:rPr>
                                 <m:t>0</m:t>
@@ -11892,7 +11073,7 @@
                             </m:sub>
                             <m:sup>
                               <m:r>
-                                <a:rPr lang="ru-RU" sz="1600" i="0">
+                                <a:rPr lang="ru-RU" i="0">
                                   <a:latin typeface="Cambria Math" panose="02040503050406030204" pitchFamily="18" charset="0"/>
                                 </a:rPr>
                                 <m:t>∞</m:t>
@@ -11902,7 +11083,7 @@
                               <m:sSup>
                                 <m:sSupPr>
                                   <m:ctrlPr>
-                                    <a:rPr lang="ru-RU" sz="1600" i="1">
+                                    <a:rPr lang="ru-RU" i="1">
                                       <a:solidFill>
                                         <a:srgbClr val="836967"/>
                                       </a:solidFill>
@@ -11912,7 +11093,7 @@
                                 </m:sSupPr>
                                 <m:e>
                                   <m:r>
-                                    <a:rPr lang="ru-RU" sz="1600" i="1">
+                                    <a:rPr lang="ru-RU" i="1">
                                       <a:latin typeface="Cambria Math" panose="02040503050406030204" pitchFamily="18" charset="0"/>
                                     </a:rPr>
                                     <m:t>𝑟</m:t>
@@ -11920,7 +11101,7 @@
                                 </m:e>
                                 <m:sup>
                                   <m:r>
-                                    <a:rPr lang="ru-RU" sz="1600" i="0">
+                                    <a:rPr lang="ru-RU" i="0">
                                       <a:latin typeface="Cambria Math" panose="02040503050406030204" pitchFamily="18" charset="0"/>
                                     </a:rPr>
                                     <m:t>4</m:t>
@@ -11928,7 +11109,7 @@
                                 </m:sup>
                               </m:sSup>
                               <m:r>
-                                <a:rPr lang="ru-RU" sz="1600" i="1">
+                                <a:rPr lang="ru-RU" i="1">
                                   <a:latin typeface="Cambria Math" panose="02040503050406030204" pitchFamily="18" charset="0"/>
                                 </a:rPr>
                                 <m:t>𝜑</m:t>
@@ -11936,14 +11117,14 @@
                               <m:d>
                                 <m:dPr>
                                   <m:ctrlPr>
-                                    <a:rPr lang="ru-RU" sz="1600" i="1">
+                                    <a:rPr lang="ru-RU" i="1">
                                       <a:latin typeface="Cambria Math" panose="02040503050406030204" pitchFamily="18" charset="0"/>
                                     </a:rPr>
                                   </m:ctrlPr>
                                 </m:dPr>
                                 <m:e>
                                   <m:r>
-                                    <a:rPr lang="ru-RU" sz="1600" i="1">
+                                    <a:rPr lang="ru-RU" i="1">
                                       <a:latin typeface="Cambria Math" panose="02040503050406030204" pitchFamily="18" charset="0"/>
                                     </a:rPr>
                                     <m:t>𝑟</m:t>
@@ -11951,7 +11132,7 @@
                                 </m:e>
                               </m:d>
                               <m:r>
-                                <a:rPr lang="ru-RU" sz="1600" i="1">
+                                <a:rPr lang="ru-RU" i="1">
                                   <a:latin typeface="Cambria Math" panose="02040503050406030204" pitchFamily="18" charset="0"/>
                                 </a:rPr>
                                 <m:t>𝑑𝑟</m:t>
@@ -11964,14 +11145,14 @@
                             <m:naryPr>
                               <m:limLoc m:val="subSup"/>
                               <m:ctrlPr>
-                                <a:rPr lang="ru-RU" sz="1600" i="1">
+                                <a:rPr lang="ru-RU" i="1">
                                   <a:latin typeface="Cambria Math" panose="02040503050406030204" pitchFamily="18" charset="0"/>
                                 </a:rPr>
                               </m:ctrlPr>
                             </m:naryPr>
                             <m:sub>
                               <m:r>
-                                <a:rPr lang="ru-RU" sz="1600" i="0">
+                                <a:rPr lang="ru-RU" i="0">
                                   <a:latin typeface="Cambria Math" panose="02040503050406030204" pitchFamily="18" charset="0"/>
                                 </a:rPr>
                                 <m:t>0</m:t>
@@ -11979,7 +11160,7 @@
                             </m:sub>
                             <m:sup>
                               <m:r>
-                                <a:rPr lang="ru-RU" sz="1600" i="0">
+                                <a:rPr lang="ru-RU" i="0">
                                   <a:latin typeface="Cambria Math" panose="02040503050406030204" pitchFamily="18" charset="0"/>
                                 </a:rPr>
                                 <m:t>∞</m:t>
@@ -11989,7 +11170,7 @@
                               <m:sSup>
                                 <m:sSupPr>
                                   <m:ctrlPr>
-                                    <a:rPr lang="ru-RU" sz="1600" i="1">
+                                    <a:rPr lang="ru-RU" i="1">
                                       <a:solidFill>
                                         <a:srgbClr val="836967"/>
                                       </a:solidFill>
@@ -11999,7 +11180,7 @@
                                 </m:sSupPr>
                                 <m:e>
                                   <m:r>
-                                    <a:rPr lang="ru-RU" sz="1600" i="1">
+                                    <a:rPr lang="ru-RU" i="1">
                                       <a:latin typeface="Cambria Math" panose="02040503050406030204" pitchFamily="18" charset="0"/>
                                     </a:rPr>
                                     <m:t>𝑟</m:t>
@@ -12007,7 +11188,7 @@
                                 </m:e>
                                 <m:sup>
                                   <m:r>
-                                    <a:rPr lang="ru-RU" sz="1600" i="0">
+                                    <a:rPr lang="ru-RU" i="0">
                                       <a:latin typeface="Cambria Math" panose="02040503050406030204" pitchFamily="18" charset="0"/>
                                     </a:rPr>
                                     <m:t>4</m:t>
@@ -12017,7 +11198,7 @@
                               <m:sSub>
                                 <m:sSubPr>
                                   <m:ctrlPr>
-                                    <a:rPr lang="ru-RU" sz="1600" i="1">
+                                    <a:rPr lang="ru-RU" i="1">
                                       <a:solidFill>
                                         <a:srgbClr val="836967"/>
                                       </a:solidFill>
@@ -12027,7 +11208,7 @@
                                 </m:sSubPr>
                                 <m:e>
                                   <m:r>
-                                    <a:rPr lang="ru-RU" sz="1600" i="1">
+                                    <a:rPr lang="ru-RU" i="1">
                                       <a:latin typeface="Cambria Math" panose="02040503050406030204" pitchFamily="18" charset="0"/>
                                     </a:rPr>
                                     <m:t>𝜑</m:t>
@@ -12035,7 +11216,7 @@
                                 </m:e>
                                 <m:sub>
                                   <m:r>
-                                    <a:rPr lang="ru-RU" sz="1600" i="0">
+                                    <a:rPr lang="ru-RU" i="0">
                                       <a:latin typeface="Cambria Math" panose="02040503050406030204" pitchFamily="18" charset="0"/>
                                     </a:rPr>
                                     <m:t>0</m:t>
@@ -12045,14 +11226,14 @@
                               <m:d>
                                 <m:dPr>
                                   <m:ctrlPr>
-                                    <a:rPr lang="ru-RU" sz="1600" i="1">
+                                    <a:rPr lang="ru-RU" i="1">
                                       <a:latin typeface="Cambria Math" panose="02040503050406030204" pitchFamily="18" charset="0"/>
                                     </a:rPr>
                                   </m:ctrlPr>
                                 </m:dPr>
                                 <m:e>
                                   <m:r>
-                                    <a:rPr lang="ru-RU" sz="1600" i="1">
+                                    <a:rPr lang="ru-RU" i="1">
                                       <a:latin typeface="Cambria Math" panose="02040503050406030204" pitchFamily="18" charset="0"/>
                                     </a:rPr>
                                     <m:t>𝑟</m:t>
@@ -12060,7 +11241,7 @@
                                 </m:e>
                               </m:d>
                               <m:r>
-                                <a:rPr lang="ru-RU" sz="1600" i="1">
+                                <a:rPr lang="ru-RU" i="1">
                                   <a:latin typeface="Cambria Math" panose="02040503050406030204" pitchFamily="18" charset="0"/>
                                 </a:rPr>
                                 <m:t>𝑑𝑟</m:t>
@@ -12072,7 +11253,7 @@
                     </m:oMath>
                   </m:oMathPara>
                 </a14:m>
-                <a:endParaRPr lang="ru-RU" sz="1600" dirty="0"/>
+                <a:endParaRPr lang="ru-RU" dirty="0"/>
               </a:p>
             </p:txBody>
           </p:sp>
@@ -12094,8 +11275,8 @@
             </p:nvSpPr>
             <p:spPr>
               <a:xfrm>
-                <a:off x="5571744" y="2852130"/>
-                <a:ext cx="3706368" cy="625108"/>
+                <a:off x="6096000" y="3048250"/>
+                <a:ext cx="3706368" cy="691664"/>
               </a:xfrm>
               <a:prstGeom prst="rect">
                 <a:avLst/>
@@ -12122,88 +11303,6 @@
           </p:sp>
         </mc:Fallback>
       </mc:AlternateContent>
-      <p:cxnSp>
-        <p:nvCxnSpPr>
-          <p:cNvPr id="11" name="Прямая со стрелкой 10">
-            <a:extLst>
-              <a:ext uri="{FF2B5EF4-FFF2-40B4-BE49-F238E27FC236}">
-                <a16:creationId xmlns:a16="http://schemas.microsoft.com/office/drawing/2014/main" id="{7E204D7B-1139-44CB-AC94-22BF1A66819F}"/>
-              </a:ext>
-            </a:extLst>
-          </p:cNvPr>
-          <p:cNvCxnSpPr>
-            <a:cxnSpLocks/>
-          </p:cNvCxnSpPr>
-          <p:nvPr/>
-        </p:nvCxnSpPr>
-        <p:spPr>
-          <a:xfrm flipH="1">
-            <a:off x="2999232" y="1889508"/>
-            <a:ext cx="774192" cy="766033"/>
-          </a:xfrm>
-          <a:prstGeom prst="straightConnector1">
-            <a:avLst/>
-          </a:prstGeom>
-          <a:ln>
-            <a:tailEnd type="triangle"/>
-          </a:ln>
-        </p:spPr>
-        <p:style>
-          <a:lnRef idx="1">
-            <a:schemeClr val="accent1"/>
-          </a:lnRef>
-          <a:fillRef idx="0">
-            <a:schemeClr val="accent1"/>
-          </a:fillRef>
-          <a:effectRef idx="0">
-            <a:schemeClr val="accent1"/>
-          </a:effectRef>
-          <a:fontRef idx="minor">
-            <a:schemeClr val="tx1"/>
-          </a:fontRef>
-        </p:style>
-      </p:cxnSp>
-      <p:cxnSp>
-        <p:nvCxnSpPr>
-          <p:cNvPr id="12" name="Прямая со стрелкой 11">
-            <a:extLst>
-              <a:ext uri="{FF2B5EF4-FFF2-40B4-BE49-F238E27FC236}">
-                <a16:creationId xmlns:a16="http://schemas.microsoft.com/office/drawing/2014/main" id="{2193A112-BB4E-436A-A589-1C9A2180C406}"/>
-              </a:ext>
-            </a:extLst>
-          </p:cNvPr>
-          <p:cNvCxnSpPr>
-            <a:cxnSpLocks/>
-          </p:cNvCxnSpPr>
-          <p:nvPr/>
-        </p:nvCxnSpPr>
-        <p:spPr>
-          <a:xfrm>
-            <a:off x="6096000" y="1885289"/>
-            <a:ext cx="652272" cy="689782"/>
-          </a:xfrm>
-          <a:prstGeom prst="straightConnector1">
-            <a:avLst/>
-          </a:prstGeom>
-          <a:ln>
-            <a:tailEnd type="triangle"/>
-          </a:ln>
-        </p:spPr>
-        <p:style>
-          <a:lnRef idx="1">
-            <a:schemeClr val="accent1"/>
-          </a:lnRef>
-          <a:fillRef idx="0">
-            <a:schemeClr val="accent1"/>
-          </a:fillRef>
-          <a:effectRef idx="0">
-            <a:schemeClr val="accent1"/>
-          </a:effectRef>
-          <a:fontRef idx="minor">
-            <a:schemeClr val="tx1"/>
-          </a:fontRef>
-        </p:style>
-      </p:cxnSp>
       <mc:AlternateContent xmlns:mc="http://schemas.openxmlformats.org/markup-compatibility/2006" xmlns:a14="http://schemas.microsoft.com/office/drawing/2010/main">
         <mc:Choice Requires="a14">
           <p:sp>
@@ -12824,6 +11923,78 @@
           </a:p>
         </p:txBody>
       </p:sp>
+      <p:pic>
+        <p:nvPicPr>
+          <p:cNvPr id="4" name="Рисунок 3">
+            <a:extLst>
+              <a:ext uri="{FF2B5EF4-FFF2-40B4-BE49-F238E27FC236}">
+                <a16:creationId xmlns:a16="http://schemas.microsoft.com/office/drawing/2014/main" id="{5213BA0F-0C72-4613-9186-71E981B5AD71}"/>
+              </a:ext>
+            </a:extLst>
+          </p:cNvPr>
+          <p:cNvPicPr>
+            <a:picLocks noChangeAspect="1"/>
+          </p:cNvPicPr>
+          <p:nvPr/>
+        </p:nvPicPr>
+        <p:blipFill>
+          <a:blip r:embed="rId6">
+            <a:extLst>
+              <a:ext uri="{28A0092B-C50C-407E-A947-70E740481C1C}">
+                <a14:useLocalDpi xmlns:a14="http://schemas.microsoft.com/office/drawing/2010/main" val="0"/>
+              </a:ext>
+            </a:extLst>
+          </a:blip>
+          <a:stretch>
+            <a:fillRect/>
+          </a:stretch>
+        </p:blipFill>
+        <p:spPr>
+          <a:xfrm rot="19539274">
+            <a:off x="3060541" y="1109161"/>
+            <a:ext cx="1616114" cy="2532436"/>
+          </a:xfrm>
+          <a:prstGeom prst="rect">
+            <a:avLst/>
+          </a:prstGeom>
+        </p:spPr>
+      </p:pic>
+      <p:pic>
+        <p:nvPicPr>
+          <p:cNvPr id="21" name="Рисунок 20">
+            <a:extLst>
+              <a:ext uri="{FF2B5EF4-FFF2-40B4-BE49-F238E27FC236}">
+                <a16:creationId xmlns:a16="http://schemas.microsoft.com/office/drawing/2014/main" id="{BA8F385A-111F-45AB-9DFC-A0B93AC3B4D2}"/>
+              </a:ext>
+            </a:extLst>
+          </p:cNvPr>
+          <p:cNvPicPr>
+            <a:picLocks noChangeAspect="1"/>
+          </p:cNvPicPr>
+          <p:nvPr/>
+        </p:nvPicPr>
+        <p:blipFill>
+          <a:blip r:embed="rId6">
+            <a:extLst>
+              <a:ext uri="{28A0092B-C50C-407E-A947-70E740481C1C}">
+                <a14:useLocalDpi xmlns:a14="http://schemas.microsoft.com/office/drawing/2010/main" val="0"/>
+              </a:ext>
+            </a:extLst>
+          </a:blip>
+          <a:stretch>
+            <a:fillRect/>
+          </a:stretch>
+        </p:blipFill>
+        <p:spPr>
+          <a:xfrm rot="12865734">
+            <a:off x="6831096" y="1113645"/>
+            <a:ext cx="1660625" cy="2568062"/>
+          </a:xfrm>
+          <a:prstGeom prst="rect">
+            <a:avLst/>
+          </a:prstGeom>
+        </p:spPr>
+      </p:pic>
     </p:spTree>
     <p:extLst>
       <p:ext uri="{BB962C8B-B14F-4D97-AF65-F5344CB8AC3E}">
@@ -12837,7 +12008,7 @@
 </p:sld>
 </file>
 
-<file path=ppt/slides/slide7.xml><?xml version="1.0" encoding="utf-8"?>
+<file path=ppt/slides/slide6.xml><?xml version="1.0" encoding="utf-8"?>
 <p:sld xmlns:a="http://schemas.openxmlformats.org/drawingml/2006/main" xmlns:r="http://schemas.openxmlformats.org/officeDocument/2006/relationships" xmlns:p="http://schemas.openxmlformats.org/presentationml/2006/main">
   <p:cSld>
     <p:spTree>
@@ -13405,7 +12576,7 @@
 </p:sld>
 </file>
 
-<file path=ppt/slides/slide8.xml><?xml version="1.0" encoding="utf-8"?>
+<file path=ppt/slides/slide7.xml><?xml version="1.0" encoding="utf-8"?>
 <p:sld xmlns:a="http://schemas.openxmlformats.org/drawingml/2006/main" xmlns:r="http://schemas.openxmlformats.org/officeDocument/2006/relationships" xmlns:p="http://schemas.openxmlformats.org/presentationml/2006/main">
   <p:cSld>
     <p:spTree>
@@ -13924,7 +13095,7 @@
 </p:sld>
 </file>
 
-<file path=ppt/slides/slide9.xml><?xml version="1.0" encoding="utf-8"?>
+<file path=ppt/slides/slide8.xml><?xml version="1.0" encoding="utf-8"?>
 <p:sld xmlns:a="http://schemas.openxmlformats.org/drawingml/2006/main" xmlns:r="http://schemas.openxmlformats.org/officeDocument/2006/relationships" xmlns:p="http://schemas.openxmlformats.org/presentationml/2006/main">
   <p:cSld>
     <p:spTree>
@@ -16010,6 +15181,691 @@
 </p:sld>
 </file>
 
+<file path=ppt/slides/slide9.xml><?xml version="1.0" encoding="utf-8"?>
+<p:sld xmlns:a="http://schemas.openxmlformats.org/drawingml/2006/main" xmlns:r="http://schemas.openxmlformats.org/officeDocument/2006/relationships" xmlns:p="http://schemas.openxmlformats.org/presentationml/2006/main">
+  <p:cSld>
+    <p:spTree>
+      <p:nvGrpSpPr>
+        <p:cNvPr id="1" name=""/>
+        <p:cNvGrpSpPr/>
+        <p:nvPr/>
+      </p:nvGrpSpPr>
+      <p:grpSpPr>
+        <a:xfrm>
+          <a:off x="0" y="0"/>
+          <a:ext cx="0" cy="0"/>
+          <a:chOff x="0" y="0"/>
+          <a:chExt cx="0" cy="0"/>
+        </a:xfrm>
+      </p:grpSpPr>
+      <p:sp>
+        <p:nvSpPr>
+          <p:cNvPr id="2" name="Rectangle 7">
+            <a:extLst>
+              <a:ext uri="{FF2B5EF4-FFF2-40B4-BE49-F238E27FC236}">
+                <a16:creationId xmlns:a16="http://schemas.microsoft.com/office/drawing/2014/main" id="{DF5A8599-252C-41B5-904A-A02A2240B53C}"/>
+              </a:ext>
+            </a:extLst>
+          </p:cNvPr>
+          <p:cNvSpPr>
+            <a:spLocks noChangeArrowheads="1"/>
+          </p:cNvSpPr>
+          <p:nvPr/>
+        </p:nvSpPr>
+        <p:spPr bwMode="auto">
+          <a:xfrm>
+            <a:off x="1603247" y="2005583"/>
+            <a:ext cx="16111407" cy="45719"/>
+          </a:xfrm>
+          <a:prstGeom prst="rect">
+            <a:avLst/>
+          </a:prstGeom>
+          <a:noFill/>
+          <a:ln>
+            <a:noFill/>
+          </a:ln>
+          <a:effectLst/>
+          <a:extLst>
+            <a:ext uri="{909E8E84-426E-40DD-AFC4-6F175D3DCCD1}">
+              <a14:hiddenFill xmlns:a14="http://schemas.microsoft.com/office/drawing/2010/main">
+                <a:solidFill>
+                  <a:schemeClr val="accent1"/>
+                </a:solidFill>
+              </a14:hiddenFill>
+            </a:ext>
+            <a:ext uri="{91240B29-F687-4F45-9708-019B960494DF}">
+              <a14:hiddenLine xmlns:a14="http://schemas.microsoft.com/office/drawing/2010/main" w="9525">
+                <a:solidFill>
+                  <a:schemeClr val="tx1"/>
+                </a:solidFill>
+                <a:miter lim="800000"/>
+                <a:headEnd/>
+                <a:tailEnd/>
+              </a14:hiddenLine>
+            </a:ext>
+            <a:ext uri="{AF507438-7753-43E0-B8FC-AC1667EBCBE1}">
+              <a14:hiddenEffects xmlns:a14="http://schemas.microsoft.com/office/drawing/2010/main">
+                <a:effectLst>
+                  <a:outerShdw dist="35921" dir="2700000" algn="ctr" rotWithShape="0">
+                    <a:schemeClr val="bg2"/>
+                  </a:outerShdw>
+                </a:effectLst>
+              </a14:hiddenEffects>
+            </a:ext>
+          </a:extLst>
+        </p:spPr>
+        <p:txBody>
+          <a:bodyPr vert="horz" wrap="square" lIns="91440" tIns="45720" rIns="91440" bIns="45720" numCol="1" anchor="ctr" anchorCtr="0" compatLnSpc="1">
+            <a:prstTxWarp prst="textNoShape">
+              <a:avLst/>
+            </a:prstTxWarp>
+            <a:spAutoFit/>
+          </a:bodyPr>
+          <a:lstStyle/>
+          <a:p>
+            <a:endParaRPr lang="ru-RU"/>
+          </a:p>
+        </p:txBody>
+      </p:sp>
+      <p:grpSp>
+        <p:nvGrpSpPr>
+          <p:cNvPr id="3" name="Полотно 11">
+            <a:extLst>
+              <a:ext uri="{FF2B5EF4-FFF2-40B4-BE49-F238E27FC236}">
+                <a16:creationId xmlns:a16="http://schemas.microsoft.com/office/drawing/2014/main" id="{1D6769A1-C319-45D0-99EE-4B360C756733}"/>
+              </a:ext>
+            </a:extLst>
+          </p:cNvPr>
+          <p:cNvGrpSpPr>
+            <a:grpSpLocks/>
+          </p:cNvGrpSpPr>
+          <p:nvPr/>
+        </p:nvGrpSpPr>
+        <p:grpSpPr bwMode="auto">
+          <a:xfrm>
+            <a:off x="3226150" y="2028480"/>
+            <a:ext cx="4271804" cy="3444189"/>
+            <a:chOff x="17130" y="162"/>
+            <a:chExt cx="24497" cy="24369"/>
+          </a:xfrm>
+        </p:grpSpPr>
+        <p:sp>
+          <p:nvSpPr>
+            <p:cNvPr id="5" name="Надпись 2">
+              <a:extLst>
+                <a:ext uri="{FF2B5EF4-FFF2-40B4-BE49-F238E27FC236}">
+                  <a16:creationId xmlns:a16="http://schemas.microsoft.com/office/drawing/2014/main" id="{6D9A45B3-4434-469E-8659-667B5B03E02A}"/>
+                </a:ext>
+              </a:extLst>
+            </p:cNvPr>
+            <p:cNvSpPr txBox="1">
+              <a:spLocks noChangeArrowheads="1"/>
+            </p:cNvSpPr>
+            <p:nvPr/>
+          </p:nvSpPr>
+          <p:spPr bwMode="auto">
+            <a:xfrm>
+              <a:off x="17130" y="162"/>
+              <a:ext cx="21437" cy="6696"/>
+            </a:xfrm>
+            <a:prstGeom prst="rect">
+              <a:avLst/>
+            </a:prstGeom>
+            <a:solidFill>
+              <a:srgbClr val="FFFFFF"/>
+            </a:solidFill>
+            <a:ln>
+              <a:noFill/>
+            </a:ln>
+            <a:extLst>
+              <a:ext uri="{91240B29-F687-4F45-9708-019B960494DF}">
+                <a14:hiddenLine xmlns:a14="http://schemas.microsoft.com/office/drawing/2010/main" w="9525">
+                  <a:solidFill>
+                    <a:srgbClr val="000000"/>
+                  </a:solidFill>
+                  <a:miter lim="800000"/>
+                  <a:headEnd/>
+                  <a:tailEnd/>
+                </a14:hiddenLine>
+              </a:ext>
+            </a:extLst>
+          </p:spPr>
+          <p:txBody>
+            <a:bodyPr vert="horz" wrap="square" lIns="91440" tIns="45720" rIns="91440" bIns="45720" numCol="1" anchor="t" anchorCtr="0" compatLnSpc="1">
+              <a:prstTxWarp prst="textNoShape">
+                <a:avLst/>
+              </a:prstTxWarp>
+            </a:bodyPr>
+            <a:lstStyle/>
+            <a:p>
+              <a:pPr eaLnBrk="0" fontAlgn="base" hangingPunct="0">
+                <a:spcBef>
+                  <a:spcPct val="0"/>
+                </a:spcBef>
+                <a:spcAft>
+                  <a:spcPct val="0"/>
+                </a:spcAft>
+              </a:pPr>
+              <a:r>
+                <a:rPr kumimoji="0" lang="ru-RU" altLang="ru-RU" b="0" i="0" u="none" strike="noStrike" cap="none" normalizeH="0" baseline="0" dirty="0">
+                  <a:ln>
+                    <a:noFill/>
+                  </a:ln>
+                  <a:solidFill>
+                    <a:schemeClr val="tx1"/>
+                  </a:solidFill>
+                  <a:effectLst/>
+                  <a:latin typeface="Times New Roman" panose="02020603050405020304" pitchFamily="18" charset="0"/>
+                  <a:ea typeface="Calibri" panose="020F0502020204030204" pitchFamily="34" charset="0"/>
+                  <a:cs typeface="Times New Roman" panose="02020603050405020304" pitchFamily="18" charset="0"/>
+                </a:rPr>
+                <a:t>Множитель абсолютной пористости </a:t>
+              </a:r>
+              <a:r>
+                <a:rPr lang="ru-RU" altLang="ru-RU" dirty="0">
+                  <a:latin typeface="Times New Roman" panose="02020603050405020304" pitchFamily="18" charset="0"/>
+                  <a:cs typeface="Times New Roman" panose="02020603050405020304" pitchFamily="18" charset="0"/>
+                </a:rPr>
+                <a:t>в момент достижения предельной обводненности</a:t>
+              </a:r>
+              <a:endParaRPr kumimoji="0" lang="ru-RU" altLang="ru-RU" b="0" i="0" u="none" strike="noStrike" cap="none" normalizeH="0" baseline="0" dirty="0">
+                <a:ln>
+                  <a:noFill/>
+                </a:ln>
+                <a:solidFill>
+                  <a:schemeClr val="tx1"/>
+                </a:solidFill>
+                <a:effectLst/>
+                <a:latin typeface="Arial" panose="020B0604020202020204" pitchFamily="34" charset="0"/>
+              </a:endParaRPr>
+            </a:p>
+            <a:p>
+              <a:pPr marL="0" marR="0" lvl="0" indent="0" algn="l" defTabSz="914400" rtl="0" eaLnBrk="0" fontAlgn="base" latinLnBrk="0" hangingPunct="0">
+                <a:lnSpc>
+                  <a:spcPct val="100000"/>
+                </a:lnSpc>
+                <a:spcBef>
+                  <a:spcPct val="0"/>
+                </a:spcBef>
+                <a:spcAft>
+                  <a:spcPct val="0"/>
+                </a:spcAft>
+                <a:buClrTx/>
+                <a:buSzTx/>
+                <a:buFontTx/>
+                <a:buNone/>
+                <a:tabLst/>
+              </a:pPr>
+              <a:endParaRPr kumimoji="0" lang="ru-RU" altLang="ru-RU" sz="2000" b="0" i="0" u="none" strike="noStrike" cap="none" normalizeH="0" baseline="0" dirty="0">
+                <a:ln>
+                  <a:noFill/>
+                </a:ln>
+                <a:solidFill>
+                  <a:schemeClr val="tx1"/>
+                </a:solidFill>
+                <a:effectLst/>
+                <a:latin typeface="Times New Roman" panose="02020603050405020304" pitchFamily="18" charset="0"/>
+                <a:ea typeface="Calibri" panose="020F0502020204030204" pitchFamily="34" charset="0"/>
+                <a:cs typeface="Times New Roman" panose="02020603050405020304" pitchFamily="18" charset="0"/>
+              </a:endParaRPr>
+            </a:p>
+          </p:txBody>
+        </p:sp>
+        <p:sp>
+          <p:nvSpPr>
+            <p:cNvPr id="6" name="Надпись 2">
+              <a:extLst>
+                <a:ext uri="{FF2B5EF4-FFF2-40B4-BE49-F238E27FC236}">
+                  <a16:creationId xmlns:a16="http://schemas.microsoft.com/office/drawing/2014/main" id="{F63C9362-B6F7-4B9D-8B33-1B2F3A7F6F4B}"/>
+                </a:ext>
+              </a:extLst>
+            </p:cNvPr>
+            <p:cNvSpPr txBox="1">
+              <a:spLocks noChangeArrowheads="1"/>
+            </p:cNvSpPr>
+            <p:nvPr/>
+          </p:nvSpPr>
+          <p:spPr bwMode="auto">
+            <a:xfrm>
+              <a:off x="17829" y="17835"/>
+              <a:ext cx="23798" cy="6696"/>
+            </a:xfrm>
+            <a:prstGeom prst="rect">
+              <a:avLst/>
+            </a:prstGeom>
+            <a:solidFill>
+              <a:srgbClr val="FFFFFF"/>
+            </a:solidFill>
+            <a:ln>
+              <a:noFill/>
+            </a:ln>
+            <a:extLst>
+              <a:ext uri="{91240B29-F687-4F45-9708-019B960494DF}">
+                <a14:hiddenLine xmlns:a14="http://schemas.microsoft.com/office/drawing/2010/main" w="9525">
+                  <a:solidFill>
+                    <a:srgbClr val="000000"/>
+                  </a:solidFill>
+                  <a:miter lim="800000"/>
+                  <a:headEnd/>
+                  <a:tailEnd/>
+                </a14:hiddenLine>
+              </a:ext>
+            </a:extLst>
+          </p:spPr>
+          <p:txBody>
+            <a:bodyPr vert="horz" wrap="square" lIns="91440" tIns="45720" rIns="91440" bIns="45720" numCol="1" anchor="t" anchorCtr="0" compatLnSpc="1">
+              <a:prstTxWarp prst="textNoShape">
+                <a:avLst/>
+              </a:prstTxWarp>
+            </a:bodyPr>
+            <a:lstStyle/>
+            <a:p>
+              <a:pPr marL="0" marR="0" lvl="0" indent="0" defTabSz="914400" rtl="0" eaLnBrk="0" fontAlgn="base" latinLnBrk="0" hangingPunct="0">
+                <a:lnSpc>
+                  <a:spcPct val="100000"/>
+                </a:lnSpc>
+                <a:spcBef>
+                  <a:spcPct val="0"/>
+                </a:spcBef>
+                <a:spcAft>
+                  <a:spcPct val="0"/>
+                </a:spcAft>
+                <a:buClrTx/>
+                <a:buSzTx/>
+                <a:buFontTx/>
+                <a:buNone/>
+                <a:tabLst/>
+              </a:pPr>
+              <a:r>
+                <a:rPr kumimoji="0" lang="ru-RU" altLang="ru-RU" b="0" i="0" u="none" strike="noStrike" cap="none" normalizeH="0" baseline="0" dirty="0">
+                  <a:ln>
+                    <a:noFill/>
+                  </a:ln>
+                  <a:solidFill>
+                    <a:schemeClr val="tx1"/>
+                  </a:solidFill>
+                  <a:effectLst/>
+                  <a:latin typeface="Times New Roman" panose="02020603050405020304" pitchFamily="18" charset="0"/>
+                  <a:ea typeface="Calibri" panose="020F0502020204030204" pitchFamily="34" charset="0"/>
+                  <a:cs typeface="Times New Roman" panose="02020603050405020304" pitchFamily="18" charset="0"/>
+                </a:rPr>
+                <a:t>Множитель абсолютной проницаемости </a:t>
+              </a:r>
+              <a:r>
+                <a:rPr lang="ru-RU" altLang="ru-RU" dirty="0">
+                  <a:latin typeface="Times New Roman" panose="02020603050405020304" pitchFamily="18" charset="0"/>
+                  <a:cs typeface="Times New Roman" panose="02020603050405020304" pitchFamily="18" charset="0"/>
+                </a:rPr>
+                <a:t>в момент достижения предельной обводненности</a:t>
+              </a:r>
+              <a:r>
+                <a:rPr kumimoji="0" lang="ru-RU" altLang="ru-RU" b="0" i="0" u="none" strike="noStrike" cap="none" normalizeH="0" baseline="0" dirty="0">
+                  <a:ln>
+                    <a:noFill/>
+                  </a:ln>
+                  <a:solidFill>
+                    <a:schemeClr val="tx1"/>
+                  </a:solidFill>
+                  <a:effectLst/>
+                  <a:latin typeface="Times New Roman" panose="02020603050405020304" pitchFamily="18" charset="0"/>
+                  <a:ea typeface="Calibri" panose="020F0502020204030204" pitchFamily="34" charset="0"/>
+                  <a:cs typeface="Times New Roman" panose="02020603050405020304" pitchFamily="18" charset="0"/>
+                </a:rPr>
+                <a:t> </a:t>
+              </a:r>
+              <a:endParaRPr kumimoji="0" lang="ru-RU" altLang="ru-RU" b="0" i="0" u="none" strike="noStrike" cap="none" normalizeH="0" baseline="0" dirty="0">
+                <a:ln>
+                  <a:noFill/>
+                </a:ln>
+                <a:solidFill>
+                  <a:schemeClr val="tx1"/>
+                </a:solidFill>
+                <a:effectLst/>
+                <a:latin typeface="Arial" panose="020B0604020202020204" pitchFamily="34" charset="0"/>
+              </a:endParaRPr>
+            </a:p>
+          </p:txBody>
+        </p:sp>
+      </p:grpSp>
+      <p:sp>
+        <p:nvSpPr>
+          <p:cNvPr id="9" name="TextBox 8">
+            <a:extLst>
+              <a:ext uri="{FF2B5EF4-FFF2-40B4-BE49-F238E27FC236}">
+                <a16:creationId xmlns:a16="http://schemas.microsoft.com/office/drawing/2014/main" id="{EC8DDECC-35A0-4B22-9DAC-6F85DD990BFE}"/>
+              </a:ext>
+            </a:extLst>
+          </p:cNvPr>
+          <p:cNvSpPr txBox="1"/>
+          <p:nvPr/>
+        </p:nvSpPr>
+        <p:spPr>
+          <a:xfrm>
+            <a:off x="554967" y="636615"/>
+            <a:ext cx="6156960" cy="461665"/>
+          </a:xfrm>
+          <a:prstGeom prst="rect">
+            <a:avLst/>
+          </a:prstGeom>
+          <a:noFill/>
+        </p:spPr>
+        <p:txBody>
+          <a:bodyPr wrap="square">
+            <a:spAutoFit/>
+          </a:bodyPr>
+          <a:lstStyle/>
+          <a:p>
+            <a:r>
+              <a:rPr lang="ru-RU" sz="2400" dirty="0">
+                <a:latin typeface="Times New Roman" panose="02020603050405020304" pitchFamily="18" charset="0"/>
+              </a:rPr>
+              <a:t>Структурные изменения пористой среды</a:t>
+            </a:r>
+            <a:endParaRPr lang="ru-RU" sz="2400" dirty="0"/>
+          </a:p>
+        </p:txBody>
+      </p:sp>
+      <p:pic>
+        <p:nvPicPr>
+          <p:cNvPr id="10" name="Picture 2">
+            <a:extLst>
+              <a:ext uri="{FF2B5EF4-FFF2-40B4-BE49-F238E27FC236}">
+                <a16:creationId xmlns:a16="http://schemas.microsoft.com/office/drawing/2014/main" id="{531F3FD6-28F1-4A6C-BB6B-E2BA3846D3C4}"/>
+              </a:ext>
+            </a:extLst>
+          </p:cNvPr>
+          <p:cNvPicPr>
+            <a:picLocks noChangeAspect="1" noChangeArrowheads="1"/>
+          </p:cNvPicPr>
+          <p:nvPr/>
+        </p:nvPicPr>
+        <p:blipFill>
+          <a:blip r:embed="rId2">
+            <a:extLst>
+              <a:ext uri="{28A0092B-C50C-407E-A947-70E740481C1C}">
+                <a14:useLocalDpi xmlns:a14="http://schemas.microsoft.com/office/drawing/2010/main" val="0"/>
+              </a:ext>
+            </a:extLst>
+          </a:blip>
+          <a:srcRect/>
+          <a:stretch>
+            <a:fillRect/>
+          </a:stretch>
+        </p:blipFill>
+        <p:spPr bwMode="auto">
+          <a:xfrm>
+            <a:off x="298935" y="4042985"/>
+            <a:ext cx="2838343" cy="2278763"/>
+          </a:xfrm>
+          <a:prstGeom prst="rect">
+            <a:avLst/>
+          </a:prstGeom>
+          <a:noFill/>
+          <a:extLst>
+            <a:ext uri="{909E8E84-426E-40DD-AFC4-6F175D3DCCD1}">
+              <a14:hiddenFill xmlns:a14="http://schemas.microsoft.com/office/drawing/2010/main">
+                <a:solidFill>
+                  <a:srgbClr val="FFFFFF"/>
+                </a:solidFill>
+              </a14:hiddenFill>
+            </a:ext>
+          </a:extLst>
+        </p:spPr>
+      </p:pic>
+      <p:pic>
+        <p:nvPicPr>
+          <p:cNvPr id="8" name="Рисунок 7">
+            <a:extLst>
+              <a:ext uri="{FF2B5EF4-FFF2-40B4-BE49-F238E27FC236}">
+                <a16:creationId xmlns:a16="http://schemas.microsoft.com/office/drawing/2014/main" id="{55206CAE-84D6-4CB2-BDA4-34998A970928}"/>
+              </a:ext>
+            </a:extLst>
+          </p:cNvPr>
+          <p:cNvPicPr>
+            <a:picLocks noChangeAspect="1"/>
+          </p:cNvPicPr>
+          <p:nvPr/>
+        </p:nvPicPr>
+        <p:blipFill>
+          <a:blip r:embed="rId3"/>
+          <a:stretch>
+            <a:fillRect/>
+          </a:stretch>
+        </p:blipFill>
+        <p:spPr>
+          <a:xfrm>
+            <a:off x="298935" y="1482558"/>
+            <a:ext cx="2780855" cy="2226945"/>
+          </a:xfrm>
+          <a:prstGeom prst="rect">
+            <a:avLst/>
+          </a:prstGeom>
+        </p:spPr>
+      </p:pic>
+      <p:sp>
+        <p:nvSpPr>
+          <p:cNvPr id="14" name="Прямоугольник 13">
+            <a:extLst>
+              <a:ext uri="{FF2B5EF4-FFF2-40B4-BE49-F238E27FC236}">
+                <a16:creationId xmlns:a16="http://schemas.microsoft.com/office/drawing/2014/main" id="{2F73B0DE-06C4-41A7-909E-26EFC8BD13EF}"/>
+              </a:ext>
+            </a:extLst>
+          </p:cNvPr>
+          <p:cNvSpPr/>
+          <p:nvPr/>
+        </p:nvSpPr>
+        <p:spPr>
+          <a:xfrm>
+            <a:off x="8107680" y="1326405"/>
+            <a:ext cx="2648146" cy="2312433"/>
+          </a:xfrm>
+          <a:prstGeom prst="rect">
+            <a:avLst/>
+          </a:prstGeom>
+          <a:solidFill>
+            <a:schemeClr val="bg1"/>
+          </a:solidFill>
+        </p:spPr>
+        <p:style>
+          <a:lnRef idx="2">
+            <a:schemeClr val="accent1">
+              <a:shade val="50000"/>
+            </a:schemeClr>
+          </a:lnRef>
+          <a:fillRef idx="1">
+            <a:schemeClr val="accent1"/>
+          </a:fillRef>
+          <a:effectRef idx="0">
+            <a:schemeClr val="accent1"/>
+          </a:effectRef>
+          <a:fontRef idx="minor">
+            <a:schemeClr val="lt1"/>
+          </a:fontRef>
+        </p:style>
+        <p:txBody>
+          <a:bodyPr rtlCol="0" anchor="ctr"/>
+          <a:lstStyle/>
+          <a:p>
+            <a:pPr algn="ctr"/>
+            <a:endParaRPr lang="ru-RU"/>
+          </a:p>
+        </p:txBody>
+      </p:sp>
+      <p:sp>
+        <p:nvSpPr>
+          <p:cNvPr id="15" name="TextBox 14">
+            <a:extLst>
+              <a:ext uri="{FF2B5EF4-FFF2-40B4-BE49-F238E27FC236}">
+                <a16:creationId xmlns:a16="http://schemas.microsoft.com/office/drawing/2014/main" id="{AACDF662-FBBB-4ACA-9E0D-5A9B2086B880}"/>
+              </a:ext>
+            </a:extLst>
+          </p:cNvPr>
+          <p:cNvSpPr txBox="1"/>
+          <p:nvPr/>
+        </p:nvSpPr>
+        <p:spPr>
+          <a:xfrm>
+            <a:off x="8205289" y="2121644"/>
+            <a:ext cx="2526227" cy="646331"/>
+          </a:xfrm>
+          <a:prstGeom prst="rect">
+            <a:avLst/>
+          </a:prstGeom>
+          <a:noFill/>
+        </p:spPr>
+        <p:txBody>
+          <a:bodyPr wrap="square">
+            <a:spAutoFit/>
+          </a:bodyPr>
+          <a:lstStyle/>
+          <a:p>
+            <a:r>
+              <a:rPr lang="ru-RU" sz="1800" dirty="0">
+                <a:effectLst/>
+                <a:latin typeface="Times New Roman" panose="02020603050405020304" pitchFamily="18" charset="0"/>
+                <a:ea typeface="Calibri" panose="020F0502020204030204" pitchFamily="34" charset="0"/>
+              </a:rPr>
+              <a:t>Красивая </a:t>
+            </a:r>
+            <a:r>
+              <a:rPr lang="en-US" sz="1800" dirty="0">
+                <a:effectLst/>
+                <a:latin typeface="Times New Roman" panose="02020603050405020304" pitchFamily="18" charset="0"/>
+                <a:ea typeface="Calibri" panose="020F0502020204030204" pitchFamily="34" charset="0"/>
+              </a:rPr>
+              <a:t>gif-</a:t>
+            </a:r>
+            <a:r>
+              <a:rPr lang="ru-RU" sz="1800" dirty="0">
+                <a:effectLst/>
+                <a:latin typeface="Times New Roman" panose="02020603050405020304" pitchFamily="18" charset="0"/>
+                <a:ea typeface="Calibri" panose="020F0502020204030204" pitchFamily="34" charset="0"/>
+              </a:rPr>
+              <a:t>анимация множителя пористости</a:t>
+            </a:r>
+            <a:endParaRPr lang="ru-RU" dirty="0"/>
+          </a:p>
+        </p:txBody>
+      </p:sp>
+      <p:sp>
+        <p:nvSpPr>
+          <p:cNvPr id="16" name="Прямоугольник 15">
+            <a:extLst>
+              <a:ext uri="{FF2B5EF4-FFF2-40B4-BE49-F238E27FC236}">
+                <a16:creationId xmlns:a16="http://schemas.microsoft.com/office/drawing/2014/main" id="{47AD3A47-4AA9-4D12-9A78-2B6E69535F8D}"/>
+              </a:ext>
+            </a:extLst>
+          </p:cNvPr>
+          <p:cNvSpPr/>
+          <p:nvPr/>
+        </p:nvSpPr>
+        <p:spPr>
+          <a:xfrm>
+            <a:off x="8083370" y="4009315"/>
+            <a:ext cx="2648146" cy="2312433"/>
+          </a:xfrm>
+          <a:prstGeom prst="rect">
+            <a:avLst/>
+          </a:prstGeom>
+          <a:solidFill>
+            <a:schemeClr val="bg1"/>
+          </a:solidFill>
+        </p:spPr>
+        <p:style>
+          <a:lnRef idx="2">
+            <a:schemeClr val="accent1">
+              <a:shade val="50000"/>
+            </a:schemeClr>
+          </a:lnRef>
+          <a:fillRef idx="1">
+            <a:schemeClr val="accent1"/>
+          </a:fillRef>
+          <a:effectRef idx="0">
+            <a:schemeClr val="accent1"/>
+          </a:effectRef>
+          <a:fontRef idx="minor">
+            <a:schemeClr val="lt1"/>
+          </a:fontRef>
+        </p:style>
+        <p:txBody>
+          <a:bodyPr rtlCol="0" anchor="ctr"/>
+          <a:lstStyle/>
+          <a:p>
+            <a:pPr algn="ctr"/>
+            <a:endParaRPr lang="ru-RU"/>
+          </a:p>
+        </p:txBody>
+      </p:sp>
+      <p:sp>
+        <p:nvSpPr>
+          <p:cNvPr id="17" name="TextBox 16">
+            <a:extLst>
+              <a:ext uri="{FF2B5EF4-FFF2-40B4-BE49-F238E27FC236}">
+                <a16:creationId xmlns:a16="http://schemas.microsoft.com/office/drawing/2014/main" id="{7D462BC6-4E61-4CCD-B29A-8E5F41D0E7A8}"/>
+              </a:ext>
+            </a:extLst>
+          </p:cNvPr>
+          <p:cNvSpPr txBox="1"/>
+          <p:nvPr/>
+        </p:nvSpPr>
+        <p:spPr>
+          <a:xfrm>
+            <a:off x="8205289" y="4832044"/>
+            <a:ext cx="2428764" cy="923330"/>
+          </a:xfrm>
+          <a:prstGeom prst="rect">
+            <a:avLst/>
+          </a:prstGeom>
+          <a:noFill/>
+        </p:spPr>
+        <p:txBody>
+          <a:bodyPr wrap="square">
+            <a:spAutoFit/>
+          </a:bodyPr>
+          <a:lstStyle/>
+          <a:p>
+            <a:pPr algn="ctr"/>
+            <a:r>
+              <a:rPr lang="ru-RU" sz="1800" dirty="0">
+                <a:effectLst/>
+                <a:latin typeface="Times New Roman" panose="02020603050405020304" pitchFamily="18" charset="0"/>
+                <a:ea typeface="Calibri" panose="020F0502020204030204" pitchFamily="34" charset="0"/>
+              </a:rPr>
+              <a:t>Красивая </a:t>
+            </a:r>
+            <a:r>
+              <a:rPr lang="en-US" sz="1800" dirty="0">
+                <a:effectLst/>
+                <a:latin typeface="Times New Roman" panose="02020603050405020304" pitchFamily="18" charset="0"/>
+                <a:ea typeface="Calibri" panose="020F0502020204030204" pitchFamily="34" charset="0"/>
+              </a:rPr>
+              <a:t>gif-</a:t>
+            </a:r>
+            <a:r>
+              <a:rPr lang="ru-RU" sz="1800" dirty="0">
+                <a:effectLst/>
+                <a:latin typeface="Times New Roman" panose="02020603050405020304" pitchFamily="18" charset="0"/>
+                <a:ea typeface="Calibri" panose="020F0502020204030204" pitchFamily="34" charset="0"/>
+              </a:rPr>
+              <a:t>анимация множителя проницаемости</a:t>
+            </a:r>
+            <a:endParaRPr lang="ru-RU" dirty="0"/>
+          </a:p>
+        </p:txBody>
+      </p:sp>
+    </p:spTree>
+    <p:extLst>
+      <p:ext uri="{BB962C8B-B14F-4D97-AF65-F5344CB8AC3E}">
+        <p14:creationId xmlns:p14="http://schemas.microsoft.com/office/powerpoint/2010/main" val="1025445536"/>
+      </p:ext>
+    </p:extLst>
+  </p:cSld>
+  <p:clrMapOvr>
+    <a:masterClrMapping/>
+  </p:clrMapOvr>
+</p:sld>
+</file>
+
 <file path=ppt/theme/theme1.xml><?xml version="1.0" encoding="utf-8"?>
 <a:theme xmlns:a="http://schemas.openxmlformats.org/drawingml/2006/main" name="Тема Office">
   <a:themeElements>

--- a/resources/Лазарев.pptx
+++ b/resources/Лазарев.pptx
@@ -121,7 +121,7 @@
             <a:srgbClr val="A4A3A4"/>
           </p15:clr>
         </p15:guide>
-        <p15:guide id="2" pos="3795" userDrawn="1">
+        <p15:guide id="2" pos="3613" userDrawn="1">
           <p15:clr>
             <a:srgbClr val="A4A3A4"/>
           </p15:clr>
@@ -3841,8 +3841,8 @@
         </p:nvSpPr>
         <p:spPr>
           <a:xfrm>
-            <a:off x="499872" y="628601"/>
-            <a:ext cx="6156960" cy="461665"/>
+            <a:off x="526196" y="215275"/>
+            <a:ext cx="8810844" cy="584775"/>
           </a:xfrm>
           <a:prstGeom prst="rect">
             <a:avLst/>
@@ -3856,81 +3856,12 @@
           <a:lstStyle/>
           <a:p>
             <a:r>
-              <a:rPr lang="ru-RU" sz="2400" dirty="0">
+              <a:rPr lang="ru-RU" sz="3200" dirty="0">
                 <a:latin typeface="Times New Roman" panose="02020603050405020304" pitchFamily="18" charset="0"/>
               </a:rPr>
               <a:t>Изменение функции пор по размерам </a:t>
             </a:r>
-            <a:endParaRPr lang="ru-RU" sz="2400" dirty="0"/>
-          </a:p>
-        </p:txBody>
-      </p:sp>
-      <p:sp>
-        <p:nvSpPr>
-          <p:cNvPr id="7" name="Rectangle 9">
-            <a:extLst>
-              <a:ext uri="{FF2B5EF4-FFF2-40B4-BE49-F238E27FC236}">
-                <a16:creationId xmlns:a16="http://schemas.microsoft.com/office/drawing/2014/main" id="{DD7A7757-612D-482A-95E5-57BBB9DC5769}"/>
-              </a:ext>
-            </a:extLst>
-          </p:cNvPr>
-          <p:cNvSpPr>
-            <a:spLocks noChangeArrowheads="1"/>
-          </p:cNvSpPr>
-          <p:nvPr/>
-        </p:nvSpPr>
-        <p:spPr bwMode="auto">
-          <a:xfrm flipV="1">
-            <a:off x="0" y="590896"/>
-            <a:ext cx="12922375" cy="45719"/>
-          </a:xfrm>
-          <a:prstGeom prst="rect">
-            <a:avLst/>
-          </a:prstGeom>
-          <a:noFill/>
-          <a:ln>
-            <a:noFill/>
-          </a:ln>
-          <a:effectLst/>
-          <a:extLst>
-            <a:ext uri="{909E8E84-426E-40DD-AFC4-6F175D3DCCD1}">
-              <a14:hiddenFill xmlns:a14="http://schemas.microsoft.com/office/drawing/2010/main">
-                <a:solidFill>
-                  <a:schemeClr val="accent1"/>
-                </a:solidFill>
-              </a14:hiddenFill>
-            </a:ext>
-            <a:ext uri="{91240B29-F687-4F45-9708-019B960494DF}">
-              <a14:hiddenLine xmlns:a14="http://schemas.microsoft.com/office/drawing/2010/main" w="9525">
-                <a:solidFill>
-                  <a:schemeClr val="tx1"/>
-                </a:solidFill>
-                <a:miter lim="800000"/>
-                <a:headEnd/>
-                <a:tailEnd/>
-              </a14:hiddenLine>
-            </a:ext>
-            <a:ext uri="{AF507438-7753-43E0-B8FC-AC1667EBCBE1}">
-              <a14:hiddenEffects xmlns:a14="http://schemas.microsoft.com/office/drawing/2010/main">
-                <a:effectLst>
-                  <a:outerShdw dist="35921" dir="2700000" algn="ctr" rotWithShape="0">
-                    <a:schemeClr val="bg2"/>
-                  </a:outerShdw>
-                </a:effectLst>
-              </a14:hiddenEffects>
-            </a:ext>
-          </a:extLst>
-        </p:spPr>
-        <p:txBody>
-          <a:bodyPr vert="horz" wrap="square" lIns="91440" tIns="45720" rIns="91440" bIns="45720" numCol="1" anchor="ctr" anchorCtr="0" compatLnSpc="1">
-            <a:prstTxWarp prst="textNoShape">
-              <a:avLst/>
-            </a:prstTxWarp>
-            <a:spAutoFit/>
-          </a:bodyPr>
-          <a:lstStyle/>
-          <a:p>
-            <a:endParaRPr lang="ru-RU"/>
+            <a:endParaRPr lang="ru-RU" sz="3200" dirty="0"/>
           </a:p>
         </p:txBody>
       </p:sp>
@@ -3951,9 +3882,9 @@
         <p:grpSpPr bwMode="auto">
           <a:xfrm>
             <a:off x="372879" y="1352898"/>
-            <a:ext cx="6500714" cy="5268690"/>
+            <a:ext cx="3638032" cy="5268690"/>
             <a:chOff x="2734" y="11896"/>
-            <a:chExt cx="6590" cy="7273"/>
+            <a:chExt cx="3688" cy="7273"/>
           </a:xfrm>
         </p:grpSpPr>
         <p:sp>
@@ -3972,7 +3903,7 @@
           </p:nvSpPr>
           <p:spPr bwMode="auto">
             <a:xfrm>
-              <a:off x="6422" y="15095"/>
+              <a:off x="3217" y="13815"/>
               <a:ext cx="2902" cy="425"/>
             </a:xfrm>
             <a:prstGeom prst="rect">
@@ -4159,7 +4090,7 @@
           </p:nvSpPr>
           <p:spPr bwMode="auto">
             <a:xfrm>
-              <a:off x="6422" y="17558"/>
+              <a:off x="3265" y="16365"/>
               <a:ext cx="2745" cy="283"/>
             </a:xfrm>
             <a:prstGeom prst="rect">
@@ -4300,7 +4231,7 @@
         </p:nvSpPr>
         <p:spPr bwMode="auto">
           <a:xfrm>
-            <a:off x="3856394" y="1846779"/>
+            <a:off x="849034" y="1003283"/>
             <a:ext cx="3016842" cy="253103"/>
           </a:xfrm>
           <a:prstGeom prst="rect">
@@ -4377,111 +4308,42 @@
           </a:p>
         </p:txBody>
       </p:sp>
-      <p:sp>
-        <p:nvSpPr>
-          <p:cNvPr id="20" name="Прямоугольник 19">
+      <p:pic>
+        <p:nvPicPr>
+          <p:cNvPr id="4" name="Рисунок 3">
             <a:extLst>
               <a:ext uri="{FF2B5EF4-FFF2-40B4-BE49-F238E27FC236}">
-                <a16:creationId xmlns:a16="http://schemas.microsoft.com/office/drawing/2014/main" id="{335B9E3A-7072-4C3E-9056-4FD6A025833D}"/>
+                <a16:creationId xmlns:a16="http://schemas.microsoft.com/office/drawing/2014/main" id="{7EC0CD64-E2C1-4576-A25E-E0C2CCB89960}"/>
               </a:ext>
             </a:extLst>
           </p:cNvPr>
-          <p:cNvSpPr/>
+          <p:cNvPicPr>
+            <a:picLocks noChangeAspect="1"/>
+          </p:cNvPicPr>
           <p:nvPr/>
-        </p:nvSpPr>
+        </p:nvPicPr>
+        <p:blipFill>
+          <a:blip r:embed="rId5">
+            <a:extLst>
+              <a:ext uri="{28A0092B-C50C-407E-A947-70E740481C1C}">
+                <a14:useLocalDpi xmlns:a14="http://schemas.microsoft.com/office/drawing/2010/main" val="0"/>
+              </a:ext>
+            </a:extLst>
+          </a:blip>
+          <a:stretch>
+            <a:fillRect/>
+          </a:stretch>
+        </p:blipFill>
         <p:spPr>
           <a:xfrm>
-            <a:off x="6718720" y="2296146"/>
-            <a:ext cx="5302592" cy="2598347"/>
+            <a:off x="4426971" y="1779617"/>
+            <a:ext cx="7508240" cy="3503846"/>
           </a:xfrm>
           <a:prstGeom prst="rect">
             <a:avLst/>
           </a:prstGeom>
-          <a:solidFill>
-            <a:schemeClr val="bg1"/>
-          </a:solidFill>
         </p:spPr>
-        <p:style>
-          <a:lnRef idx="2">
-            <a:schemeClr val="accent1">
-              <a:shade val="50000"/>
-            </a:schemeClr>
-          </a:lnRef>
-          <a:fillRef idx="1">
-            <a:schemeClr val="accent1"/>
-          </a:fillRef>
-          <a:effectRef idx="0">
-            <a:schemeClr val="accent1"/>
-          </a:effectRef>
-          <a:fontRef idx="minor">
-            <a:schemeClr val="lt1"/>
-          </a:fontRef>
-        </p:style>
-        <p:txBody>
-          <a:bodyPr rtlCol="0" anchor="ctr"/>
-          <a:lstStyle/>
-          <a:p>
-            <a:pPr algn="ctr"/>
-            <a:endParaRPr lang="ru-RU"/>
-          </a:p>
-        </p:txBody>
-      </p:sp>
-      <p:sp>
-        <p:nvSpPr>
-          <p:cNvPr id="21" name="TextBox 20">
-            <a:extLst>
-              <a:ext uri="{FF2B5EF4-FFF2-40B4-BE49-F238E27FC236}">
-                <a16:creationId xmlns:a16="http://schemas.microsoft.com/office/drawing/2014/main" id="{CD130854-0678-42F1-BE3F-0932F562DD84}"/>
-              </a:ext>
-            </a:extLst>
-          </p:cNvPr>
-          <p:cNvSpPr txBox="1"/>
-          <p:nvPr/>
-        </p:nvSpPr>
-        <p:spPr>
-          <a:xfrm>
-            <a:off x="7835005" y="3391097"/>
-            <a:ext cx="3647890" cy="646331"/>
-          </a:xfrm>
-          <a:prstGeom prst="rect">
-            <a:avLst/>
-          </a:prstGeom>
-          <a:noFill/>
-        </p:spPr>
-        <p:txBody>
-          <a:bodyPr wrap="square">
-            <a:spAutoFit/>
-          </a:bodyPr>
-          <a:lstStyle/>
-          <a:p>
-            <a:r>
-              <a:rPr lang="ru-RU" sz="1800" dirty="0">
-                <a:effectLst/>
-                <a:latin typeface="Times New Roman" panose="02020603050405020304" pitchFamily="18" charset="0"/>
-                <a:ea typeface="Calibri" panose="020F0502020204030204" pitchFamily="34" charset="0"/>
-              </a:rPr>
-              <a:t>Красивая </a:t>
-            </a:r>
-            <a:r>
-              <a:rPr lang="en-US" sz="1800" dirty="0">
-                <a:effectLst/>
-                <a:latin typeface="Times New Roman" panose="02020603050405020304" pitchFamily="18" charset="0"/>
-                <a:ea typeface="Calibri" panose="020F0502020204030204" pitchFamily="34" charset="0"/>
-              </a:rPr>
-              <a:t>gif-</a:t>
-            </a:r>
-            <a:r>
-              <a:rPr lang="ru-RU" sz="1800" dirty="0">
-                <a:effectLst/>
-                <a:latin typeface="Times New Roman" panose="02020603050405020304" pitchFamily="18" charset="0"/>
-                <a:ea typeface="Calibri" panose="020F0502020204030204" pitchFamily="34" charset="0"/>
-              </a:rPr>
-              <a:t>анимация изменения функции пор по размерам</a:t>
-            </a:r>
-            <a:endParaRPr lang="ru-RU" dirty="0"/>
-          </a:p>
-        </p:txBody>
-      </p:sp>
+      </p:pic>
     </p:spTree>
     <p:extLst>
       <p:ext uri="{BB962C8B-B14F-4D97-AF65-F5344CB8AC3E}">
@@ -5259,8 +5121,8 @@
           </p:txBody>
         </p:sp>
       </p:grpSp>
-      <mc:AlternateContent xmlns:mc="http://schemas.openxmlformats.org/markup-compatibility/2006">
-        <mc:Choice xmlns:a14="http://schemas.microsoft.com/office/drawing/2010/main" Requires="a14">
+      <mc:AlternateContent xmlns:mc="http://schemas.openxmlformats.org/markup-compatibility/2006" xmlns:a14="http://schemas.microsoft.com/office/drawing/2010/main">
+        <mc:Choice Requires="a14">
           <p:sp>
             <p:nvSpPr>
               <p:cNvPr id="25" name="TextBox 24">
@@ -5504,7 +5366,7 @@
             </p:txBody>
           </p:sp>
         </mc:Choice>
-        <mc:Fallback>
+        <mc:Fallback xmlns="">
           <p:sp>
             <p:nvSpPr>
               <p:cNvPr id="25" name="TextBox 24">
@@ -9126,8 +8988,8 @@
           </a:p>
         </p:txBody>
       </p:sp>
-      <mc:AlternateContent xmlns:mc="http://schemas.openxmlformats.org/markup-compatibility/2006">
-        <mc:Choice xmlns:a14="http://schemas.microsoft.com/office/drawing/2010/main" Requires="a14">
+      <mc:AlternateContent xmlns:mc="http://schemas.openxmlformats.org/markup-compatibility/2006" xmlns:a14="http://schemas.microsoft.com/office/drawing/2010/main">
+        <mc:Choice Requires="a14">
           <p:sp>
             <p:nvSpPr>
               <p:cNvPr id="5" name="TextBox 4">
@@ -9594,7 +9456,7 @@
             </p:txBody>
           </p:sp>
         </mc:Choice>
-        <mc:Fallback>
+        <mc:Fallback xmlns="">
           <p:sp>
             <p:nvSpPr>
               <p:cNvPr id="5" name="TextBox 4">
@@ -9639,8 +9501,8 @@
           </p:sp>
         </mc:Fallback>
       </mc:AlternateContent>
-      <mc:AlternateContent xmlns:mc="http://schemas.openxmlformats.org/markup-compatibility/2006">
-        <mc:Choice xmlns:a14="http://schemas.microsoft.com/office/drawing/2010/main" Requires="a14">
+      <mc:AlternateContent xmlns:mc="http://schemas.openxmlformats.org/markup-compatibility/2006" xmlns:a14="http://schemas.microsoft.com/office/drawing/2010/main">
+        <mc:Choice Requires="a14">
           <p:sp>
             <p:nvSpPr>
               <p:cNvPr id="6" name="TextBox 5">
@@ -10194,7 +10056,7 @@
             </p:txBody>
           </p:sp>
         </mc:Choice>
-        <mc:Fallback>
+        <mc:Fallback xmlns="">
           <p:sp>
             <p:nvSpPr>
               <p:cNvPr id="6" name="TextBox 5">
@@ -15541,8 +15403,8 @@
         </p:nvSpPr>
         <p:spPr>
           <a:xfrm>
-            <a:off x="554967" y="636615"/>
-            <a:ext cx="6156960" cy="461665"/>
+            <a:off x="453366" y="343883"/>
+            <a:ext cx="7528403" cy="584775"/>
           </a:xfrm>
           <a:prstGeom prst="rect">
             <a:avLst/>
@@ -15556,12 +15418,12 @@
           <a:lstStyle/>
           <a:p>
             <a:r>
-              <a:rPr lang="ru-RU" sz="2400" dirty="0">
+              <a:rPr lang="ru-RU" sz="3200" dirty="0">
                 <a:latin typeface="Times New Roman" panose="02020603050405020304" pitchFamily="18" charset="0"/>
               </a:rPr>
               <a:t>Структурные изменения пористой среды</a:t>
             </a:r>
-            <a:endParaRPr lang="ru-RU" sz="2400" dirty="0"/>
+            <a:endParaRPr lang="ru-RU" sz="3200" dirty="0"/>
           </a:p>
         </p:txBody>
       </p:sp>
